--- a/FYP document/FastGrid_FYP1_Defense_UPDATED.pptx
+++ b/FYP document/FastGrid_FYP1_Defense_UPDATED.pptx
@@ -5,7 +5,7 @@
     <p:sldMasterId id="2147483684" r:id="rId1"/>
   </p:sldMasterIdLst>
   <p:notesMasterIdLst>
-    <p:notesMasterId r:id="rId14"/>
+    <p:notesMasterId r:id="rId34"/>
   </p:notesMasterIdLst>
   <p:sldIdLst>
     <p:sldId id="258" r:id="rId2"/>
@@ -13,33 +13,33 @@
     <p:sldId id="260" r:id="rId4"/>
     <p:sldId id="267" r:id="rId5"/>
     <p:sldId id="261" r:id="rId6"/>
-    <p:sldId id="270" r:id="rId19"/>
-    <p:sldId id="262" r:id="rId7"/>
-    <p:sldId id="271" r:id="rId20"/>
-    <p:sldId id="263" r:id="rId8"/>
-    <p:sldId id="272" r:id="rId21"/>
-    <p:sldId id="273" r:id="rId22"/>
-    <p:sldId id="264" r:id="rId9"/>
-    <p:sldId id="265" r:id="rId10"/>
-    <p:sldId id="268" r:id="rId11"/>
-    <p:sldId id="269" r:id="rId12"/>
-    <p:sldId id="274" r:id="rId23"/>
-    <p:sldId id="275" r:id="rId24"/>
-    <p:sldId id="276" r:id="rId25"/>
-    <p:sldId id="277" r:id="rId26"/>
-    <p:sldId id="278" r:id="rId27"/>
-    <p:sldId id="279" r:id="rId28"/>
-    <p:sldId id="280" r:id="rId29"/>
-    <p:sldId id="281" r:id="rId30"/>
-    <p:sldId id="282" r:id="rId31"/>
-    <p:sldId id="283" r:id="rId32"/>
-    <p:sldId id="284" r:id="rId33"/>
-    <p:sldId id="285" r:id="rId34"/>
-    <p:sldId id="286" r:id="rId35"/>
-    <p:sldId id="266" r:id="rId13"/>
-    <p:sldId id="287" r:id="rId36"/>
-    <p:sldId id="288" r:id="rId37"/>
-    <p:sldId id="289" r:id="rId38"/>
+    <p:sldId id="270" r:id="rId7"/>
+    <p:sldId id="262" r:id="rId8"/>
+    <p:sldId id="271" r:id="rId9"/>
+    <p:sldId id="263" r:id="rId10"/>
+    <p:sldId id="272" r:id="rId11"/>
+    <p:sldId id="273" r:id="rId12"/>
+    <p:sldId id="264" r:id="rId13"/>
+    <p:sldId id="265" r:id="rId14"/>
+    <p:sldId id="268" r:id="rId15"/>
+    <p:sldId id="269" r:id="rId16"/>
+    <p:sldId id="274" r:id="rId17"/>
+    <p:sldId id="275" r:id="rId18"/>
+    <p:sldId id="276" r:id="rId19"/>
+    <p:sldId id="277" r:id="rId20"/>
+    <p:sldId id="278" r:id="rId21"/>
+    <p:sldId id="279" r:id="rId22"/>
+    <p:sldId id="280" r:id="rId23"/>
+    <p:sldId id="281" r:id="rId24"/>
+    <p:sldId id="282" r:id="rId25"/>
+    <p:sldId id="283" r:id="rId26"/>
+    <p:sldId id="284" r:id="rId27"/>
+    <p:sldId id="285" r:id="rId28"/>
+    <p:sldId id="286" r:id="rId29"/>
+    <p:sldId id="266" r:id="rId30"/>
+    <p:sldId id="287" r:id="rId31"/>
+    <p:sldId id="288" r:id="rId32"/>
+    <p:sldId id="289" r:id="rId33"/>
   </p:sldIdLst>
   <p:sldSz cx="9144000" cy="6858000" type="screen4x3"/>
   <p:notesSz cx="6858000" cy="9144000"/>
@@ -6606,7 +6606,7 @@
 </file>
 
 <file path=ppt/notesSlides/notesSlide1.xml><?xml version="1.0" encoding="utf-8"?>
-<p:notes xmlns:a="http://schemas.openxmlformats.org/drawingml/2006/main" xmlns:p="http://schemas.openxmlformats.org/presentationml/2006/main" xmlns:r="http://schemas.openxmlformats.org/officeDocument/2006/relationships">
+<p:notes xmlns:a="http://schemas.openxmlformats.org/drawingml/2006/main" xmlns:r="http://schemas.openxmlformats.org/officeDocument/2006/relationships" xmlns:p="http://schemas.openxmlformats.org/presentationml/2006/main">
   <p:cSld>
     <p:spTree>
       <p:nvGrpSpPr>
@@ -6626,7 +6626,7 @@
         <p:nvSpPr>
           <p:cNvPr id="2" name="Slide Image Placeholder 1"/>
           <p:cNvSpPr>
-            <a:spLocks noGrp="1"/>
+            <a:spLocks noGrp="1" noRot="1" noChangeAspect="1"/>
           </p:cNvSpPr>
           <p:nvPr>
             <p:ph type="sldImg" idx="2"/>
@@ -6641,7 +6641,7 @@
             <a:spLocks noGrp="1"/>
           </p:cNvSpPr>
           <p:nvPr>
-            <p:ph type="body" idx="3" sz="quarter"/>
+            <p:ph type="body" sz="quarter" idx="3"/>
           </p:nvPr>
         </p:nvSpPr>
         <p:spPr/>
@@ -6650,17 +6650,7 @@
           <a:lstStyle/>
           <a:p>
             <a:r>
-              <a:t>This plan is taken straight from the signed sign-off sheet, so every date and agenda item is verifiable - do not paraphrase it on the spot.</a:t>
-            </a:r>
-          </a:p>
-          <a:p>
-            <a:r>
-              <a:t>Phase gates: M2 stack confirmed, M4 SRS signed off, M6 architecture and CI/CD design signed off, M8 presentation and PoC demo to the panel.</a:t>
-            </a:r>
-          </a:p>
-          <a:p>
-            <a:r>
-              <a:t>The Gantt chart two slides later is the same plan drawn against those eight meetings.</a:t>
+              <a:t>Be direct: we over-delivered on the library and the pipeline, and deliberately deferred the cloud dashboard. The reason the feature set grew is that you cannot benchmark a renderer honestly without triggers, grouping and live updates inside the workload.</a:t>
             </a:r>
           </a:p>
         </p:txBody>
@@ -6672,7 +6662,7 @@
             <a:spLocks noGrp="1"/>
           </p:cNvSpPr>
           <p:nvPr>
-            <p:ph type="sldNum" idx="5" sz="quarter"/>
+            <p:ph type="sldNum" sz="quarter" idx="5"/>
           </p:nvPr>
         </p:nvSpPr>
         <p:spPr/>
@@ -6686,7 +6676,7 @@
 </file>
 
 <file path=ppt/notesSlides/notesSlide10.xml><?xml version="1.0" encoding="utf-8"?>
-<p:notes xmlns:a="http://schemas.openxmlformats.org/drawingml/2006/main" xmlns:p="http://schemas.openxmlformats.org/presentationml/2006/main" xmlns:r="http://schemas.openxmlformats.org/officeDocument/2006/relationships">
+<p:notes xmlns:a="http://schemas.openxmlformats.org/drawingml/2006/main" xmlns:r="http://schemas.openxmlformats.org/officeDocument/2006/relationships" xmlns:p="http://schemas.openxmlformats.org/presentationml/2006/main">
   <p:cSld>
     <p:spTree>
       <p:nvGrpSpPr>
@@ -6706,7 +6696,7 @@
         <p:nvSpPr>
           <p:cNvPr id="2" name="Slide Image Placeholder 1"/>
           <p:cNvSpPr>
-            <a:spLocks noGrp="1"/>
+            <a:spLocks noGrp="1" noRot="1" noChangeAspect="1"/>
           </p:cNvSpPr>
           <p:nvPr>
             <p:ph type="sldImg" idx="2"/>
@@ -6721,7 +6711,7 @@
             <a:spLocks noGrp="1"/>
           </p:cNvSpPr>
           <p:nvPr>
-            <p:ph type="body" idx="3" sz="quarter"/>
+            <p:ph type="body" sz="quarter" idx="3"/>
           </p:nvPr>
         </p:nvSpPr>
         <p:spPr/>
@@ -6742,7 +6732,7 @@
             <a:spLocks noGrp="1"/>
           </p:cNvSpPr>
           <p:nvPr>
-            <p:ph type="sldNum" idx="5" sz="quarter"/>
+            <p:ph type="sldNum" sz="quarter" idx="5"/>
           </p:nvPr>
         </p:nvSpPr>
         <p:spPr/>
@@ -6756,7 +6746,7 @@
 </file>
 
 <file path=ppt/notesSlides/notesSlide11.xml><?xml version="1.0" encoding="utf-8"?>
-<p:notes xmlns:a="http://schemas.openxmlformats.org/drawingml/2006/main" xmlns:p="http://schemas.openxmlformats.org/presentationml/2006/main" xmlns:r="http://schemas.openxmlformats.org/officeDocument/2006/relationships">
+<p:notes xmlns:a="http://schemas.openxmlformats.org/drawingml/2006/main" xmlns:r="http://schemas.openxmlformats.org/officeDocument/2006/relationships" xmlns:p="http://schemas.openxmlformats.org/presentationml/2006/main">
   <p:cSld>
     <p:spTree>
       <p:nvGrpSpPr>
@@ -6776,7 +6766,7 @@
         <p:nvSpPr>
           <p:cNvPr id="2" name="Slide Image Placeholder 1"/>
           <p:cNvSpPr>
-            <a:spLocks noGrp="1"/>
+            <a:spLocks noGrp="1" noRot="1" noChangeAspect="1"/>
           </p:cNvSpPr>
           <p:nvPr>
             <p:ph type="sldImg" idx="2"/>
@@ -6791,7 +6781,7 @@
             <a:spLocks noGrp="1"/>
           </p:cNvSpPr>
           <p:nvPr>
-            <p:ph type="body" idx="3" sz="quarter"/>
+            <p:ph type="body" sz="quarter" idx="3"/>
           </p:nvPr>
         </p:nvSpPr>
         <p:spPr/>
@@ -6812,7 +6802,7 @@
             <a:spLocks noGrp="1"/>
           </p:cNvSpPr>
           <p:nvPr>
-            <p:ph type="sldNum" idx="5" sz="quarter"/>
+            <p:ph type="sldNum" sz="quarter" idx="5"/>
           </p:nvPr>
         </p:nvSpPr>
         <p:spPr/>
@@ -6826,7 +6816,7 @@
 </file>
 
 <file path=ppt/notesSlides/notesSlide12.xml><?xml version="1.0" encoding="utf-8"?>
-<p:notes xmlns:a="http://schemas.openxmlformats.org/drawingml/2006/main" xmlns:p="http://schemas.openxmlformats.org/presentationml/2006/main" xmlns:r="http://schemas.openxmlformats.org/officeDocument/2006/relationships">
+<p:notes xmlns:a="http://schemas.openxmlformats.org/drawingml/2006/main" xmlns:r="http://schemas.openxmlformats.org/officeDocument/2006/relationships" xmlns:p="http://schemas.openxmlformats.org/presentationml/2006/main">
   <p:cSld>
     <p:spTree>
       <p:nvGrpSpPr>
@@ -6846,7 +6836,7 @@
         <p:nvSpPr>
           <p:cNvPr id="2" name="Slide Image Placeholder 1"/>
           <p:cNvSpPr>
-            <a:spLocks noGrp="1"/>
+            <a:spLocks noGrp="1" noRot="1" noChangeAspect="1"/>
           </p:cNvSpPr>
           <p:nvPr>
             <p:ph type="sldImg" idx="2"/>
@@ -6861,7 +6851,7 @@
             <a:spLocks noGrp="1"/>
           </p:cNvSpPr>
           <p:nvPr>
-            <p:ph type="body" idx="3" sz="quarter"/>
+            <p:ph type="body" sz="quarter" idx="3"/>
           </p:nvPr>
         </p:nvSpPr>
         <p:spPr/>
@@ -6887,7 +6877,7 @@
             <a:spLocks noGrp="1"/>
           </p:cNvSpPr>
           <p:nvPr>
-            <p:ph type="sldNum" idx="5" sz="quarter"/>
+            <p:ph type="sldNum" sz="quarter" idx="5"/>
           </p:nvPr>
         </p:nvSpPr>
         <p:spPr/>
@@ -6901,7 +6891,7 @@
 </file>
 
 <file path=ppt/notesSlides/notesSlide13.xml><?xml version="1.0" encoding="utf-8"?>
-<p:notes xmlns:a="http://schemas.openxmlformats.org/drawingml/2006/main" xmlns:p="http://schemas.openxmlformats.org/presentationml/2006/main" xmlns:r="http://schemas.openxmlformats.org/officeDocument/2006/relationships">
+<p:notes xmlns:a="http://schemas.openxmlformats.org/drawingml/2006/main" xmlns:r="http://schemas.openxmlformats.org/officeDocument/2006/relationships" xmlns:p="http://schemas.openxmlformats.org/presentationml/2006/main">
   <p:cSld>
     <p:spTree>
       <p:nvGrpSpPr>
@@ -6921,7 +6911,7 @@
         <p:nvSpPr>
           <p:cNvPr id="2" name="Slide Image Placeholder 1"/>
           <p:cNvSpPr>
-            <a:spLocks noGrp="1"/>
+            <a:spLocks noGrp="1" noRot="1" noChangeAspect="1"/>
           </p:cNvSpPr>
           <p:nvPr>
             <p:ph type="sldImg" idx="2"/>
@@ -6936,7 +6926,7 @@
             <a:spLocks noGrp="1"/>
           </p:cNvSpPr>
           <p:nvPr>
-            <p:ph type="body" idx="3" sz="quarter"/>
+            <p:ph type="body" sz="quarter" idx="3"/>
           </p:nvPr>
         </p:nvSpPr>
         <p:spPr/>
@@ -6957,7 +6947,7 @@
             <a:spLocks noGrp="1"/>
           </p:cNvSpPr>
           <p:nvPr>
-            <p:ph type="sldNum" idx="5" sz="quarter"/>
+            <p:ph type="sldNum" sz="quarter" idx="5"/>
           </p:nvPr>
         </p:nvSpPr>
         <p:spPr/>
@@ -6971,7 +6961,7 @@
 </file>
 
 <file path=ppt/notesSlides/notesSlide14.xml><?xml version="1.0" encoding="utf-8"?>
-<p:notes xmlns:a="http://schemas.openxmlformats.org/drawingml/2006/main" xmlns:p="http://schemas.openxmlformats.org/presentationml/2006/main" xmlns:r="http://schemas.openxmlformats.org/officeDocument/2006/relationships">
+<p:notes xmlns:a="http://schemas.openxmlformats.org/drawingml/2006/main" xmlns:r="http://schemas.openxmlformats.org/officeDocument/2006/relationships" xmlns:p="http://schemas.openxmlformats.org/presentationml/2006/main">
   <p:cSld>
     <p:spTree>
       <p:nvGrpSpPr>
@@ -6991,7 +6981,7 @@
         <p:nvSpPr>
           <p:cNvPr id="2" name="Slide Image Placeholder 1"/>
           <p:cNvSpPr>
-            <a:spLocks noGrp="1"/>
+            <a:spLocks noGrp="1" noRot="1" noChangeAspect="1"/>
           </p:cNvSpPr>
           <p:nvPr>
             <p:ph type="sldImg" idx="2"/>
@@ -7006,7 +6996,7 @@
             <a:spLocks noGrp="1"/>
           </p:cNvSpPr>
           <p:nvPr>
-            <p:ph type="body" idx="3" sz="quarter"/>
+            <p:ph type="body" sz="quarter" idx="3"/>
           </p:nvPr>
         </p:nvSpPr>
         <p:spPr/>
@@ -7027,7 +7017,7 @@
             <a:spLocks noGrp="1"/>
           </p:cNvSpPr>
           <p:nvPr>
-            <p:ph type="sldNum" idx="5" sz="quarter"/>
+            <p:ph type="sldNum" sz="quarter" idx="5"/>
           </p:nvPr>
         </p:nvSpPr>
         <p:spPr/>
@@ -7041,7 +7031,7 @@
 </file>
 
 <file path=ppt/notesSlides/notesSlide15.xml><?xml version="1.0" encoding="utf-8"?>
-<p:notes xmlns:a="http://schemas.openxmlformats.org/drawingml/2006/main" xmlns:p="http://schemas.openxmlformats.org/presentationml/2006/main" xmlns:r="http://schemas.openxmlformats.org/officeDocument/2006/relationships">
+<p:notes xmlns:a="http://schemas.openxmlformats.org/drawingml/2006/main" xmlns:r="http://schemas.openxmlformats.org/officeDocument/2006/relationships" xmlns:p="http://schemas.openxmlformats.org/presentationml/2006/main">
   <p:cSld>
     <p:spTree>
       <p:nvGrpSpPr>
@@ -7061,7 +7051,7 @@
         <p:nvSpPr>
           <p:cNvPr id="2" name="Slide Image Placeholder 1"/>
           <p:cNvSpPr>
-            <a:spLocks noGrp="1"/>
+            <a:spLocks noGrp="1" noRot="1" noChangeAspect="1"/>
           </p:cNvSpPr>
           <p:nvPr>
             <p:ph type="sldImg" idx="2"/>
@@ -7076,7 +7066,7 @@
             <a:spLocks noGrp="1"/>
           </p:cNvSpPr>
           <p:nvPr>
-            <p:ph type="body" idx="3" sz="quarter"/>
+            <p:ph type="body" sz="quarter" idx="3"/>
           </p:nvPr>
         </p:nvSpPr>
         <p:spPr/>
@@ -7102,7 +7092,7 @@
             <a:spLocks noGrp="1"/>
           </p:cNvSpPr>
           <p:nvPr>
-            <p:ph type="sldNum" idx="5" sz="quarter"/>
+            <p:ph type="sldNum" sz="quarter" idx="5"/>
           </p:nvPr>
         </p:nvSpPr>
         <p:spPr/>
@@ -7116,7 +7106,7 @@
 </file>
 
 <file path=ppt/notesSlides/notesSlide16.xml><?xml version="1.0" encoding="utf-8"?>
-<p:notes xmlns:a="http://schemas.openxmlformats.org/drawingml/2006/main" xmlns:p="http://schemas.openxmlformats.org/presentationml/2006/main" xmlns:r="http://schemas.openxmlformats.org/officeDocument/2006/relationships">
+<p:notes xmlns:a="http://schemas.openxmlformats.org/drawingml/2006/main" xmlns:r="http://schemas.openxmlformats.org/officeDocument/2006/relationships" xmlns:p="http://schemas.openxmlformats.org/presentationml/2006/main">
   <p:cSld>
     <p:spTree>
       <p:nvGrpSpPr>
@@ -7136,7 +7126,7 @@
         <p:nvSpPr>
           <p:cNvPr id="2" name="Slide Image Placeholder 1"/>
           <p:cNvSpPr>
-            <a:spLocks noGrp="1"/>
+            <a:spLocks noGrp="1" noRot="1" noChangeAspect="1"/>
           </p:cNvSpPr>
           <p:nvPr>
             <p:ph type="sldImg" idx="2"/>
@@ -7151,7 +7141,7 @@
             <a:spLocks noGrp="1"/>
           </p:cNvSpPr>
           <p:nvPr>
-            <p:ph type="body" idx="3" sz="quarter"/>
+            <p:ph type="body" sz="quarter" idx="3"/>
           </p:nvPr>
         </p:nvSpPr>
         <p:spPr/>
@@ -7172,7 +7162,7 @@
             <a:spLocks noGrp="1"/>
           </p:cNvSpPr>
           <p:nvPr>
-            <p:ph type="sldNum" idx="5" sz="quarter"/>
+            <p:ph type="sldNum" sz="quarter" idx="5"/>
           </p:nvPr>
         </p:nvSpPr>
         <p:spPr/>
@@ -7186,7 +7176,7 @@
 </file>
 
 <file path=ppt/notesSlides/notesSlide17.xml><?xml version="1.0" encoding="utf-8"?>
-<p:notes xmlns:a="http://schemas.openxmlformats.org/drawingml/2006/main" xmlns:p="http://schemas.openxmlformats.org/presentationml/2006/main" xmlns:r="http://schemas.openxmlformats.org/officeDocument/2006/relationships">
+<p:notes xmlns:a="http://schemas.openxmlformats.org/drawingml/2006/main" xmlns:r="http://schemas.openxmlformats.org/officeDocument/2006/relationships" xmlns:p="http://schemas.openxmlformats.org/presentationml/2006/main">
   <p:cSld>
     <p:spTree>
       <p:nvGrpSpPr>
@@ -7206,7 +7196,7 @@
         <p:nvSpPr>
           <p:cNvPr id="2" name="Slide Image Placeholder 1"/>
           <p:cNvSpPr>
-            <a:spLocks noGrp="1"/>
+            <a:spLocks noGrp="1" noRot="1" noChangeAspect="1"/>
           </p:cNvSpPr>
           <p:nvPr>
             <p:ph type="sldImg" idx="2"/>
@@ -7221,7 +7211,7 @@
             <a:spLocks noGrp="1"/>
           </p:cNvSpPr>
           <p:nvPr>
-            <p:ph type="body" idx="3" sz="quarter"/>
+            <p:ph type="body" sz="quarter" idx="3"/>
           </p:nvPr>
         </p:nvSpPr>
         <p:spPr/>
@@ -7242,7 +7232,7 @@
             <a:spLocks noGrp="1"/>
           </p:cNvSpPr>
           <p:nvPr>
-            <p:ph type="sldNum" idx="5" sz="quarter"/>
+            <p:ph type="sldNum" sz="quarter" idx="5"/>
           </p:nvPr>
         </p:nvSpPr>
         <p:spPr/>
@@ -7256,7 +7246,7 @@
 </file>
 
 <file path=ppt/notesSlides/notesSlide18.xml><?xml version="1.0" encoding="utf-8"?>
-<p:notes xmlns:a="http://schemas.openxmlformats.org/drawingml/2006/main" xmlns:p="http://schemas.openxmlformats.org/presentationml/2006/main" xmlns:r="http://schemas.openxmlformats.org/officeDocument/2006/relationships">
+<p:notes xmlns:a="http://schemas.openxmlformats.org/drawingml/2006/main" xmlns:r="http://schemas.openxmlformats.org/officeDocument/2006/relationships" xmlns:p="http://schemas.openxmlformats.org/presentationml/2006/main">
   <p:cSld>
     <p:spTree>
       <p:nvGrpSpPr>
@@ -7276,7 +7266,7 @@
         <p:nvSpPr>
           <p:cNvPr id="2" name="Slide Image Placeholder 1"/>
           <p:cNvSpPr>
-            <a:spLocks noGrp="1"/>
+            <a:spLocks noGrp="1" noRot="1" noChangeAspect="1"/>
           </p:cNvSpPr>
           <p:nvPr>
             <p:ph type="sldImg" idx="2"/>
@@ -7291,7 +7281,7 @@
             <a:spLocks noGrp="1"/>
           </p:cNvSpPr>
           <p:nvPr>
-            <p:ph type="body" idx="3" sz="quarter"/>
+            <p:ph type="body" sz="quarter" idx="3"/>
           </p:nvPr>
         </p:nvSpPr>
         <p:spPr/>
@@ -7312,7 +7302,7 @@
             <a:spLocks noGrp="1"/>
           </p:cNvSpPr>
           <p:nvPr>
-            <p:ph type="sldNum" idx="5" sz="quarter"/>
+            <p:ph type="sldNum" sz="quarter" idx="5"/>
           </p:nvPr>
         </p:nvSpPr>
         <p:spPr/>
@@ -7326,7 +7316,7 @@
 </file>
 
 <file path=ppt/notesSlides/notesSlide19.xml><?xml version="1.0" encoding="utf-8"?>
-<p:notes xmlns:a="http://schemas.openxmlformats.org/drawingml/2006/main" xmlns:p="http://schemas.openxmlformats.org/presentationml/2006/main" xmlns:r="http://schemas.openxmlformats.org/officeDocument/2006/relationships">
+<p:notes xmlns:a="http://schemas.openxmlformats.org/drawingml/2006/main" xmlns:r="http://schemas.openxmlformats.org/officeDocument/2006/relationships" xmlns:p="http://schemas.openxmlformats.org/presentationml/2006/main">
   <p:cSld>
     <p:spTree>
       <p:nvGrpSpPr>
@@ -7346,7 +7336,7 @@
         <p:nvSpPr>
           <p:cNvPr id="2" name="Slide Image Placeholder 1"/>
           <p:cNvSpPr>
-            <a:spLocks noGrp="1"/>
+            <a:spLocks noGrp="1" noRot="1" noChangeAspect="1"/>
           </p:cNvSpPr>
           <p:nvPr>
             <p:ph type="sldImg" idx="2"/>
@@ -7361,7 +7351,7 @@
             <a:spLocks noGrp="1"/>
           </p:cNvSpPr>
           <p:nvPr>
-            <p:ph type="body" idx="3" sz="quarter"/>
+            <p:ph type="body" sz="quarter" idx="3"/>
           </p:nvPr>
         </p:nvSpPr>
         <p:spPr/>
@@ -7387,7 +7377,7 @@
             <a:spLocks noGrp="1"/>
           </p:cNvSpPr>
           <p:nvPr>
-            <p:ph type="sldNum" idx="5" sz="quarter"/>
+            <p:ph type="sldNum" sz="quarter" idx="5"/>
           </p:nvPr>
         </p:nvSpPr>
         <p:spPr/>
@@ -7401,7 +7391,7 @@
 </file>
 
 <file path=ppt/notesSlides/notesSlide2.xml><?xml version="1.0" encoding="utf-8"?>
-<p:notes xmlns:a="http://schemas.openxmlformats.org/drawingml/2006/main" xmlns:p="http://schemas.openxmlformats.org/presentationml/2006/main" xmlns:r="http://schemas.openxmlformats.org/officeDocument/2006/relationships">
+<p:notes xmlns:a="http://schemas.openxmlformats.org/drawingml/2006/main" xmlns:r="http://schemas.openxmlformats.org/officeDocument/2006/relationships" xmlns:p="http://schemas.openxmlformats.org/presentationml/2006/main">
   <p:cSld>
     <p:spTree>
       <p:nvGrpSpPr>
@@ -7421,7 +7411,7 @@
         <p:nvSpPr>
           <p:cNvPr id="2" name="Slide Image Placeholder 1"/>
           <p:cNvSpPr>
-            <a:spLocks noGrp="1"/>
+            <a:spLocks noGrp="1" noRot="1" noChangeAspect="1"/>
           </p:cNvSpPr>
           <p:nvPr>
             <p:ph type="sldImg" idx="2"/>
@@ -7436,7 +7426,7 @@
             <a:spLocks noGrp="1"/>
           </p:cNvSpPr>
           <p:nvPr>
-            <p:ph type="body" idx="3" sz="quarter"/>
+            <p:ph type="body" sz="quarter" idx="3"/>
           </p:nvPr>
         </p:nvSpPr>
         <p:spPr/>
@@ -7445,42 +7435,7 @@
           <a:lstStyle/>
           <a:p>
             <a:r>
-              <a:t>Run SampleApplicationV2 - it opens on DemoWindow with seven tabs.</a:t>
-            </a:r>
-          </a:p>
-          <a:p>
-            <a:r>
-              <a:t>1) 100K Stress Test -&gt; press 100,000, read the numbers, scroll, then press 1,000,000 and show the SAME frame time. That is the whole thesis in one click.</a:t>
-            </a:r>
-          </a:p>
-          <a:p>
-            <a:r>
-              <a:t>2) Tick 'Live ticks' - 2,000 rows change every 100 ms and it still holds.</a:t>
-            </a:r>
-          </a:p>
-          <a:p>
-            <a:r>
-              <a:t>3) All Features tab -&gt; ApplyGroup, ExpandAllRows, GetAllPercentiles, header theming.</a:t>
-            </a:r>
-          </a:p>
-          <a:p>
-            <a:r>
-              <a:t>4) Multi-Window Test -&gt; 'Tile 4 Windows'.</a:t>
-            </a:r>
-          </a:p>
-          <a:p>
-            <a:r>
-              <a:t>5) Row Drag -&gt; open the drop-target window and drag rows out.</a:t>
-            </a:r>
-          </a:p>
-          <a:p>
-            <a:r>
-              <a:t>6) Test Explorer -&gt; 552 green.</a:t>
-            </a:r>
-          </a:p>
-          <a:p>
-            <a:r>
-              <a:t>Say plainly that the rubric milestone was 30% and the delivered work exceeds it.</a:t>
+              <a:t>Everything here is free or student-licensed, which is what the Budget slide claims. SkiaSharp is the only substantive third-party runtime dependency.</a:t>
             </a:r>
           </a:p>
         </p:txBody>
@@ -7492,7 +7447,7 @@
             <a:spLocks noGrp="1"/>
           </p:cNvSpPr>
           <p:nvPr>
-            <p:ph type="sldNum" idx="5" sz="quarter"/>
+            <p:ph type="sldNum" sz="quarter" idx="5"/>
           </p:nvPr>
         </p:nvSpPr>
         <p:spPr/>
@@ -7506,7 +7461,7 @@
 </file>
 
 <file path=ppt/notesSlides/notesSlide20.xml><?xml version="1.0" encoding="utf-8"?>
-<p:notes xmlns:a="http://schemas.openxmlformats.org/drawingml/2006/main" xmlns:p="http://schemas.openxmlformats.org/presentationml/2006/main" xmlns:r="http://schemas.openxmlformats.org/officeDocument/2006/relationships">
+<p:notes xmlns:a="http://schemas.openxmlformats.org/drawingml/2006/main" xmlns:r="http://schemas.openxmlformats.org/officeDocument/2006/relationships" xmlns:p="http://schemas.openxmlformats.org/presentationml/2006/main">
   <p:cSld>
     <p:spTree>
       <p:nvGrpSpPr>
@@ -7526,7 +7481,7 @@
         <p:nvSpPr>
           <p:cNvPr id="2" name="Slide Image Placeholder 1"/>
           <p:cNvSpPr>
-            <a:spLocks noGrp="1"/>
+            <a:spLocks noGrp="1" noRot="1" noChangeAspect="1"/>
           </p:cNvSpPr>
           <p:nvPr>
             <p:ph type="sldImg" idx="2"/>
@@ -7541,7 +7496,7 @@
             <a:spLocks noGrp="1"/>
           </p:cNvSpPr>
           <p:nvPr>
-            <p:ph type="body" idx="3" sz="quarter"/>
+            <p:ph type="body" sz="quarter" idx="3"/>
           </p:nvPr>
         </p:nvSpPr>
         <p:spPr/>
@@ -7562,7 +7517,7 @@
             <a:spLocks noGrp="1"/>
           </p:cNvSpPr>
           <p:nvPr>
-            <p:ph type="sldNum" idx="5" sz="quarter"/>
+            <p:ph type="sldNum" sz="quarter" idx="5"/>
           </p:nvPr>
         </p:nvSpPr>
         <p:spPr/>
@@ -7576,7 +7531,7 @@
 </file>
 
 <file path=ppt/notesSlides/notesSlide21.xml><?xml version="1.0" encoding="utf-8"?>
-<p:notes xmlns:a="http://schemas.openxmlformats.org/drawingml/2006/main" xmlns:p="http://schemas.openxmlformats.org/presentationml/2006/main" xmlns:r="http://schemas.openxmlformats.org/officeDocument/2006/relationships">
+<p:notes xmlns:a="http://schemas.openxmlformats.org/drawingml/2006/main" xmlns:r="http://schemas.openxmlformats.org/officeDocument/2006/relationships" xmlns:p="http://schemas.openxmlformats.org/presentationml/2006/main">
   <p:cSld>
     <p:spTree>
       <p:nvGrpSpPr>
@@ -7596,7 +7551,7 @@
         <p:nvSpPr>
           <p:cNvPr id="2" name="Slide Image Placeholder 1"/>
           <p:cNvSpPr>
-            <a:spLocks noGrp="1"/>
+            <a:spLocks noGrp="1" noRot="1" noChangeAspect="1"/>
           </p:cNvSpPr>
           <p:nvPr>
             <p:ph type="sldImg" idx="2"/>
@@ -7611,7 +7566,7 @@
             <a:spLocks noGrp="1"/>
           </p:cNvSpPr>
           <p:nvPr>
-            <p:ph type="body" idx="3" sz="quarter"/>
+            <p:ph type="body" sz="quarter" idx="3"/>
           </p:nvPr>
         </p:nvSpPr>
         <p:spPr/>
@@ -7632,7 +7587,7 @@
             <a:spLocks noGrp="1"/>
           </p:cNvSpPr>
           <p:nvPr>
-            <p:ph type="sldNum" idx="5" sz="quarter"/>
+            <p:ph type="sldNum" sz="quarter" idx="5"/>
           </p:nvPr>
         </p:nvSpPr>
         <p:spPr/>
@@ -7646,7 +7601,7 @@
 </file>
 
 <file path=ppt/notesSlides/notesSlide22.xml><?xml version="1.0" encoding="utf-8"?>
-<p:notes xmlns:a="http://schemas.openxmlformats.org/drawingml/2006/main" xmlns:p="http://schemas.openxmlformats.org/presentationml/2006/main" xmlns:r="http://schemas.openxmlformats.org/officeDocument/2006/relationships">
+<p:notes xmlns:a="http://schemas.openxmlformats.org/drawingml/2006/main" xmlns:r="http://schemas.openxmlformats.org/officeDocument/2006/relationships" xmlns:p="http://schemas.openxmlformats.org/presentationml/2006/main">
   <p:cSld>
     <p:spTree>
       <p:nvGrpSpPr>
@@ -7666,7 +7621,7 @@
         <p:nvSpPr>
           <p:cNvPr id="2" name="Slide Image Placeholder 1"/>
           <p:cNvSpPr>
-            <a:spLocks noGrp="1"/>
+            <a:spLocks noGrp="1" noRot="1" noChangeAspect="1"/>
           </p:cNvSpPr>
           <p:nvPr>
             <p:ph type="sldImg" idx="2"/>
@@ -7681,7 +7636,7 @@
             <a:spLocks noGrp="1"/>
           </p:cNvSpPr>
           <p:nvPr>
-            <p:ph type="body" idx="3" sz="quarter"/>
+            <p:ph type="body" sz="quarter" idx="3"/>
           </p:nvPr>
         </p:nvSpPr>
         <p:spPr/>
@@ -7702,7 +7657,7 @@
             <a:spLocks noGrp="1"/>
           </p:cNvSpPr>
           <p:nvPr>
-            <p:ph type="sldNum" idx="5" sz="quarter"/>
+            <p:ph type="sldNum" sz="quarter" idx="5"/>
           </p:nvPr>
         </p:nvSpPr>
         <p:spPr/>
@@ -7716,7 +7671,7 @@
 </file>
 
 <file path=ppt/notesSlides/notesSlide3.xml><?xml version="1.0" encoding="utf-8"?>
-<p:notes xmlns:a="http://schemas.openxmlformats.org/drawingml/2006/main" xmlns:p="http://schemas.openxmlformats.org/presentationml/2006/main" xmlns:r="http://schemas.openxmlformats.org/officeDocument/2006/relationships">
+<p:notes xmlns:a="http://schemas.openxmlformats.org/drawingml/2006/main" xmlns:r="http://schemas.openxmlformats.org/officeDocument/2006/relationships" xmlns:p="http://schemas.openxmlformats.org/presentationml/2006/main">
   <p:cSld>
     <p:spTree>
       <p:nvGrpSpPr>
@@ -7736,7 +7691,7 @@
         <p:nvSpPr>
           <p:cNvPr id="2" name="Slide Image Placeholder 1"/>
           <p:cNvSpPr>
-            <a:spLocks noGrp="1"/>
+            <a:spLocks noGrp="1" noRot="1" noChangeAspect="1"/>
           </p:cNvSpPr>
           <p:nvPr>
             <p:ph type="sldImg" idx="2"/>
@@ -7751,7 +7706,7 @@
             <a:spLocks noGrp="1"/>
           </p:cNvSpPr>
           <p:nvPr>
-            <p:ph type="body" idx="3" sz="quarter"/>
+            <p:ph type="body" sz="quarter" idx="3"/>
           </p:nvPr>
         </p:nvSpPr>
         <p:spPr/>
@@ -7760,7 +7715,17 @@
           <a:lstStyle/>
           <a:p>
             <a:r>
-              <a:t>Be direct: we over-delivered on the library and the pipeline, and deliberately deferred the cloud dashboard. The reason the feature set grew is that you cannot benchmark a renderer honestly without triggers, grouping and live updates inside the workload.</a:t>
+              <a:t>This plan is taken straight from the signed sign-off sheet, so every date and agenda item is verifiable - do not paraphrase it on the spot.</a:t>
+            </a:r>
+          </a:p>
+          <a:p>
+            <a:r>
+              <a:t>Phase gates: M2 stack confirmed, M4 SRS signed off, M6 architecture and CI/CD design signed off, M8 presentation and PoC demo to the panel.</a:t>
+            </a:r>
+          </a:p>
+          <a:p>
+            <a:r>
+              <a:t>The Gantt chart two slides later is the same plan drawn against those eight meetings.</a:t>
             </a:r>
           </a:p>
         </p:txBody>
@@ -7772,7 +7737,7 @@
             <a:spLocks noGrp="1"/>
           </p:cNvSpPr>
           <p:nvPr>
-            <p:ph type="sldNum" idx="5" sz="quarter"/>
+            <p:ph type="sldNum" sz="quarter" idx="5"/>
           </p:nvPr>
         </p:nvSpPr>
         <p:spPr/>
@@ -7786,7 +7751,7 @@
 </file>
 
 <file path=ppt/notesSlides/notesSlide4.xml><?xml version="1.0" encoding="utf-8"?>
-<p:notes xmlns:a="http://schemas.openxmlformats.org/drawingml/2006/main" xmlns:p="http://schemas.openxmlformats.org/presentationml/2006/main" xmlns:r="http://schemas.openxmlformats.org/officeDocument/2006/relationships">
+<p:notes xmlns:a="http://schemas.openxmlformats.org/drawingml/2006/main" xmlns:r="http://schemas.openxmlformats.org/officeDocument/2006/relationships" xmlns:p="http://schemas.openxmlformats.org/presentationml/2006/main">
   <p:cSld>
     <p:spTree>
       <p:nvGrpSpPr>
@@ -7806,7 +7771,7 @@
         <p:nvSpPr>
           <p:cNvPr id="2" name="Slide Image Placeholder 1"/>
           <p:cNvSpPr>
-            <a:spLocks noGrp="1"/>
+            <a:spLocks noGrp="1" noRot="1" noChangeAspect="1"/>
           </p:cNvSpPr>
           <p:nvPr>
             <p:ph type="sldImg" idx="2"/>
@@ -7821,7 +7786,7 @@
             <a:spLocks noGrp="1"/>
           </p:cNvSpPr>
           <p:nvPr>
-            <p:ph type="body" idx="3" sz="quarter"/>
+            <p:ph type="body" sz="quarter" idx="3"/>
           </p:nvPr>
         </p:nvSpPr>
         <p:spPr/>
@@ -7830,7 +7795,7 @@
           <a:lstStyle/>
           <a:p>
             <a:r>
-              <a:t>Everything here is free or student-licensed, which is what the Budget slide claims. SkiaSharp is the only substantive third-party runtime dependency.</a:t>
+              <a:t>VERIFY THESE ASSIGNMENTS BEFORE THE DEFENSE - this is a draft derived from the code structure, not a record of who did what. Every row has exactly one A, which is the rule examiners check.</a:t>
             </a:r>
           </a:p>
         </p:txBody>
@@ -7842,7 +7807,7 @@
             <a:spLocks noGrp="1"/>
           </p:cNvSpPr>
           <p:nvPr>
-            <p:ph type="sldNum" idx="5" sz="quarter"/>
+            <p:ph type="sldNum" sz="quarter" idx="5"/>
           </p:nvPr>
         </p:nvSpPr>
         <p:spPr/>
@@ -7856,7 +7821,7 @@
 </file>
 
 <file path=ppt/notesSlides/notesSlide5.xml><?xml version="1.0" encoding="utf-8"?>
-<p:notes xmlns:a="http://schemas.openxmlformats.org/drawingml/2006/main" xmlns:p="http://schemas.openxmlformats.org/presentationml/2006/main" xmlns:r="http://schemas.openxmlformats.org/officeDocument/2006/relationships">
+<p:notes xmlns:a="http://schemas.openxmlformats.org/drawingml/2006/main" xmlns:r="http://schemas.openxmlformats.org/officeDocument/2006/relationships" xmlns:p="http://schemas.openxmlformats.org/presentationml/2006/main">
   <p:cSld>
     <p:spTree>
       <p:nvGrpSpPr>
@@ -7876,7 +7841,7 @@
         <p:nvSpPr>
           <p:cNvPr id="2" name="Slide Image Placeholder 1"/>
           <p:cNvSpPr>
-            <a:spLocks noGrp="1"/>
+            <a:spLocks noGrp="1" noRot="1" noChangeAspect="1"/>
           </p:cNvSpPr>
           <p:nvPr>
             <p:ph type="sldImg" idx="2"/>
@@ -7891,7 +7856,7 @@
             <a:spLocks noGrp="1"/>
           </p:cNvSpPr>
           <p:nvPr>
-            <p:ph type="body" idx="3" sz="quarter"/>
+            <p:ph type="body" sz="quarter" idx="3"/>
           </p:nvPr>
         </p:nvSpPr>
         <p:spPr/>
@@ -7900,7 +7865,7 @@
           <a:lstStyle/>
           <a:p>
             <a:r>
-              <a:t>VERIFY THESE ASSIGNMENTS BEFORE THE DEFENSE - this is a draft derived from the code structure, not a record of who did what. Every row has exactly one A, which is the rule examiners check.</a:t>
+              <a:t>The same plan drawn against the eight signed meetings, 16 May to 18 July 2026. Diamonds M1-M8 are the meetings, all held and signed. Point at the Phase 4 band: that is where the benchmark, the 552 tests and the NuGet release land.</a:t>
             </a:r>
           </a:p>
         </p:txBody>
@@ -7912,7 +7877,7 @@
             <a:spLocks noGrp="1"/>
           </p:cNvSpPr>
           <p:nvPr>
-            <p:ph type="sldNum" idx="5" sz="quarter"/>
+            <p:ph type="sldNum" sz="quarter" idx="5"/>
           </p:nvPr>
         </p:nvSpPr>
         <p:spPr/>
@@ -7926,7 +7891,7 @@
 </file>
 
 <file path=ppt/notesSlides/notesSlide6.xml><?xml version="1.0" encoding="utf-8"?>
-<p:notes xmlns:a="http://schemas.openxmlformats.org/drawingml/2006/main" xmlns:p="http://schemas.openxmlformats.org/presentationml/2006/main" xmlns:r="http://schemas.openxmlformats.org/officeDocument/2006/relationships">
+<p:notes xmlns:a="http://schemas.openxmlformats.org/drawingml/2006/main" xmlns:r="http://schemas.openxmlformats.org/officeDocument/2006/relationships" xmlns:p="http://schemas.openxmlformats.org/presentationml/2006/main">
   <p:cSld>
     <p:spTree>
       <p:nvGrpSpPr>
@@ -7946,7 +7911,7 @@
         <p:nvSpPr>
           <p:cNvPr id="2" name="Slide Image Placeholder 1"/>
           <p:cNvSpPr>
-            <a:spLocks noGrp="1"/>
+            <a:spLocks noGrp="1" noRot="1" noChangeAspect="1"/>
           </p:cNvSpPr>
           <p:nvPr>
             <p:ph type="sldImg" idx="2"/>
@@ -7961,7 +7926,7 @@
             <a:spLocks noGrp="1"/>
           </p:cNvSpPr>
           <p:nvPr>
-            <p:ph type="body" idx="3" sz="quarter"/>
+            <p:ph type="body" sz="quarter" idx="3"/>
           </p:nvPr>
         </p:nvSpPr>
         <p:spPr/>
@@ -7970,7 +7935,42 @@
           <a:lstStyle/>
           <a:p>
             <a:r>
-              <a:t>The same plan drawn against the eight signed meetings, 16 May to 18 July 2026. Diamonds M1-M8 are the meetings, all held and signed. Point at the Phase 4 band: that is where the benchmark, the 552 tests and the NuGet release land.</a:t>
+              <a:t>Run SampleApplicationV2 - it opens on DemoWindow with seven tabs.</a:t>
+            </a:r>
+          </a:p>
+          <a:p>
+            <a:r>
+              <a:t>1) 100K Stress Test -&gt; press 100,000, read the numbers, scroll, then press 1,000,000 and show the SAME frame time. That is the whole thesis in one click.</a:t>
+            </a:r>
+          </a:p>
+          <a:p>
+            <a:r>
+              <a:t>2) Tick 'Live ticks' - 2,000 rows change every 100 ms and it still holds.</a:t>
+            </a:r>
+          </a:p>
+          <a:p>
+            <a:r>
+              <a:t>3) All Features tab -&gt; ApplyGroup, ExpandAllRows, GetAllPercentiles, header theming.</a:t>
+            </a:r>
+          </a:p>
+          <a:p>
+            <a:r>
+              <a:t>4) Multi-Window Test -&gt; 'Tile 4 Windows'.</a:t>
+            </a:r>
+          </a:p>
+          <a:p>
+            <a:r>
+              <a:t>5) Row Drag -&gt; open the drop-target window and drag rows out.</a:t>
+            </a:r>
+          </a:p>
+          <a:p>
+            <a:r>
+              <a:t>6) Test Explorer -&gt; 552 green.</a:t>
+            </a:r>
+          </a:p>
+          <a:p>
+            <a:r>
+              <a:t>Say plainly that the rubric milestone was 30% and the delivered work exceeds it.</a:t>
             </a:r>
           </a:p>
         </p:txBody>
@@ -7982,7 +7982,7 @@
             <a:spLocks noGrp="1"/>
           </p:cNvSpPr>
           <p:nvPr>
-            <p:ph type="sldNum" idx="5" sz="quarter"/>
+            <p:ph type="sldNum" sz="quarter" idx="5"/>
           </p:nvPr>
         </p:nvSpPr>
         <p:spPr/>
@@ -7996,7 +7996,7 @@
 </file>
 
 <file path=ppt/notesSlides/notesSlide7.xml><?xml version="1.0" encoding="utf-8"?>
-<p:notes xmlns:a="http://schemas.openxmlformats.org/drawingml/2006/main" xmlns:p="http://schemas.openxmlformats.org/presentationml/2006/main" xmlns:r="http://schemas.openxmlformats.org/officeDocument/2006/relationships">
+<p:notes xmlns:a="http://schemas.openxmlformats.org/drawingml/2006/main" xmlns:r="http://schemas.openxmlformats.org/officeDocument/2006/relationships" xmlns:p="http://schemas.openxmlformats.org/presentationml/2006/main">
   <p:cSld>
     <p:spTree>
       <p:nvGrpSpPr>
@@ -8016,7 +8016,7 @@
         <p:nvSpPr>
           <p:cNvPr id="2" name="Slide Image Placeholder 1"/>
           <p:cNvSpPr>
-            <a:spLocks noGrp="1"/>
+            <a:spLocks noGrp="1" noRot="1" noChangeAspect="1"/>
           </p:cNvSpPr>
           <p:nvPr>
             <p:ph type="sldImg" idx="2"/>
@@ -8031,7 +8031,7 @@
             <a:spLocks noGrp="1"/>
           </p:cNvSpPr>
           <p:nvPr>
-            <p:ph type="body" idx="3" sz="quarter"/>
+            <p:ph type="body" sz="quarter" idx="3"/>
           </p:nvPr>
         </p:nvSpPr>
         <p:spPr/>
@@ -8052,7 +8052,7 @@
             <a:spLocks noGrp="1"/>
           </p:cNvSpPr>
           <p:nvPr>
-            <p:ph type="sldNum" idx="5" sz="quarter"/>
+            <p:ph type="sldNum" sz="quarter" idx="5"/>
           </p:nvPr>
         </p:nvSpPr>
         <p:spPr/>
@@ -8066,7 +8066,7 @@
 </file>
 
 <file path=ppt/notesSlides/notesSlide8.xml><?xml version="1.0" encoding="utf-8"?>
-<p:notes xmlns:a="http://schemas.openxmlformats.org/drawingml/2006/main" xmlns:p="http://schemas.openxmlformats.org/presentationml/2006/main" xmlns:r="http://schemas.openxmlformats.org/officeDocument/2006/relationships">
+<p:notes xmlns:a="http://schemas.openxmlformats.org/drawingml/2006/main" xmlns:r="http://schemas.openxmlformats.org/officeDocument/2006/relationships" xmlns:p="http://schemas.openxmlformats.org/presentationml/2006/main">
   <p:cSld>
     <p:spTree>
       <p:nvGrpSpPr>
@@ -8086,7 +8086,7 @@
         <p:nvSpPr>
           <p:cNvPr id="2" name="Slide Image Placeholder 1"/>
           <p:cNvSpPr>
-            <a:spLocks noGrp="1"/>
+            <a:spLocks noGrp="1" noRot="1" noChangeAspect="1"/>
           </p:cNvSpPr>
           <p:nvPr>
             <p:ph type="sldImg" idx="2"/>
@@ -8101,7 +8101,7 @@
             <a:spLocks noGrp="1"/>
           </p:cNvSpPr>
           <p:nvPr>
-            <p:ph type="body" idx="3" sz="quarter"/>
+            <p:ph type="body" sz="quarter" idx="3"/>
           </p:nvPr>
         </p:nvSpPr>
         <p:spPr/>
@@ -8122,7 +8122,7 @@
             <a:spLocks noGrp="1"/>
           </p:cNvSpPr>
           <p:nvPr>
-            <p:ph type="sldNum" idx="5" sz="quarter"/>
+            <p:ph type="sldNum" sz="quarter" idx="5"/>
           </p:nvPr>
         </p:nvSpPr>
         <p:spPr/>
@@ -8136,7 +8136,7 @@
 </file>
 
 <file path=ppt/notesSlides/notesSlide9.xml><?xml version="1.0" encoding="utf-8"?>
-<p:notes xmlns:a="http://schemas.openxmlformats.org/drawingml/2006/main" xmlns:p="http://schemas.openxmlformats.org/presentationml/2006/main" xmlns:r="http://schemas.openxmlformats.org/officeDocument/2006/relationships">
+<p:notes xmlns:a="http://schemas.openxmlformats.org/drawingml/2006/main" xmlns:r="http://schemas.openxmlformats.org/officeDocument/2006/relationships" xmlns:p="http://schemas.openxmlformats.org/presentationml/2006/main">
   <p:cSld>
     <p:spTree>
       <p:nvGrpSpPr>
@@ -8156,7 +8156,7 @@
         <p:nvSpPr>
           <p:cNvPr id="2" name="Slide Image Placeholder 1"/>
           <p:cNvSpPr>
-            <a:spLocks noGrp="1"/>
+            <a:spLocks noGrp="1" noRot="1" noChangeAspect="1"/>
           </p:cNvSpPr>
           <p:nvPr>
             <p:ph type="sldImg" idx="2"/>
@@ -8171,7 +8171,7 @@
             <a:spLocks noGrp="1"/>
           </p:cNvSpPr>
           <p:nvPr>
-            <p:ph type="body" idx="3" sz="quarter"/>
+            <p:ph type="body" sz="quarter" idx="3"/>
           </p:nvPr>
         </p:nvSpPr>
         <p:spPr/>
@@ -8192,7 +8192,7 @@
             <a:spLocks noGrp="1"/>
           </p:cNvSpPr>
           <p:nvPr>
-            <p:ph type="sldNum" idx="5" sz="quarter"/>
+            <p:ph type="sldNum" sz="quarter" idx="5"/>
           </p:nvPr>
         </p:nvSpPr>
         <p:spPr/>
@@ -12559,583 +12559,6 @@
   <p:cSld>
     <p:spTree>
       <p:nvGrpSpPr>
-        <p:cNvPr id="1" name="">
-          <a:extLst>
-            <a:ext uri="{FF2B5EF4-FFF2-40B4-BE49-F238E27FC236}">
-              <a16:creationId xmlns:a16="http://schemas.microsoft.com/office/drawing/2014/main" id="{4259746B-B4A6-E89C-36B2-20B6EDE01D69}"/>
-            </a:ext>
-          </a:extLst>
-        </p:cNvPr>
-        <p:cNvGrpSpPr/>
-        <p:nvPr/>
-      </p:nvGrpSpPr>
-      <p:grpSpPr>
-        <a:xfrm>
-          <a:off x="0" y="0"/>
-          <a:ext cx="0" cy="0"/>
-          <a:chOff x="0" y="0"/>
-          <a:chExt cx="0" cy="0"/>
-        </a:xfrm>
-      </p:grpSpPr>
-      <p:sp>
-        <p:nvSpPr>
-          <p:cNvPr id="2" name="Title 1">
-            <a:extLst>
-              <a:ext uri="{FF2B5EF4-FFF2-40B4-BE49-F238E27FC236}">
-                <a16:creationId xmlns:a16="http://schemas.microsoft.com/office/drawing/2014/main" id="{64E5FD4D-ACE7-E8F6-E92A-286923D60800}"/>
-              </a:ext>
-            </a:extLst>
-          </p:cNvPr>
-          <p:cNvSpPr>
-            <a:spLocks noGrp="1"/>
-          </p:cNvSpPr>
-          <p:nvPr>
-            <p:ph type="title"/>
-          </p:nvPr>
-        </p:nvSpPr>
-        <p:spPr/>
-        <p:txBody>
-          <a:bodyPr/>
-          <a:lstStyle/>
-          <a:p>
-            <a:r>
-              <a:rPr sz="2600" b="1"/>
-              <a:t>Literature Review &amp; Alternatives</a:t>
-            </a:r>
-          </a:p>
-        </p:txBody>
-      </p:sp>
-      <p:sp>
-        <p:nvSpPr>
-          <p:cNvPr id="3" name="Content Placeholder 2">
-            <a:extLst>
-              <a:ext uri="{FF2B5EF4-FFF2-40B4-BE49-F238E27FC236}">
-                <a16:creationId xmlns:a16="http://schemas.microsoft.com/office/drawing/2014/main" id="{8BAA305D-5E62-5373-4521-A4FD15AB09CC}"/>
-              </a:ext>
-            </a:extLst>
-          </p:cNvPr>
-          <p:cNvSpPr>
-            <a:spLocks noGrp="1"/>
-          </p:cNvSpPr>
-          <p:nvPr>
-            <p:ph sz="quarter" idx="1"/>
-          </p:nvPr>
-        </p:nvSpPr>
-        <p:spPr/>
-        <p:txBody>
-          <a:bodyPr/>
-          <a:lstStyle/>
-          <a:p>
-            <a:pPr>
-              <a:buFont typeface="Wingdings" panose="05000000000000000000" pitchFamily="2" charset="2"/>
-              <a:buChar char="v"/>
-            </a:pPr>
-            <a:r>
-              <a:rPr sz="1800" dirty="0">
-                <a:latin typeface="Calibri" panose="020F0502020204030204" pitchFamily="34" charset="0"/>
-                <a:cs typeface="Calibri" panose="020F0502020204030204" pitchFamily="34" charset="0"/>
-              </a:rPr>
-              <a:t>Native WPF DataGrid: mature and integrated, but can incur visual-tree overhead at scale.</a:t>
-            </a:r>
-            <a:endParaRPr lang="en-US" dirty="0">
-              <a:latin typeface="Calibri" panose="020F0502020204030204" pitchFamily="34" charset="0"/>
-              <a:cs typeface="Calibri" panose="020F0502020204030204" pitchFamily="34" charset="0"/>
-            </a:endParaRPr>
-          </a:p>
-          <a:p>
-            <a:pPr>
-              <a:buFont typeface="Wingdings" panose="05000000000000000000" pitchFamily="2" charset="2"/>
-              <a:buChar char="v"/>
-            </a:pPr>
-            <a:r>
-              <a:rPr sz="1800" dirty="0">
-                <a:latin typeface="Calibri" panose="020F0502020204030204" pitchFamily="34" charset="0"/>
-                <a:cs typeface="Calibri" panose="020F0502020204030204" pitchFamily="34" charset="0"/>
-              </a:rPr>
-              <a:t>Commercial grids such as DevExpress and </a:t>
-            </a:r>
-            <a:r>
-              <a:rPr sz="1800" dirty="0" err="1">
-                <a:latin typeface="Calibri" panose="020F0502020204030204" pitchFamily="34" charset="0"/>
-                <a:cs typeface="Calibri" panose="020F0502020204030204" pitchFamily="34" charset="0"/>
-              </a:rPr>
-              <a:t>Syncfusion</a:t>
-            </a:r>
-            <a:r>
-              <a:rPr sz="1800" dirty="0">
-                <a:latin typeface="Calibri" panose="020F0502020204030204" pitchFamily="34" charset="0"/>
-                <a:cs typeface="Calibri" panose="020F0502020204030204" pitchFamily="34" charset="0"/>
-              </a:rPr>
-              <a:t>: feature-rich and optimized, but proprietary/licensed.</a:t>
-            </a:r>
-          </a:p>
-          <a:p>
-            <a:pPr>
-              <a:buFont typeface="Wingdings" panose="05000000000000000000" pitchFamily="2" charset="2"/>
-              <a:buChar char="v"/>
-            </a:pPr>
-            <a:r>
-              <a:rPr sz="1800" dirty="0">
-                <a:latin typeface="Calibri" panose="020F0502020204030204" pitchFamily="34" charset="0"/>
-                <a:cs typeface="Calibri" panose="020F0502020204030204" pitchFamily="34" charset="0"/>
-              </a:rPr>
-              <a:t>Custom immediate-mode drawing: high control over rendering and performance, but requires more engineering.</a:t>
-            </a:r>
-          </a:p>
-          <a:p>
-            <a:pPr>
-              <a:buFont typeface="Wingdings" panose="05000000000000000000" pitchFamily="2" charset="2"/>
-              <a:buChar char="v"/>
-            </a:pPr>
-            <a:r>
-              <a:rPr sz="1800" dirty="0" err="1">
-                <a:latin typeface="Calibri" panose="020F0502020204030204" pitchFamily="34" charset="0"/>
-                <a:cs typeface="Calibri" panose="020F0502020204030204" pitchFamily="34" charset="0"/>
-              </a:rPr>
-              <a:t>FastGrid</a:t>
-            </a:r>
-            <a:r>
-              <a:rPr sz="1800" dirty="0">
-                <a:latin typeface="Calibri" panose="020F0502020204030204" pitchFamily="34" charset="0"/>
-                <a:cs typeface="Calibri" panose="020F0502020204030204" pitchFamily="34" charset="0"/>
-              </a:rPr>
-              <a:t> niche: a reusable WPF/NuGet component focused on lightweight, high-performance rendering plus cloud-native delivery.</a:t>
-            </a:r>
-          </a:p>
-        </p:txBody>
-      </p:sp>
-      <p:sp>
-        <p:nvSpPr>
-          <p:cNvPr id="4" name="Footer Placeholder 3">
-            <a:extLst>
-              <a:ext uri="{FF2B5EF4-FFF2-40B4-BE49-F238E27FC236}">
-                <a16:creationId xmlns:a16="http://schemas.microsoft.com/office/drawing/2014/main" id="{EB301A31-C183-093C-402D-3E47B8C37F1E}"/>
-              </a:ext>
-            </a:extLst>
-          </p:cNvPr>
-          <p:cNvSpPr>
-            <a:spLocks noGrp="1"/>
-          </p:cNvSpPr>
-          <p:nvPr>
-            <p:ph type="ftr" sz="quarter" idx="11"/>
-          </p:nvPr>
-        </p:nvSpPr>
-        <p:spPr/>
-        <p:txBody>
-          <a:bodyPr/>
-          <a:lstStyle/>
-          <a:p>
-            <a:r>
-              <a:rPr sz="1000" b="0"/>
-              <a:t>FastGrid</a:t>
-            </a:r>
-            <a:endParaRPr lang="en-US" dirty="0"/>
-          </a:p>
-        </p:txBody>
-      </p:sp>
-      <p:sp>
-        <p:nvSpPr>
-          <p:cNvPr id="5" name="Slide Number Placeholder 4">
-            <a:extLst>
-              <a:ext uri="{FF2B5EF4-FFF2-40B4-BE49-F238E27FC236}">
-                <a16:creationId xmlns:a16="http://schemas.microsoft.com/office/drawing/2014/main" id="{7F1048C3-45FC-8545-5485-22C70A933592}"/>
-              </a:ext>
-            </a:extLst>
-          </p:cNvPr>
-          <p:cNvSpPr>
-            <a:spLocks noGrp="1"/>
-          </p:cNvSpPr>
-          <p:nvPr>
-            <p:ph type="sldNum" sz="quarter" idx="12"/>
-          </p:nvPr>
-        </p:nvSpPr>
-        <p:spPr/>
-        <p:txBody>
-          <a:bodyPr>
-            <a:normAutofit fontScale="62500" lnSpcReduction="20000"/>
-          </a:bodyPr>
-          <a:lstStyle/>
-          <a:p>
-            <a:fld id="{9EBC64C3-3FC7-4C40-910B-2643F037F02C}" type="slidenum">
-              <a:rPr lang="en-US" smtClean="0"/>
-              <a:pPr/>
-              <a:t>10</a:t>
-            </a:fld>
-            <a:endParaRPr lang="en-US" dirty="0"/>
-          </a:p>
-        </p:txBody>
-      </p:sp>
-      <p:sp>
-        <p:nvSpPr>
-          <p:cNvPr id="6" name="Date Placeholder 5">
-            <a:extLst>
-              <a:ext uri="{FF2B5EF4-FFF2-40B4-BE49-F238E27FC236}">
-                <a16:creationId xmlns:a16="http://schemas.microsoft.com/office/drawing/2014/main" id="{A7D9EF8D-D92F-1154-92DF-D4D3DD92B360}"/>
-              </a:ext>
-            </a:extLst>
-          </p:cNvPr>
-          <p:cNvSpPr>
-            <a:spLocks noGrp="1"/>
-          </p:cNvSpPr>
-          <p:nvPr>
-            <p:ph type="dt" sz="half" idx="10"/>
-          </p:nvPr>
-        </p:nvSpPr>
-        <p:spPr/>
-        <p:txBody>
-          <a:bodyPr/>
-          <a:lstStyle/>
-          <a:p>
-            <a:pPr algn="ctr"/>
-            <a:r>
-              <a:rPr lang="en-US" dirty="0"/>
-              <a:t>Hamdard University </a:t>
-            </a:r>
-          </a:p>
-        </p:txBody>
-      </p:sp>
-      <p:graphicFrame>
-        <p:nvGraphicFramePr>
-          <p:cNvPr id="17" name="Diagram 16">
-            <a:extLst>
-              <a:ext uri="{FF2B5EF4-FFF2-40B4-BE49-F238E27FC236}">
-                <a16:creationId xmlns:a16="http://schemas.microsoft.com/office/drawing/2014/main" id="{91EDAC2A-F52F-A59E-F296-0434B1E91E00}"/>
-              </a:ext>
-            </a:extLst>
-          </p:cNvPr>
-          <p:cNvGraphicFramePr/>
-          <p:nvPr>
-            <p:extLst>
-              <p:ext uri="{D42A27DB-BD31-4B8C-83A1-F6EECF244321}">
-                <p14:modId xmlns:p14="http://schemas.microsoft.com/office/powerpoint/2010/main" val="3679281628"/>
-              </p:ext>
-            </p:extLst>
-          </p:nvPr>
-        </p:nvGraphicFramePr>
-        <p:xfrm>
-          <a:off x="3467100" y="3937000"/>
-          <a:ext cx="2209800" cy="2641600"/>
-        </p:xfrm>
-        <a:graphic>
-          <a:graphicData uri="http://schemas.openxmlformats.org/drawingml/2006/diagram">
-            <dgm:relIds xmlns:dgm="http://schemas.openxmlformats.org/drawingml/2006/diagram" xmlns:r="http://schemas.openxmlformats.org/officeDocument/2006/relationships" r:dm="rId2" r:lo="rId3" r:qs="rId4" r:cs="rId5"/>
-          </a:graphicData>
-        </a:graphic>
-      </p:graphicFrame>
-    </p:spTree>
-    <p:extLst>
-      <p:ext uri="{BB962C8B-B14F-4D97-AF65-F5344CB8AC3E}">
-        <p14:creationId xmlns:p14="http://schemas.microsoft.com/office/powerpoint/2010/main" val="303358916"/>
-      </p:ext>
-    </p:extLst>
-  </p:cSld>
-  <p:clrMapOvr>
-    <a:masterClrMapping/>
-  </p:clrMapOvr>
-</p:sld>
-</file>
-
-<file path=ppt/slides/slide11.xml><?xml version="1.0" encoding="utf-8"?>
-<p:sld xmlns:a="http://schemas.openxmlformats.org/drawingml/2006/main" xmlns:r="http://schemas.openxmlformats.org/officeDocument/2006/relationships" xmlns:p="http://schemas.openxmlformats.org/presentationml/2006/main">
-  <p:cSld>
-    <p:spTree>
-      <p:nvGrpSpPr>
-        <p:cNvPr id="1" name="">
-          <a:extLst>
-            <a:ext uri="{FF2B5EF4-FFF2-40B4-BE49-F238E27FC236}">
-              <a16:creationId xmlns:a16="http://schemas.microsoft.com/office/drawing/2014/main" id="{0DF3A080-706B-B16C-9816-C409A197BD06}"/>
-            </a:ext>
-          </a:extLst>
-        </p:cNvPr>
-        <p:cNvGrpSpPr/>
-        <p:nvPr/>
-      </p:nvGrpSpPr>
-      <p:grpSpPr>
-        <a:xfrm>
-          <a:off x="0" y="0"/>
-          <a:ext cx="0" cy="0"/>
-          <a:chOff x="0" y="0"/>
-          <a:chExt cx="0" cy="0"/>
-        </a:xfrm>
-      </p:grpSpPr>
-      <p:sp>
-        <p:nvSpPr>
-          <p:cNvPr id="2" name="Title 1">
-            <a:extLst>
-              <a:ext uri="{FF2B5EF4-FFF2-40B4-BE49-F238E27FC236}">
-                <a16:creationId xmlns:a16="http://schemas.microsoft.com/office/drawing/2014/main" id="{F0306E37-E162-A6F6-9392-FA6F0FE02C49}"/>
-              </a:ext>
-            </a:extLst>
-          </p:cNvPr>
-          <p:cNvSpPr>
-            <a:spLocks noGrp="1"/>
-          </p:cNvSpPr>
-          <p:nvPr>
-            <p:ph type="title"/>
-          </p:nvPr>
-        </p:nvSpPr>
-        <p:spPr/>
-        <p:txBody>
-          <a:bodyPr/>
-          <a:lstStyle/>
-          <a:p>
-            <a:r>
-              <a:rPr sz="2400" b="1"/>
-              <a:t>Demo of 30% Work - Proof of Concept</a:t>
-            </a:r>
-          </a:p>
-        </p:txBody>
-      </p:sp>
-      <p:sp>
-        <p:nvSpPr>
-          <p:cNvPr id="3" name="Content Placeholder 2">
-            <a:extLst>
-              <a:ext uri="{FF2B5EF4-FFF2-40B4-BE49-F238E27FC236}">
-                <a16:creationId xmlns:a16="http://schemas.microsoft.com/office/drawing/2014/main" id="{BA320ACB-2834-3551-8A1B-8A5F331FC870}"/>
-              </a:ext>
-            </a:extLst>
-          </p:cNvPr>
-          <p:cNvSpPr>
-            <a:spLocks noGrp="1"/>
-          </p:cNvSpPr>
-          <p:nvPr>
-            <p:ph sz="quarter" idx="1"/>
-          </p:nvPr>
-        </p:nvSpPr>
-        <p:spPr/>
-        <p:txBody>
-          <a:bodyPr/>
-          <a:lstStyle/>
-          <a:p>
-            <a:pPr>
-              <a:lnSpc>
-                <a:spcPct val="124000"/>
-              </a:lnSpc>
-              <a:buFont typeface="Wingdings" panose="05000000000000000000" pitchFamily="2" charset="2"/>
-              <a:buChar char="v"/>
-            </a:pPr>
-            <a:r>
-              <a:rPr sz="1400" dirty="0">
-                <a:latin typeface="Calibri" panose="020F0502020204030204" pitchFamily="34" charset="0"/>
-                <a:cs typeface="Calibri" panose="020F0502020204030204" pitchFamily="34" charset="0"/>
-              </a:rPr>
-              <a:t>Status: MORE than 30% of the planned work is complete - what follows is the working product, not a mock-up.</a:t>
-            </a:r>
-            <a:endParaRPr lang="en-US" dirty="0">
-              <a:latin typeface="Calibri" panose="020F0502020204030204" pitchFamily="34" charset="0"/>
-              <a:cs typeface="Calibri" panose="020F0502020204030204" pitchFamily="34" charset="0"/>
-            </a:endParaRPr>
-          </a:p>
-          <a:p>
-            <a:pPr>
-              <a:lnSpc>
-                <a:spcPct val="124000"/>
-              </a:lnSpc>
-              <a:buFont typeface="Wingdings" panose="05000000000000000000" pitchFamily="2" charset="2"/>
-              <a:buChar char="v"/>
-            </a:pPr>
-            <a:r>
-              <a:rPr sz="1400" dirty="0">
-                <a:latin typeface="Calibri" panose="020F0502020204030204" pitchFamily="34" charset="0"/>
-                <a:cs typeface="Calibri" panose="020F0502020204030204" pitchFamily="34" charset="0"/>
-              </a:rPr>
-              <a:t>100,000 rows generated and bound in 67 ms, then scrolled continuously: 2.59 ms average frame time, 4.00 ms at p95.</a:t>
-            </a:r>
-            <a:endParaRPr lang="en-US" dirty="0">
-              <a:latin typeface="Calibri" panose="020F0502020204030204" pitchFamily="34" charset="0"/>
-              <a:cs typeface="Calibri" panose="020F0502020204030204" pitchFamily="34" charset="0"/>
-            </a:endParaRPr>
-          </a:p>
-          <a:p>
-            <a:pPr>
-              <a:lnSpc>
-                <a:spcPct val="124000"/>
-              </a:lnSpc>
-              <a:buFont typeface="Wingdings" panose="05000000000000000000" pitchFamily="2" charset="2"/>
-              <a:buChar char="v"/>
-            </a:pPr>
-            <a:r>
-              <a:rPr sz="1400" dirty="0">
-                <a:latin typeface="Calibri" panose="020F0502020204030204" pitchFamily="34" charset="0"/>
-                <a:cs typeface="Calibri" panose="020F0502020204030204" pitchFamily="34" charset="0"/>
-              </a:rPr>
-              <a:t>1,000,000 rows: 2.75 ms average frame time - the SAME cost, because only ~250 cells are ever drawn per frame.</a:t>
-            </a:r>
-            <a:endParaRPr lang="en-US" dirty="0">
-              <a:latin typeface="Calibri" panose="020F0502020204030204" pitchFamily="34" charset="0"/>
-              <a:cs typeface="Calibri" panose="020F0502020204030204" pitchFamily="34" charset="0"/>
-            </a:endParaRPr>
-          </a:p>
-          <a:p>
-            <a:pPr>
-              <a:lnSpc>
-                <a:spcPct val="124000"/>
-              </a:lnSpc>
-              <a:buFont typeface="Wingdings" panose="05000000000000000000" pitchFamily="2" charset="2"/>
-              <a:buChar char="v"/>
-            </a:pPr>
-            <a:r>
-              <a:rPr sz="1400" dirty="0">
-                <a:latin typeface="Calibri" panose="020F0502020204030204" pitchFamily="34" charset="0"/>
-                <a:cs typeface="Calibri" panose="020F0502020204030204" pitchFamily="34" charset="0"/>
-              </a:rPr>
-              <a:t>All Features tab: every public property, method, event and command of the grid, driven live.</a:t>
-            </a:r>
-            <a:endParaRPr lang="en-US" dirty="0">
-              <a:latin typeface="Calibri" panose="020F0502020204030204" pitchFamily="34" charset="0"/>
-              <a:cs typeface="Calibri" panose="020F0502020204030204" pitchFamily="34" charset="0"/>
-            </a:endParaRPr>
-          </a:p>
-          <a:p>
-            <a:pPr>
-              <a:lnSpc>
-                <a:spcPct val="124000"/>
-              </a:lnSpc>
-              <a:buFont typeface="Wingdings" panose="05000000000000000000" pitchFamily="2" charset="2"/>
-              <a:buChar char="v"/>
-            </a:pPr>
-            <a:r>
-              <a:rPr sz="1400" dirty="0">
-                <a:latin typeface="Calibri" panose="020F0502020204030204" pitchFamily="34" charset="0"/>
-                <a:cs typeface="Calibri" panose="020F0502020204030204" pitchFamily="34" charset="0"/>
-              </a:rPr>
-              <a:t>Four independently streaming trading desks side by side (Watchlist, Time &amp; Sales, Trading Monitor, Options Chain).</a:t>
-            </a:r>
-            <a:endParaRPr lang="en-US" dirty="0">
-              <a:latin typeface="Calibri" panose="020F0502020204030204" pitchFamily="34" charset="0"/>
-              <a:cs typeface="Calibri" panose="020F0502020204030204" pitchFamily="34" charset="0"/>
-            </a:endParaRPr>
-          </a:p>
-          <a:p>
-            <a:pPr>
-              <a:lnSpc>
-                <a:spcPct val="124000"/>
-              </a:lnSpc>
-              <a:buFont typeface="Wingdings" panose="05000000000000000000" pitchFamily="2" charset="2"/>
-              <a:buChar char="v"/>
-            </a:pPr>
-            <a:r>
-              <a:rPr sz="1400" dirty="0">
-                <a:latin typeface="Calibri" panose="020F0502020204030204" pitchFamily="34" charset="0"/>
-                <a:cs typeface="Calibri" panose="020F0502020204030204" pitchFamily="34" charset="0"/>
-              </a:rPr>
-              <a:t>552 automated unit tests running green in Visual Studio Test Explorer.</a:t>
-            </a:r>
-            <a:endParaRPr lang="en-US" dirty="0">
-              <a:latin typeface="Calibri" panose="020F0502020204030204" pitchFamily="34" charset="0"/>
-              <a:cs typeface="Calibri" panose="020F0502020204030204" pitchFamily="34" charset="0"/>
-            </a:endParaRPr>
-          </a:p>
-        </p:txBody>
-      </p:sp>
-      <p:sp>
-        <p:nvSpPr>
-          <p:cNvPr id="4" name="Footer Placeholder 3">
-            <a:extLst>
-              <a:ext uri="{FF2B5EF4-FFF2-40B4-BE49-F238E27FC236}">
-                <a16:creationId xmlns:a16="http://schemas.microsoft.com/office/drawing/2014/main" id="{DDCA100B-5FE0-B5E1-9315-388C53DC2BC6}"/>
-              </a:ext>
-            </a:extLst>
-          </p:cNvPr>
-          <p:cNvSpPr>
-            <a:spLocks noGrp="1"/>
-          </p:cNvSpPr>
-          <p:nvPr>
-            <p:ph type="ftr" sz="quarter" idx="11"/>
-          </p:nvPr>
-        </p:nvSpPr>
-        <p:spPr/>
-        <p:txBody>
-          <a:bodyPr/>
-          <a:lstStyle/>
-          <a:p>
-            <a:r>
-              <a:rPr sz="1000" b="0"/>
-              <a:t>FastGrid</a:t>
-            </a:r>
-            <a:endParaRPr lang="en-US" dirty="0"/>
-          </a:p>
-        </p:txBody>
-      </p:sp>
-      <p:sp>
-        <p:nvSpPr>
-          <p:cNvPr id="5" name="Slide Number Placeholder 4">
-            <a:extLst>
-              <a:ext uri="{FF2B5EF4-FFF2-40B4-BE49-F238E27FC236}">
-                <a16:creationId xmlns:a16="http://schemas.microsoft.com/office/drawing/2014/main" id="{A8326E0C-2E10-FA6A-C966-65FE8C0FE2BC}"/>
-              </a:ext>
-            </a:extLst>
-          </p:cNvPr>
-          <p:cNvSpPr>
-            <a:spLocks noGrp="1"/>
-          </p:cNvSpPr>
-          <p:nvPr>
-            <p:ph type="sldNum" sz="quarter" idx="12"/>
-          </p:nvPr>
-        </p:nvSpPr>
-        <p:spPr/>
-        <p:txBody>
-          <a:bodyPr>
-            <a:normAutofit fontScale="62500" lnSpcReduction="20000"/>
-          </a:bodyPr>
-          <a:lstStyle/>
-          <a:p>
-            <a:fld id="{9EBC64C3-3FC7-4C40-910B-2643F037F02C}" type="slidenum">
-              <a:rPr lang="en-US" smtClean="0"/>
-              <a:pPr/>
-              <a:t>11</a:t>
-            </a:fld>
-            <a:endParaRPr lang="en-US" dirty="0"/>
-          </a:p>
-        </p:txBody>
-      </p:sp>
-      <p:sp>
-        <p:nvSpPr>
-          <p:cNvPr id="6" name="Date Placeholder 5">
-            <a:extLst>
-              <a:ext uri="{FF2B5EF4-FFF2-40B4-BE49-F238E27FC236}">
-                <a16:creationId xmlns:a16="http://schemas.microsoft.com/office/drawing/2014/main" id="{11943BA5-9CB1-34E9-15AD-A632B45FFC3E}"/>
-              </a:ext>
-            </a:extLst>
-          </p:cNvPr>
-          <p:cNvSpPr>
-            <a:spLocks noGrp="1"/>
-          </p:cNvSpPr>
-          <p:nvPr>
-            <p:ph type="dt" sz="half" idx="10"/>
-          </p:nvPr>
-        </p:nvSpPr>
-        <p:spPr/>
-        <p:txBody>
-          <a:bodyPr/>
-          <a:lstStyle/>
-          <a:p>
-            <a:pPr algn="ctr"/>
-            <a:r>
-              <a:rPr lang="en-US" dirty="0"/>
-              <a:t>Hamdard University </a:t>
-            </a:r>
-          </a:p>
-        </p:txBody>
-      </p:sp>
-    </p:spTree>
-    <p:extLst>
-      <p:ext uri="{BB962C8B-B14F-4D97-AF65-F5344CB8AC3E}">
-        <p14:creationId xmlns:p14="http://schemas.microsoft.com/office/powerpoint/2010/main" val="1371402079"/>
-      </p:ext>
-    </p:extLst>
-  </p:cSld>
-  <p:clrMapOvr>
-    <a:masterClrMapping/>
-  </p:clrMapOvr>
-</p:sld>
-</file>
-
-<file path=ppt/slides/slide12.xml><?xml version="1.0" encoding="utf-8"?>
-<p:sld xmlns:a="http://schemas.openxmlformats.org/drawingml/2006/main" xmlns:r="http://schemas.openxmlformats.org/officeDocument/2006/relationships" xmlns:p="http://schemas.openxmlformats.org/presentationml/2006/main">
-  <p:cSld>
-    <p:spTree>
-      <p:nvGrpSpPr>
         <p:cNvPr id="1" name=""/>
         <p:cNvGrpSpPr/>
         <p:nvPr/>
@@ -13164,117 +12587,8 @@
           <a:lstStyle/>
           <a:p>
             <a:r>
-              <a:rPr sz="2600" b="1"/>
-              <a:t>References / Key Technical Basis</a:t>
-            </a:r>
-          </a:p>
-        </p:txBody>
-      </p:sp>
-      <p:sp>
-        <p:nvSpPr>
-          <p:cNvPr id="3" name="Content Placeholder 2"/>
-          <p:cNvSpPr>
-            <a:spLocks noGrp="1"/>
-          </p:cNvSpPr>
-          <p:nvPr>
-            <p:ph sz="quarter" idx="1"/>
-          </p:nvPr>
-        </p:nvSpPr>
-        <p:spPr/>
-        <p:txBody>
-          <a:bodyPr>
-            <a:normAutofit/>
-          </a:bodyPr>
-          <a:lstStyle/>
-          <a:p>
-            <a:pPr>
-              <a:lnSpc>
-                <a:spcPct val="150000"/>
-              </a:lnSpc>
-              <a:buFont typeface="Wingdings" panose="05000000000000000000" pitchFamily="2" charset="2"/>
-              <a:buChar char="v"/>
-            </a:pPr>
-            <a:r>
-              <a:rPr sz="1800" dirty="0">
-                <a:latin typeface="Calibri" panose="020F0502020204030204" pitchFamily="34" charset="0"/>
-                <a:cs typeface="Calibri" panose="020F0502020204030204" pitchFamily="34" charset="0"/>
-              </a:rPr>
-              <a:t>WPF DataGrid documentation and rendering model.</a:t>
-            </a:r>
-            <a:endParaRPr lang="en-US" sz="1800" dirty="0">
-              <a:latin typeface="Calibri" panose="020F0502020204030204" pitchFamily="34" charset="0"/>
-              <a:cs typeface="Calibri" panose="020F0502020204030204" pitchFamily="34" charset="0"/>
-            </a:endParaRPr>
-          </a:p>
-          <a:p>
-            <a:pPr>
-              <a:lnSpc>
-                <a:spcPct val="150000"/>
-              </a:lnSpc>
-              <a:buFont typeface="Wingdings" panose="05000000000000000000" pitchFamily="2" charset="2"/>
-              <a:buChar char="v"/>
-            </a:pPr>
-            <a:r>
-              <a:rPr sz="1800" dirty="0" err="1">
-                <a:latin typeface="Calibri" panose="020F0502020204030204" pitchFamily="34" charset="0"/>
-                <a:cs typeface="Calibri" panose="020F0502020204030204" pitchFamily="34" charset="0"/>
-              </a:rPr>
-              <a:t>SkiaSharp</a:t>
-            </a:r>
-            <a:r>
-              <a:rPr sz="1800" dirty="0">
-                <a:latin typeface="Calibri" panose="020F0502020204030204" pitchFamily="34" charset="0"/>
-                <a:cs typeface="Calibri" panose="020F0502020204030204" pitchFamily="34" charset="0"/>
-              </a:rPr>
-              <a:t> documentation and graphics/rendering concepts.</a:t>
-            </a:r>
-          </a:p>
-          <a:p>
-            <a:pPr>
-              <a:lnSpc>
-                <a:spcPct val="150000"/>
-              </a:lnSpc>
-              <a:buFont typeface="Wingdings" panose="05000000000000000000" pitchFamily="2" charset="2"/>
-              <a:buChar char="v"/>
-            </a:pPr>
-            <a:r>
-              <a:rPr sz="1800" dirty="0">
-                <a:latin typeface="Calibri" panose="020F0502020204030204" pitchFamily="34" charset="0"/>
-                <a:cs typeface="Calibri" panose="020F0502020204030204" pitchFamily="34" charset="0"/>
-              </a:rPr>
-              <a:t>NuGet package management and .NET library distribution.</a:t>
-            </a:r>
-          </a:p>
-          <a:p>
-            <a:pPr>
-              <a:lnSpc>
-                <a:spcPct val="150000"/>
-              </a:lnSpc>
-              <a:buFont typeface="Wingdings" panose="05000000000000000000" pitchFamily="2" charset="2"/>
-              <a:buChar char="v"/>
-            </a:pPr>
-            <a:r>
-              <a:rPr sz="1800" dirty="0">
-                <a:latin typeface="Calibri" panose="020F0502020204030204" pitchFamily="34" charset="0"/>
-                <a:cs typeface="Calibri" panose="020F0502020204030204" pitchFamily="34" charset="0"/>
-              </a:rPr>
-              <a:t>CI/CD practices for automated build, test, package, and release workflows.</a:t>
-            </a:r>
-          </a:p>
-          <a:p>
-            <a:pPr>
-              <a:lnSpc>
-                <a:spcPct val="150000"/>
-              </a:lnSpc>
-              <a:buFont typeface="Wingdings" panose="05000000000000000000" pitchFamily="2" charset="2"/>
-              <a:buChar char="v"/>
-            </a:pPr>
-            <a:r>
-              <a:rPr sz="1800" dirty="0">
-                <a:latin typeface="Calibri" panose="020F0502020204030204" pitchFamily="34" charset="0"/>
-                <a:cs typeface="Calibri" panose="020F0502020204030204" pitchFamily="34" charset="0"/>
-              </a:rPr>
-              <a:t>Performance engineering: frame-time measurement and large-dataset benchmarking.</a:t>
+              <a:rPr sz="2400" b="1"/>
+              <a:t>RACI - Team Responsibility Matrix</a:t>
             </a:r>
           </a:p>
         </p:txBody>
@@ -13322,670 +12636,7 @@
             <a:fld id="{9EBC64C3-3FC7-4C40-910B-2643F037F02C}" type="slidenum">
               <a:rPr lang="en-US" smtClean="0"/>
               <a:pPr/>
-              <a:t>12</a:t>
-            </a:fld>
-            <a:endParaRPr lang="en-US" dirty="0"/>
-          </a:p>
-        </p:txBody>
-      </p:sp>
-      <p:sp>
-        <p:nvSpPr>
-          <p:cNvPr id="6" name="Date Placeholder 5"/>
-          <p:cNvSpPr>
-            <a:spLocks noGrp="1"/>
-          </p:cNvSpPr>
-          <p:nvPr>
-            <p:ph type="dt" sz="half" idx="10"/>
-          </p:nvPr>
-        </p:nvSpPr>
-        <p:spPr/>
-        <p:txBody>
-          <a:bodyPr/>
-          <a:lstStyle/>
-          <a:p>
-            <a:pPr algn="ctr"/>
-            <a:r>
-              <a:rPr lang="en-US" dirty="0"/>
-              <a:t> Hamdard University </a:t>
-            </a:r>
-          </a:p>
-        </p:txBody>
-      </p:sp>
-    </p:spTree>
-    <p:extLst>
-      <p:ext uri="{BB962C8B-B14F-4D97-AF65-F5344CB8AC3E}">
-        <p14:creationId xmlns:p14="http://schemas.microsoft.com/office/powerpoint/2010/main" val="850711667"/>
-      </p:ext>
-    </p:extLst>
-  </p:cSld>
-  <p:clrMapOvr>
-    <a:masterClrMapping/>
-  </p:clrMapOvr>
-</p:sld>
-</file>
-
-<file path=ppt/slides/slide13.xml><?xml version="1.0" encoding="utf-8"?>
-<p:sld xmlns:a="http://schemas.openxmlformats.org/drawingml/2006/main" xmlns:p="http://schemas.openxmlformats.org/presentationml/2006/main" xmlns:r="http://schemas.openxmlformats.org/officeDocument/2006/relationships">
-  <p:cSld>
-    <p:spTree>
-      <p:nvGrpSpPr>
-        <p:cNvPr id="1" name=""/>
-        <p:cNvGrpSpPr/>
-        <p:nvPr/>
-      </p:nvGrpSpPr>
-      <p:grpSpPr/>
-      <p:sp>
-        <p:nvSpPr>
-          <p:cNvPr id="2" name="Title 1"/>
-          <p:cNvSpPr>
-            <a:spLocks noGrp="1"/>
-          </p:cNvSpPr>
-          <p:nvPr>
-            <p:ph type="title"/>
-          </p:nvPr>
-        </p:nvSpPr>
-        <p:spPr/>
-        <p:txBody>
-          <a:bodyPr/>
-          <a:lstStyle/>
-          <a:p>
-            <a:r>
-              <a:rPr sz="2600" b="1"/>
-              <a:t>Change of Scope</a:t>
-            </a:r>
-          </a:p>
-        </p:txBody>
-      </p:sp>
-      <p:sp>
-        <p:nvSpPr>
-          <p:cNvPr id="3" name="Content Placeholder 2"/>
-          <p:cNvSpPr>
-            <a:spLocks noGrp="1"/>
-          </p:cNvSpPr>
-          <p:nvPr>
-            <p:ph sz="quarter" idx="1"/>
-          </p:nvPr>
-        </p:nvSpPr>
-        <p:spPr/>
-        <p:txBody>
-          <a:bodyPr>
-            <a:normAutofit/>
-          </a:bodyPr>
-          <a:lstStyle/>
-          <a:p>
-            <a:pPr>
-              <a:lnSpc>
-                <a:spcPct val="124000"/>
-              </a:lnSpc>
-              <a:buFont typeface="Wingdings" panose="05000000000000000000" pitchFamily="2" charset="2"/>
-              <a:buChar char="v"/>
-            </a:pPr>
-            <a:r>
-              <a:rPr sz="1400" dirty="0">
-                <a:solidFill>
-                  <a:schemeClr val="tx1">
-                    <a:lumMod val="95000"/>
-                    <a:lumOff val="5000"/>
-                  </a:schemeClr>
-                </a:solidFill>
-                <a:latin typeface="Calibri" panose="020F0502020204030204" pitchFamily="34" charset="0"/>
-                <a:cs typeface="Calibri" panose="020F0502020204030204" pitchFamily="34" charset="0"/>
-              </a:rPr>
-              <a:t>FYP-I milestone target: a proof-of-concept demonstrating roughly 30% of the work.</a:t>
-            </a:r>
-          </a:p>
-          <a:p>
-            <a:pPr>
-              <a:lnSpc>
-                <a:spcPct val="124000"/>
-              </a:lnSpc>
-              <a:buFont typeface="Wingdings" panose="05000000000000000000" pitchFamily="2" charset="2"/>
-              <a:buChar char="v"/>
-            </a:pPr>
-            <a:r>
-              <a:rPr sz="1400" dirty="0">
-                <a:solidFill>
-                  <a:schemeClr val="tx1">
-                    <a:lumMod val="95000"/>
-                    <a:lumOff val="5000"/>
-                  </a:schemeClr>
-                </a:solidFill>
-                <a:latin typeface="Calibri" panose="020F0502020204030204" pitchFamily="34" charset="0"/>
-                <a:cs typeface="Calibri" panose="020F0502020204030204" pitchFamily="34" charset="0"/>
-              </a:rPr>
-              <a:t>Actually delivered: MORE than 30% - a complete, versioned and packaged library, SkiaSharpControlV2 v2.18.0, with 552 passing unit tests.</a:t>
-            </a:r>
-          </a:p>
-          <a:p>
-            <a:pPr>
-              <a:lnSpc>
-                <a:spcPct val="124000"/>
-              </a:lnSpc>
-              <a:buFont typeface="Wingdings" panose="05000000000000000000" pitchFamily="2" charset="2"/>
-              <a:buChar char="v"/>
-            </a:pPr>
-            <a:r>
-              <a:rPr sz="1400" dirty="0">
-                <a:solidFill>
-                  <a:schemeClr val="tx1">
-                    <a:lumMod val="95000"/>
-                    <a:lumOff val="5000"/>
-                  </a:schemeClr>
-                </a:solidFill>
-                <a:latin typeface="Calibri" panose="020F0502020204030204" pitchFamily="34" charset="0"/>
-                <a:cs typeface="Calibri" panose="020F0502020204030204" pitchFamily="34" charset="0"/>
-              </a:rPr>
-              <a:t>Added beyond the original scope: grouping with six aggregations, conditional styling and triggers, in-cell buttons and commands, UI Automation, cross-application row drag-and-drop, TSV export, tooltips and density theming.</a:t>
-            </a:r>
-          </a:p>
-          <a:p>
-            <a:pPr>
-              <a:lnSpc>
-                <a:spcPct val="124000"/>
-              </a:lnSpc>
-              <a:buFont typeface="Wingdings" panose="05000000000000000000" pitchFamily="2" charset="2"/>
-              <a:buChar char="v"/>
-            </a:pPr>
-            <a:r>
-              <a:rPr sz="1400" dirty="0">
-                <a:solidFill>
-                  <a:schemeClr val="tx1">
-                    <a:lumMod val="95000"/>
-                    <a:lumOff val="5000"/>
-                  </a:schemeClr>
-                </a:solidFill>
-                <a:latin typeface="Calibri" panose="020F0502020204030204" pitchFamily="34" charset="0"/>
-                <a:cs typeface="Calibri" panose="020F0502020204030204" pitchFamily="34" charset="0"/>
-              </a:rPr>
-              <a:t>Brought forward: the GitHub Actions CI/CD pipeline and NuGet publishing are already in use, not just designed.</a:t>
-            </a:r>
-          </a:p>
-          <a:p>
-            <a:pPr>
-              <a:lnSpc>
-                <a:spcPct val="124000"/>
-              </a:lnSpc>
-              <a:buFont typeface="Wingdings" panose="05000000000000000000" pitchFamily="2" charset="2"/>
-              <a:buChar char="v"/>
-            </a:pPr>
-            <a:r>
-              <a:rPr sz="1400" dirty="0">
-                <a:solidFill>
-                  <a:schemeClr val="tx1">
-                    <a:lumMod val="95000"/>
-                    <a:lumOff val="5000"/>
-                  </a:schemeClr>
-                </a:solidFill>
-                <a:latin typeface="Calibri" panose="020F0502020204030204" pitchFamily="34" charset="0"/>
-                <a:cs typeface="Calibri" panose="020F0502020204030204" pitchFamily="34" charset="0"/>
-              </a:rPr>
-              <a:t>Deferred to FYP-II: the cloud telemetry dashboard, and dirty-rectangle rendering as the next performance step.</a:t>
-            </a:r>
-          </a:p>
-        </p:txBody>
-      </p:sp>
-      <p:sp>
-        <p:nvSpPr>
-          <p:cNvPr id="4" name="Footer Placeholder 3"/>
-          <p:cNvSpPr>
-            <a:spLocks noGrp="1"/>
-          </p:cNvSpPr>
-          <p:nvPr>
-            <p:ph type="ftr" sz="quarter" idx="11"/>
-          </p:nvPr>
-        </p:nvSpPr>
-        <p:spPr/>
-        <p:txBody>
-          <a:bodyPr/>
-          <a:lstStyle/>
-          <a:p>
-            <a:r>
-              <a:rPr sz="1000" b="0"/>
-              <a:t>FastGrid</a:t>
-            </a:r>
-            <a:endParaRPr lang="en-US" dirty="0"/>
-          </a:p>
-        </p:txBody>
-      </p:sp>
-      <p:sp>
-        <p:nvSpPr>
-          <p:cNvPr id="5" name="Slide Number Placeholder 4"/>
-          <p:cNvSpPr>
-            <a:spLocks noGrp="1"/>
-          </p:cNvSpPr>
-          <p:nvPr>
-            <p:ph type="sldNum" sz="quarter" idx="12"/>
-          </p:nvPr>
-        </p:nvSpPr>
-        <p:spPr/>
-        <p:txBody>
-          <a:bodyPr>
-            <a:normAutofit fontScale="62500" lnSpcReduction="20000"/>
-          </a:bodyPr>
-          <a:lstStyle/>
-          <a:p>
-            <a:fld id="{9EBC64C3-3FC7-4C40-910B-2643F037F02C}" type="slidenum">
-              <a:rPr lang="en-US" smtClean="0"/>
-              <a:pPr/>
-              <a:t>2</a:t>
-            </a:fld>
-            <a:endParaRPr lang="en-US" dirty="0"/>
-          </a:p>
-        </p:txBody>
-      </p:sp>
-      <p:sp>
-        <p:nvSpPr>
-          <p:cNvPr id="6" name="Date Placeholder 5"/>
-          <p:cNvSpPr>
-            <a:spLocks noGrp="1"/>
-          </p:cNvSpPr>
-          <p:nvPr>
-            <p:ph type="dt" sz="half" idx="10"/>
-          </p:nvPr>
-        </p:nvSpPr>
-        <p:spPr/>
-        <p:txBody>
-          <a:bodyPr/>
-          <a:lstStyle/>
-          <a:p>
-            <a:pPr algn="ctr"/>
-            <a:r>
-              <a:rPr lang="en-US" dirty="0"/>
-              <a:t>   Hamdard University </a:t>
-            </a:r>
-          </a:p>
-        </p:txBody>
-      </p:sp>
-    </p:spTree>
-  </p:cSld>
-  <p:clrMapOvr>
-    <a:masterClrMapping/>
-  </p:clrMapOvr>
-</p:sld>
-</file>
-
-<file path=ppt/slides/slide14.xml><?xml version="1.0" encoding="utf-8"?>
-<p:sld xmlns:a="http://schemas.openxmlformats.org/drawingml/2006/main" xmlns:p="http://schemas.openxmlformats.org/presentationml/2006/main" xmlns:r="http://schemas.openxmlformats.org/officeDocument/2006/relationships">
-  <p:cSld>
-    <p:spTree>
-      <p:nvGrpSpPr>
-        <p:cNvPr id="1" name=""/>
-        <p:cNvGrpSpPr/>
-        <p:nvPr/>
-      </p:nvGrpSpPr>
-      <p:grpSpPr/>
-      <p:sp>
-        <p:nvSpPr>
-          <p:cNvPr id="2" name="Title 1"/>
-          <p:cNvSpPr>
-            <a:spLocks noGrp="1"/>
-          </p:cNvSpPr>
-          <p:nvPr>
-            <p:ph type="title"/>
-          </p:nvPr>
-        </p:nvSpPr>
-        <p:spPr/>
-        <p:txBody>
-          <a:bodyPr/>
-          <a:lstStyle/>
-          <a:p>
-            <a:r>
-              <a:rPr sz="2600" b="1"/>
-              <a:t>Tools &amp; Technologies</a:t>
-            </a:r>
-          </a:p>
-        </p:txBody>
-      </p:sp>
-      <p:sp>
-        <p:nvSpPr>
-          <p:cNvPr id="3" name="Content Placeholder 2"/>
-          <p:cNvSpPr>
-            <a:spLocks noGrp="1"/>
-          </p:cNvSpPr>
-          <p:nvPr>
-            <p:ph sz="quarter" idx="1"/>
-          </p:nvPr>
-        </p:nvSpPr>
-        <p:spPr/>
-        <p:txBody>
-          <a:bodyPr>
-            <a:normAutofit/>
-          </a:bodyPr>
-          <a:lstStyle/>
-          <a:p>
-            <a:pPr>
-              <a:lnSpc>
-                <a:spcPct val="126000"/>
-              </a:lnSpc>
-              <a:buFont typeface="Wingdings" panose="05000000000000000000" pitchFamily="2" charset="2"/>
-              <a:buChar char="v"/>
-            </a:pPr>
-            <a:r>
-              <a:rPr sz="1500" dirty="0">
-                <a:solidFill>
-                  <a:schemeClr val="tx1">
-                    <a:lumMod val="95000"/>
-                    <a:lumOff val="5000"/>
-                  </a:schemeClr>
-                </a:solidFill>
-                <a:latin typeface="Calibri" panose="020F0502020204030204" pitchFamily="34" charset="0"/>
-                <a:cs typeface="Calibri" panose="020F0502020204030204" pitchFamily="34" charset="0"/>
-              </a:rPr>
-              <a:t>Language &amp; Runtime - C# on .NET 8 (net8.0-windows); WPF with XAML and the MVVM pattern.</a:t>
-            </a:r>
-          </a:p>
-          <a:p>
-            <a:pPr>
-              <a:lnSpc>
-                <a:spcPct val="126000"/>
-              </a:lnSpc>
-              <a:buFont typeface="Wingdings" panose="05000000000000000000" pitchFamily="2" charset="2"/>
-              <a:buChar char="v"/>
-            </a:pPr>
-            <a:r>
-              <a:rPr sz="1500" dirty="0">
-                <a:solidFill>
-                  <a:schemeClr val="tx1">
-                    <a:lumMod val="95000"/>
-                    <a:lumOff val="5000"/>
-                  </a:schemeClr>
-                </a:solidFill>
-                <a:latin typeface="Calibri" panose="020F0502020204030204" pitchFamily="34" charset="0"/>
-                <a:cs typeface="Calibri" panose="020F0502020204030204" pitchFamily="34" charset="0"/>
-              </a:rPr>
-              <a:t>Rendering - SkiaSharp.Views.WPF 3.116.1 (SKElement) over the native Skia 2D graphics engine.</a:t>
-            </a:r>
-          </a:p>
-          <a:p>
-            <a:pPr>
-              <a:lnSpc>
-                <a:spcPct val="126000"/>
-              </a:lnSpc>
-              <a:buFont typeface="Wingdings" panose="05000000000000000000" pitchFamily="2" charset="2"/>
-              <a:buChar char="v"/>
-            </a:pPr>
-            <a:r>
-              <a:rPr sz="1500" dirty="0">
-                <a:solidFill>
-                  <a:schemeClr val="tx1">
-                    <a:lumMod val="95000"/>
-                    <a:lumOff val="5000"/>
-                  </a:schemeClr>
-                </a:solidFill>
-                <a:latin typeface="Calibri" panose="020F0502020204030204" pitchFamily="34" charset="0"/>
-                <a:cs typeface="Calibri" panose="020F0502020204030204" pitchFamily="34" charset="0"/>
-              </a:rPr>
-              <a:t>Testing - xUnit 2.5.3, NSubstitute 5.1.0, Coverlet, Microsoft.NET.Test.Sdk 17.8.0 (552 tests).</a:t>
-            </a:r>
-          </a:p>
-          <a:p>
-            <a:pPr>
-              <a:lnSpc>
-                <a:spcPct val="126000"/>
-              </a:lnSpc>
-              <a:buFont typeface="Wingdings" panose="05000000000000000000" pitchFamily="2" charset="2"/>
-              <a:buChar char="v"/>
-            </a:pPr>
-            <a:r>
-              <a:rPr sz="1500" dirty="0">
-                <a:solidFill>
-                  <a:schemeClr val="tx1">
-                    <a:lumMod val="95000"/>
-                    <a:lumOff val="5000"/>
-                  </a:schemeClr>
-                </a:solidFill>
-                <a:latin typeface="Calibri" panose="020F0502020204030204" pitchFamily="34" charset="0"/>
-                <a:cs typeface="Calibri" panose="020F0502020204030204" pitchFamily="34" charset="0"/>
-              </a:rPr>
-              <a:t>Accessibility - .NET UI Automation (AutomationPeer framework).</a:t>
-            </a:r>
-          </a:p>
-          <a:p>
-            <a:pPr>
-              <a:lnSpc>
-                <a:spcPct val="126000"/>
-              </a:lnSpc>
-              <a:buFont typeface="Wingdings" panose="05000000000000000000" pitchFamily="2" charset="2"/>
-              <a:buChar char="v"/>
-            </a:pPr>
-            <a:r>
-              <a:rPr sz="1500" dirty="0">
-                <a:solidFill>
-                  <a:schemeClr val="tx1">
-                    <a:lumMod val="95000"/>
-                    <a:lumOff val="5000"/>
-                  </a:schemeClr>
-                </a:solidFill>
-                <a:latin typeface="Calibri" panose="020F0502020204030204" pitchFamily="34" charset="0"/>
-                <a:cs typeface="Calibri" panose="020F0502020204030204" pitchFamily="34" charset="0"/>
-              </a:rPr>
-              <a:t>CI/CD - GitHub Actions: build, test, pack and publish, gated on a green test run.</a:t>
-            </a:r>
-          </a:p>
-          <a:p>
-            <a:pPr>
-              <a:lnSpc>
-                <a:spcPct val="126000"/>
-              </a:lnSpc>
-              <a:buFont typeface="Wingdings" panose="05000000000000000000" pitchFamily="2" charset="2"/>
-              <a:buChar char="v"/>
-            </a:pPr>
-            <a:r>
-              <a:rPr sz="1500" dirty="0">
-                <a:solidFill>
-                  <a:schemeClr val="tx1">
-                    <a:lumMod val="95000"/>
-                    <a:lumOff val="5000"/>
-                  </a:schemeClr>
-                </a:solidFill>
-                <a:latin typeface="Calibri" panose="020F0502020204030204" pitchFamily="34" charset="0"/>
-                <a:cs typeface="Calibri" panose="020F0502020204030204" pitchFamily="34" charset="0"/>
-              </a:rPr>
-              <a:t>Source control &amp; Packaging - Git / GitHub (LogicielServices/SkiaGrid); NuGet package SkiaSharpControlV2 v2.18.0, MIT licence.</a:t>
-            </a:r>
-          </a:p>
-          <a:p>
-            <a:pPr>
-              <a:lnSpc>
-                <a:spcPct val="126000"/>
-              </a:lnSpc>
-              <a:buFont typeface="Wingdings" panose="05000000000000000000" pitchFamily="2" charset="2"/>
-              <a:buChar char="v"/>
-            </a:pPr>
-            <a:r>
-              <a:rPr sz="1500" dirty="0">
-                <a:solidFill>
-                  <a:schemeClr val="tx1">
-                    <a:lumMod val="95000"/>
-                    <a:lumOff val="5000"/>
-                  </a:schemeClr>
-                </a:solidFill>
-                <a:latin typeface="Calibri" panose="020F0502020204030204" pitchFamily="34" charset="0"/>
-                <a:cs typeface="Calibri" panose="020F0502020204030204" pitchFamily="34" charset="0"/>
-              </a:rPr>
-              <a:t>Design &amp; Documentation - draw.io (diagrams.net) for architecture, DFD, Gantt and deployment charts.</a:t>
-            </a:r>
-          </a:p>
-          <a:p>
-            <a:pPr>
-              <a:lnSpc>
-                <a:spcPct val="126000"/>
-              </a:lnSpc>
-              <a:buFont typeface="Wingdings" panose="05000000000000000000" pitchFamily="2" charset="2"/>
-              <a:buChar char="v"/>
-            </a:pPr>
-            <a:r>
-              <a:rPr sz="1500" dirty="0">
-                <a:solidFill>
-                  <a:schemeClr val="tx1">
-                    <a:lumMod val="95000"/>
-                    <a:lumOff val="5000"/>
-                  </a:schemeClr>
-                </a:solidFill>
-                <a:latin typeface="Calibri" panose="020F0502020204030204" pitchFamily="34" charset="0"/>
-                <a:cs typeface="Calibri" panose="020F0502020204030204" pitchFamily="34" charset="0"/>
-              </a:rPr>
-              <a:t>Profiling - built-in GridMetrics instrumentation (Stopwatch scopes, counters, p50/p95/p99) with a live Performance Dashboard.</a:t>
-            </a:r>
-          </a:p>
-        </p:txBody>
-      </p:sp>
-      <p:sp>
-        <p:nvSpPr>
-          <p:cNvPr id="4" name="Footer Placeholder 3"/>
-          <p:cNvSpPr>
-            <a:spLocks noGrp="1"/>
-          </p:cNvSpPr>
-          <p:nvPr>
-            <p:ph type="ftr" sz="quarter" idx="11"/>
-          </p:nvPr>
-        </p:nvSpPr>
-        <p:spPr/>
-        <p:txBody>
-          <a:bodyPr/>
-          <a:lstStyle/>
-          <a:p>
-            <a:r>
-              <a:rPr sz="1000" b="0"/>
-              <a:t>FastGrid</a:t>
-            </a:r>
-            <a:endParaRPr lang="en-US" dirty="0"/>
-          </a:p>
-        </p:txBody>
-      </p:sp>
-      <p:sp>
-        <p:nvSpPr>
-          <p:cNvPr id="5" name="Slide Number Placeholder 4"/>
-          <p:cNvSpPr>
-            <a:spLocks noGrp="1"/>
-          </p:cNvSpPr>
-          <p:nvPr>
-            <p:ph type="sldNum" sz="quarter" idx="12"/>
-          </p:nvPr>
-        </p:nvSpPr>
-        <p:spPr/>
-        <p:txBody>
-          <a:bodyPr>
-            <a:normAutofit fontScale="62500" lnSpcReduction="20000"/>
-          </a:bodyPr>
-          <a:lstStyle/>
-          <a:p>
-            <a:fld id="{9EBC64C3-3FC7-4C40-910B-2643F037F02C}" type="slidenum">
-              <a:rPr lang="en-US" smtClean="0"/>
-              <a:pPr/>
-              <a:t>2</a:t>
-            </a:fld>
-            <a:endParaRPr lang="en-US" dirty="0"/>
-          </a:p>
-        </p:txBody>
-      </p:sp>
-      <p:sp>
-        <p:nvSpPr>
-          <p:cNvPr id="6" name="Date Placeholder 5"/>
-          <p:cNvSpPr>
-            <a:spLocks noGrp="1"/>
-          </p:cNvSpPr>
-          <p:nvPr>
-            <p:ph type="dt" sz="half" idx="10"/>
-          </p:nvPr>
-        </p:nvSpPr>
-        <p:spPr/>
-        <p:txBody>
-          <a:bodyPr/>
-          <a:lstStyle/>
-          <a:p>
-            <a:pPr algn="ctr"/>
-            <a:r>
-              <a:rPr lang="en-US" dirty="0"/>
-              <a:t>   Hamdard University </a:t>
-            </a:r>
-          </a:p>
-        </p:txBody>
-      </p:sp>
-    </p:spTree>
-  </p:cSld>
-  <p:clrMapOvr>
-    <a:masterClrMapping/>
-  </p:clrMapOvr>
-</p:sld>
-</file>
-
-<file path=ppt/slides/slide15.xml><?xml version="1.0" encoding="utf-8"?>
-<p:sld xmlns:a="http://schemas.openxmlformats.org/drawingml/2006/main" xmlns:p="http://schemas.openxmlformats.org/presentationml/2006/main" xmlns:r="http://schemas.openxmlformats.org/officeDocument/2006/relationships">
-  <p:cSld>
-    <p:spTree>
-      <p:nvGrpSpPr>
-        <p:cNvPr id="1" name=""/>
-        <p:cNvGrpSpPr/>
-        <p:nvPr/>
-      </p:nvGrpSpPr>
-      <p:grpSpPr/>
-      <p:sp>
-        <p:nvSpPr>
-          <p:cNvPr id="2" name="Title 1"/>
-          <p:cNvSpPr>
-            <a:spLocks noGrp="1"/>
-          </p:cNvSpPr>
-          <p:nvPr>
-            <p:ph type="title"/>
-          </p:nvPr>
-        </p:nvSpPr>
-        <p:spPr/>
-        <p:txBody>
-          <a:bodyPr/>
-          <a:lstStyle/>
-          <a:p>
-            <a:r>
-              <a:rPr sz="2400" b="1"/>
-              <a:t>RACI - Team Responsibility Matrix</a:t>
-            </a:r>
-          </a:p>
-        </p:txBody>
-      </p:sp>
-      <p:sp>
-        <p:nvSpPr>
-          <p:cNvPr id="4" name="Footer Placeholder 3"/>
-          <p:cNvSpPr>
-            <a:spLocks noGrp="1"/>
-          </p:cNvSpPr>
-          <p:nvPr>
-            <p:ph type="ftr" sz="quarter" idx="11"/>
-          </p:nvPr>
-        </p:nvSpPr>
-        <p:spPr/>
-        <p:txBody>
-          <a:bodyPr/>
-          <a:lstStyle/>
-          <a:p>
-            <a:r>
-              <a:rPr sz="1000" b="0"/>
-              <a:t>FastGrid</a:t>
-            </a:r>
-            <a:endParaRPr lang="en-US" dirty="0"/>
-          </a:p>
-        </p:txBody>
-      </p:sp>
-      <p:sp>
-        <p:nvSpPr>
-          <p:cNvPr id="5" name="Slide Number Placeholder 4"/>
-          <p:cNvSpPr>
-            <a:spLocks noGrp="1"/>
-          </p:cNvSpPr>
-          <p:nvPr>
-            <p:ph type="sldNum" sz="quarter" idx="12"/>
-          </p:nvPr>
-        </p:nvSpPr>
-        <p:spPr/>
-        <p:txBody>
-          <a:bodyPr>
-            <a:normAutofit fontScale="62500" lnSpcReduction="20000"/>
-          </a:bodyPr>
-          <a:lstStyle/>
-          <a:p>
-            <a:fld id="{9EBC64C3-3FC7-4C40-910B-2643F037F02C}" type="slidenum">
-              <a:rPr lang="en-US" smtClean="0"/>
-              <a:pPr/>
-              <a:t>2</a:t>
+              <a:t>10</a:t>
             </a:fld>
             <a:endParaRPr lang="en-US" dirty="0"/>
           </a:p>
@@ -14020,11 +12671,17 @@
           <p:cNvGraphicFramePr>
             <a:graphicFrameLocks noGrp="1"/>
           </p:cNvGraphicFramePr>
-          <p:nvPr/>
+          <p:nvPr>
+            <p:extLst>
+              <p:ext uri="{D42A27DB-BD31-4B8C-83A1-F6EECF244321}">
+                <p14:modId xmlns:p14="http://schemas.microsoft.com/office/powerpoint/2010/main" val="3607303084"/>
+              </p:ext>
+            </p:extLst>
+          </p:nvPr>
         </p:nvGraphicFramePr>
         <p:xfrm>
-          <a:off x="384048" y="1298448"/>
-          <a:ext cx="8375904" cy="4041648"/>
+          <a:off x="384048" y="1731264"/>
+          <a:ext cx="8375904" cy="3608836"/>
         </p:xfrm>
         <a:graphic>
           <a:graphicData uri="http://schemas.openxmlformats.org/drawingml/2006/table">
@@ -14033,21 +12690,51 @@
                 <a:tableStyleId>{5C22544A-7EE6-4342-B048-85BDC9FD1C3A}</a:tableStyleId>
               </a:tblPr>
               <a:tblGrid>
-                <a:gridCol w="3328416"/>
-                <a:gridCol w="1261872"/>
-                <a:gridCol w="1261872"/>
-                <a:gridCol w="1261872"/>
-                <a:gridCol w="1261872"/>
+                <a:gridCol w="3328416">
+                  <a:extLst>
+                    <a:ext uri="{9D8B030D-6E8A-4147-A177-3AD203B41FA5}">
+                      <a16:colId xmlns:a16="http://schemas.microsoft.com/office/drawing/2014/main" val="20000"/>
+                    </a:ext>
+                  </a:extLst>
+                </a:gridCol>
+                <a:gridCol w="1261872">
+                  <a:extLst>
+                    <a:ext uri="{9D8B030D-6E8A-4147-A177-3AD203B41FA5}">
+                      <a16:colId xmlns:a16="http://schemas.microsoft.com/office/drawing/2014/main" val="20001"/>
+                    </a:ext>
+                  </a:extLst>
+                </a:gridCol>
+                <a:gridCol w="1261872">
+                  <a:extLst>
+                    <a:ext uri="{9D8B030D-6E8A-4147-A177-3AD203B41FA5}">
+                      <a16:colId xmlns:a16="http://schemas.microsoft.com/office/drawing/2014/main" val="20002"/>
+                    </a:ext>
+                  </a:extLst>
+                </a:gridCol>
+                <a:gridCol w="1261872">
+                  <a:extLst>
+                    <a:ext uri="{9D8B030D-6E8A-4147-A177-3AD203B41FA5}">
+                      <a16:colId xmlns:a16="http://schemas.microsoft.com/office/drawing/2014/main" val="20003"/>
+                    </a:ext>
+                  </a:extLst>
+                </a:gridCol>
+                <a:gridCol w="1261872">
+                  <a:extLst>
+                    <a:ext uri="{9D8B030D-6E8A-4147-A177-3AD203B41FA5}">
+                      <a16:colId xmlns:a16="http://schemas.microsoft.com/office/drawing/2014/main" val="20004"/>
+                    </a:ext>
+                  </a:extLst>
+                </a:gridCol>
               </a:tblGrid>
-              <a:tr h="566928">
+              <a:tr h="506216">
                 <a:tc>
                   <a:txBody>
-                    <a:bodyPr wrap="square"/>
+                    <a:bodyPr/>
                     <a:lstStyle/>
                     <a:p>
                       <a:pPr algn="l"/>
                       <a:r>
-                        <a:rPr sz="1200" b="1">
+                        <a:rPr sz="1200" b="1" dirty="0">
                           <a:solidFill>
                             <a:srgbClr val="FFFFFF"/>
                           </a:solidFill>
@@ -14061,7 +12748,7 @@
                 </a:tc>
                 <a:tc>
                   <a:txBody>
-                    <a:bodyPr wrap="square"/>
+                    <a:bodyPr/>
                     <a:lstStyle/>
                     <a:p>
                       <a:pPr algn="ctr"/>
@@ -14092,7 +12779,7 @@
                 </a:tc>
                 <a:tc>
                   <a:txBody>
-                    <a:bodyPr wrap="square"/>
+                    <a:bodyPr/>
                     <a:lstStyle/>
                     <a:p>
                       <a:pPr algn="ctr"/>
@@ -14123,7 +12810,7 @@
                 </a:tc>
                 <a:tc>
                   <a:txBody>
-                    <a:bodyPr wrap="square"/>
+                    <a:bodyPr/>
                     <a:lstStyle/>
                     <a:p>
                       <a:pPr algn="ctr"/>
@@ -14154,7 +12841,7 @@
                 </a:tc>
                 <a:tc>
                   <a:txBody>
-                    <a:bodyPr wrap="square"/>
+                    <a:bodyPr/>
                     <a:lstStyle/>
                     <a:p>
                       <a:pPr algn="ctr"/>
@@ -14171,16 +12858,21 @@
                   </a:txBody>
                   <a:tcPr marL="45720" marR="45720" marT="9144" marB="9144" anchor="ctr"/>
                 </a:tc>
+                <a:extLst>
+                  <a:ext uri="{0D108BD9-81ED-4DB2-BD59-A6C34878D82A}">
+                    <a16:rowId xmlns:a16="http://schemas.microsoft.com/office/drawing/2014/main" val="10000"/>
+                  </a:ext>
+                </a:extLst>
               </a:tr>
-              <a:tr h="347472">
+              <a:tr h="310262">
                 <a:tc>
                   <a:txBody>
-                    <a:bodyPr wrap="square"/>
+                    <a:bodyPr/>
                     <a:lstStyle/>
                     <a:p>
                       <a:pPr algn="l"/>
                       <a:r>
-                        <a:rPr sz="1100" b="0">
+                        <a:rPr sz="1100" b="0" dirty="0">
                           <a:solidFill>
                             <a:srgbClr val="202020"/>
                           </a:solidFill>
@@ -14194,7 +12886,7 @@
                 </a:tc>
                 <a:tc>
                   <a:txBody>
-                    <a:bodyPr wrap="square"/>
+                    <a:bodyPr/>
                     <a:lstStyle/>
                     <a:p>
                       <a:pPr algn="ctr"/>
@@ -14213,7 +12905,7 @@
                 </a:tc>
                 <a:tc>
                   <a:txBody>
-                    <a:bodyPr wrap="square"/>
+                    <a:bodyPr/>
                     <a:lstStyle/>
                     <a:p>
                       <a:pPr algn="ctr"/>
@@ -14232,7 +12924,7 @@
                 </a:tc>
                 <a:tc>
                   <a:txBody>
-                    <a:bodyPr wrap="square"/>
+                    <a:bodyPr/>
                     <a:lstStyle/>
                     <a:p>
                       <a:pPr algn="ctr"/>
@@ -14251,7 +12943,7 @@
                 </a:tc>
                 <a:tc>
                   <a:txBody>
-                    <a:bodyPr wrap="square"/>
+                    <a:bodyPr/>
                     <a:lstStyle/>
                     <a:p>
                       <a:pPr algn="ctr"/>
@@ -14268,16 +12960,21 @@
                   </a:txBody>
                   <a:tcPr marL="45720" marR="45720" marT="9144" marB="9144" anchor="ctr"/>
                 </a:tc>
+                <a:extLst>
+                  <a:ext uri="{0D108BD9-81ED-4DB2-BD59-A6C34878D82A}">
+                    <a16:rowId xmlns:a16="http://schemas.microsoft.com/office/drawing/2014/main" val="10001"/>
+                  </a:ext>
+                </a:extLst>
               </a:tr>
-              <a:tr h="347472">
+              <a:tr h="310262">
                 <a:tc>
                   <a:txBody>
-                    <a:bodyPr wrap="square"/>
+                    <a:bodyPr/>
                     <a:lstStyle/>
                     <a:p>
                       <a:pPr algn="l"/>
                       <a:r>
-                        <a:rPr sz="1100" b="0">
+                        <a:rPr sz="1100" b="0" dirty="0">
                           <a:solidFill>
                             <a:srgbClr val="202020"/>
                           </a:solidFill>
@@ -14291,7 +12988,7 @@
                 </a:tc>
                 <a:tc>
                   <a:txBody>
-                    <a:bodyPr wrap="square"/>
+                    <a:bodyPr/>
                     <a:lstStyle/>
                     <a:p>
                       <a:pPr algn="ctr"/>
@@ -14310,7 +13007,7 @@
                 </a:tc>
                 <a:tc>
                   <a:txBody>
-                    <a:bodyPr wrap="square"/>
+                    <a:bodyPr/>
                     <a:lstStyle/>
                     <a:p>
                       <a:pPr algn="ctr"/>
@@ -14329,7 +13026,7 @@
                 </a:tc>
                 <a:tc>
                   <a:txBody>
-                    <a:bodyPr wrap="square"/>
+                    <a:bodyPr/>
                     <a:lstStyle/>
                     <a:p>
                       <a:pPr algn="ctr"/>
@@ -14348,7 +13045,7 @@
                 </a:tc>
                 <a:tc>
                   <a:txBody>
-                    <a:bodyPr wrap="square"/>
+                    <a:bodyPr/>
                     <a:lstStyle/>
                     <a:p>
                       <a:pPr algn="ctr"/>
@@ -14365,22 +13062,36 @@
                   </a:txBody>
                   <a:tcPr marL="45720" marR="45720" marT="9144" marB="9144" anchor="ctr"/>
                 </a:tc>
+                <a:extLst>
+                  <a:ext uri="{0D108BD9-81ED-4DB2-BD59-A6C34878D82A}">
+                    <a16:rowId xmlns:a16="http://schemas.microsoft.com/office/drawing/2014/main" val="10002"/>
+                  </a:ext>
+                </a:extLst>
               </a:tr>
-              <a:tr h="347472">
+              <a:tr h="310262">
                 <a:tc>
                   <a:txBody>
-                    <a:bodyPr wrap="square"/>
+                    <a:bodyPr/>
                     <a:lstStyle/>
                     <a:p>
                       <a:pPr algn="l"/>
                       <a:r>
-                        <a:rPr sz="1100" b="0">
+                        <a:rPr sz="1100" b="0" dirty="0" err="1">
                           <a:solidFill>
                             <a:srgbClr val="202020"/>
                           </a:solidFill>
                           <a:latin typeface="Calibri"/>
                         </a:rPr>
-                        <a:t>SkiaSharp Rendering Engine</a:t>
+                        <a:t>SkiaSharp</a:t>
+                      </a:r>
+                      <a:r>
+                        <a:rPr sz="1100" b="0" dirty="0">
+                          <a:solidFill>
+                            <a:srgbClr val="202020"/>
+                          </a:solidFill>
+                          <a:latin typeface="Calibri"/>
+                        </a:rPr>
+                        <a:t> Rendering Engine</a:t>
                       </a:r>
                     </a:p>
                   </a:txBody>
@@ -14388,7 +13099,7 @@
                 </a:tc>
                 <a:tc>
                   <a:txBody>
-                    <a:bodyPr wrap="square"/>
+                    <a:bodyPr/>
                     <a:lstStyle/>
                     <a:p>
                       <a:pPr algn="ctr"/>
@@ -14407,7 +13118,7 @@
                 </a:tc>
                 <a:tc>
                   <a:txBody>
-                    <a:bodyPr wrap="square"/>
+                    <a:bodyPr/>
                     <a:lstStyle/>
                     <a:p>
                       <a:pPr algn="ctr"/>
@@ -14426,7 +13137,7 @@
                 </a:tc>
                 <a:tc>
                   <a:txBody>
-                    <a:bodyPr wrap="square"/>
+                    <a:bodyPr/>
                     <a:lstStyle/>
                     <a:p>
                       <a:pPr algn="ctr"/>
@@ -14445,7 +13156,7 @@
                 </a:tc>
                 <a:tc>
                   <a:txBody>
-                    <a:bodyPr wrap="square"/>
+                    <a:bodyPr/>
                     <a:lstStyle/>
                     <a:p>
                       <a:pPr algn="ctr"/>
@@ -14462,11 +13173,16 @@
                   </a:txBody>
                   <a:tcPr marL="45720" marR="45720" marT="9144" marB="9144" anchor="ctr"/>
                 </a:tc>
+                <a:extLst>
+                  <a:ext uri="{0D108BD9-81ED-4DB2-BD59-A6C34878D82A}">
+                    <a16:rowId xmlns:a16="http://schemas.microsoft.com/office/drawing/2014/main" val="10003"/>
+                  </a:ext>
+                </a:extLst>
               </a:tr>
-              <a:tr h="347472">
+              <a:tr h="310262">
                 <a:tc>
                   <a:txBody>
-                    <a:bodyPr wrap="square"/>
+                    <a:bodyPr/>
                     <a:lstStyle/>
                     <a:p>
                       <a:pPr algn="l"/>
@@ -14485,7 +13201,7 @@
                 </a:tc>
                 <a:tc>
                   <a:txBody>
-                    <a:bodyPr wrap="square"/>
+                    <a:bodyPr/>
                     <a:lstStyle/>
                     <a:p>
                       <a:pPr algn="ctr"/>
@@ -14504,7 +13220,7 @@
                 </a:tc>
                 <a:tc>
                   <a:txBody>
-                    <a:bodyPr wrap="square"/>
+                    <a:bodyPr/>
                     <a:lstStyle/>
                     <a:p>
                       <a:pPr algn="ctr"/>
@@ -14523,7 +13239,7 @@
                 </a:tc>
                 <a:tc>
                   <a:txBody>
-                    <a:bodyPr wrap="square"/>
+                    <a:bodyPr/>
                     <a:lstStyle/>
                     <a:p>
                       <a:pPr algn="ctr"/>
@@ -14542,7 +13258,7 @@
                 </a:tc>
                 <a:tc>
                   <a:txBody>
-                    <a:bodyPr wrap="square"/>
+                    <a:bodyPr/>
                     <a:lstStyle/>
                     <a:p>
                       <a:pPr algn="ctr"/>
@@ -14559,11 +13275,16 @@
                   </a:txBody>
                   <a:tcPr marL="45720" marR="45720" marT="9144" marB="9144" anchor="ctr"/>
                 </a:tc>
+                <a:extLst>
+                  <a:ext uri="{0D108BD9-81ED-4DB2-BD59-A6C34878D82A}">
+                    <a16:rowId xmlns:a16="http://schemas.microsoft.com/office/drawing/2014/main" val="10004"/>
+                  </a:ext>
+                </a:extLst>
               </a:tr>
-              <a:tr h="347472">
+              <a:tr h="310262">
                 <a:tc>
                   <a:txBody>
-                    <a:bodyPr wrap="square"/>
+                    <a:bodyPr/>
                     <a:lstStyle/>
                     <a:p>
                       <a:pPr algn="l"/>
@@ -14582,7 +13303,7 @@
                 </a:tc>
                 <a:tc>
                   <a:txBody>
-                    <a:bodyPr wrap="square"/>
+                    <a:bodyPr/>
                     <a:lstStyle/>
                     <a:p>
                       <a:pPr algn="ctr"/>
@@ -14601,7 +13322,7 @@
                 </a:tc>
                 <a:tc>
                   <a:txBody>
-                    <a:bodyPr wrap="square"/>
+                    <a:bodyPr/>
                     <a:lstStyle/>
                     <a:p>
                       <a:pPr algn="ctr"/>
@@ -14620,7 +13341,7 @@
                 </a:tc>
                 <a:tc>
                   <a:txBody>
-                    <a:bodyPr wrap="square"/>
+                    <a:bodyPr/>
                     <a:lstStyle/>
                     <a:p>
                       <a:pPr algn="ctr"/>
@@ -14639,7 +13360,7 @@
                 </a:tc>
                 <a:tc>
                   <a:txBody>
-                    <a:bodyPr wrap="square"/>
+                    <a:bodyPr/>
                     <a:lstStyle/>
                     <a:p>
                       <a:pPr algn="ctr"/>
@@ -14656,11 +13377,16 @@
                   </a:txBody>
                   <a:tcPr marL="45720" marR="45720" marT="9144" marB="9144" anchor="ctr"/>
                 </a:tc>
+                <a:extLst>
+                  <a:ext uri="{0D108BD9-81ED-4DB2-BD59-A6C34878D82A}">
+                    <a16:rowId xmlns:a16="http://schemas.microsoft.com/office/drawing/2014/main" val="10005"/>
+                  </a:ext>
+                </a:extLst>
               </a:tr>
-              <a:tr h="347472">
+              <a:tr h="310262">
                 <a:tc>
                   <a:txBody>
-                    <a:bodyPr wrap="square"/>
+                    <a:bodyPr/>
                     <a:lstStyle/>
                     <a:p>
                       <a:pPr algn="l"/>
@@ -14679,7 +13405,7 @@
                 </a:tc>
                 <a:tc>
                   <a:txBody>
-                    <a:bodyPr wrap="square"/>
+                    <a:bodyPr/>
                     <a:lstStyle/>
                     <a:p>
                       <a:pPr algn="ctr"/>
@@ -14698,7 +13424,7 @@
                 </a:tc>
                 <a:tc>
                   <a:txBody>
-                    <a:bodyPr wrap="square"/>
+                    <a:bodyPr/>
                     <a:lstStyle/>
                     <a:p>
                       <a:pPr algn="ctr"/>
@@ -14717,7 +13443,7 @@
                 </a:tc>
                 <a:tc>
                   <a:txBody>
-                    <a:bodyPr wrap="square"/>
+                    <a:bodyPr/>
                     <a:lstStyle/>
                     <a:p>
                       <a:pPr algn="ctr"/>
@@ -14736,7 +13462,7 @@
                 </a:tc>
                 <a:tc>
                   <a:txBody>
-                    <a:bodyPr wrap="square"/>
+                    <a:bodyPr/>
                     <a:lstStyle/>
                     <a:p>
                       <a:pPr algn="ctr"/>
@@ -14753,11 +13479,16 @@
                   </a:txBody>
                   <a:tcPr marL="45720" marR="45720" marT="9144" marB="9144" anchor="ctr"/>
                 </a:tc>
+                <a:extLst>
+                  <a:ext uri="{0D108BD9-81ED-4DB2-BD59-A6C34878D82A}">
+                    <a16:rowId xmlns:a16="http://schemas.microsoft.com/office/drawing/2014/main" val="10006"/>
+                  </a:ext>
+                </a:extLst>
               </a:tr>
-              <a:tr h="347472">
+              <a:tr h="310262">
                 <a:tc>
                   <a:txBody>
-                    <a:bodyPr wrap="square"/>
+                    <a:bodyPr/>
                     <a:lstStyle/>
                     <a:p>
                       <a:pPr algn="l"/>
@@ -14776,7 +13507,7 @@
                 </a:tc>
                 <a:tc>
                   <a:txBody>
-                    <a:bodyPr wrap="square"/>
+                    <a:bodyPr/>
                     <a:lstStyle/>
                     <a:p>
                       <a:pPr algn="ctr"/>
@@ -14795,7 +13526,7 @@
                 </a:tc>
                 <a:tc>
                   <a:txBody>
-                    <a:bodyPr wrap="square"/>
+                    <a:bodyPr/>
                     <a:lstStyle/>
                     <a:p>
                       <a:pPr algn="ctr"/>
@@ -14814,7 +13545,7 @@
                 </a:tc>
                 <a:tc>
                   <a:txBody>
-                    <a:bodyPr wrap="square"/>
+                    <a:bodyPr/>
                     <a:lstStyle/>
                     <a:p>
                       <a:pPr algn="ctr"/>
@@ -14833,7 +13564,7 @@
                 </a:tc>
                 <a:tc>
                   <a:txBody>
-                    <a:bodyPr wrap="square"/>
+                    <a:bodyPr/>
                     <a:lstStyle/>
                     <a:p>
                       <a:pPr algn="ctr"/>
@@ -14850,11 +13581,16 @@
                   </a:txBody>
                   <a:tcPr marL="45720" marR="45720" marT="9144" marB="9144" anchor="ctr"/>
                 </a:tc>
+                <a:extLst>
+                  <a:ext uri="{0D108BD9-81ED-4DB2-BD59-A6C34878D82A}">
+                    <a16:rowId xmlns:a16="http://schemas.microsoft.com/office/drawing/2014/main" val="10007"/>
+                  </a:ext>
+                </a:extLst>
               </a:tr>
-              <a:tr h="347472">
+              <a:tr h="310262">
                 <a:tc>
                   <a:txBody>
-                    <a:bodyPr wrap="square"/>
+                    <a:bodyPr/>
                     <a:lstStyle/>
                     <a:p>
                       <a:pPr algn="l"/>
@@ -14873,7 +13609,7 @@
                 </a:tc>
                 <a:tc>
                   <a:txBody>
-                    <a:bodyPr wrap="square"/>
+                    <a:bodyPr/>
                     <a:lstStyle/>
                     <a:p>
                       <a:pPr algn="ctr"/>
@@ -14892,7 +13628,7 @@
                 </a:tc>
                 <a:tc>
                   <a:txBody>
-                    <a:bodyPr wrap="square"/>
+                    <a:bodyPr/>
                     <a:lstStyle/>
                     <a:p>
                       <a:pPr algn="ctr"/>
@@ -14911,7 +13647,7 @@
                 </a:tc>
                 <a:tc>
                   <a:txBody>
-                    <a:bodyPr wrap="square"/>
+                    <a:bodyPr/>
                     <a:lstStyle/>
                     <a:p>
                       <a:pPr algn="ctr"/>
@@ -14930,7 +13666,7 @@
                 </a:tc>
                 <a:tc>
                   <a:txBody>
-                    <a:bodyPr wrap="square"/>
+                    <a:bodyPr/>
                     <a:lstStyle/>
                     <a:p>
                       <a:pPr algn="ctr"/>
@@ -14947,22 +13683,45 @@
                   </a:txBody>
                   <a:tcPr marL="45720" marR="45720" marT="9144" marB="9144" anchor="ctr"/>
                 </a:tc>
+                <a:extLst>
+                  <a:ext uri="{0D108BD9-81ED-4DB2-BD59-A6C34878D82A}">
+                    <a16:rowId xmlns:a16="http://schemas.microsoft.com/office/drawing/2014/main" val="10008"/>
+                  </a:ext>
+                </a:extLst>
               </a:tr>
-              <a:tr h="347472">
+              <a:tr h="310262">
                 <a:tc>
                   <a:txBody>
-                    <a:bodyPr wrap="square"/>
+                    <a:bodyPr/>
                     <a:lstStyle/>
                     <a:p>
                       <a:pPr algn="l"/>
                       <a:r>
-                        <a:rPr sz="1100" b="0">
+                        <a:rPr sz="1100" b="0" dirty="0">
                           <a:solidFill>
                             <a:srgbClr val="202020"/>
                           </a:solidFill>
                           <a:latin typeface="Calibri"/>
                         </a:rPr>
-                        <a:t>CI/CD Pipeline &amp; NuGet Release (v2.18.0)</a:t>
+                        <a:t>CI/CD Pipeline &amp; NuGet Release (v</a:t>
+                      </a:r>
+                      <a:r>
+                        <a:rPr lang="en-US" sz="1100" b="0" dirty="0">
+                          <a:solidFill>
+                            <a:srgbClr val="202020"/>
+                          </a:solidFill>
+                          <a:latin typeface="Calibri"/>
+                        </a:rPr>
+                        <a:t>1.0.2</a:t>
+                      </a:r>
+                      <a:r>
+                        <a:rPr sz="1100" b="0" dirty="0">
+                          <a:solidFill>
+                            <a:srgbClr val="202020"/>
+                          </a:solidFill>
+                          <a:latin typeface="Calibri"/>
+                        </a:rPr>
+                        <a:t>)</a:t>
                       </a:r>
                     </a:p>
                   </a:txBody>
@@ -14970,7 +13729,7 @@
                 </a:tc>
                 <a:tc>
                   <a:txBody>
-                    <a:bodyPr wrap="square"/>
+                    <a:bodyPr/>
                     <a:lstStyle/>
                     <a:p>
                       <a:pPr algn="ctr"/>
@@ -14989,7 +13748,7 @@
                 </a:tc>
                 <a:tc>
                   <a:txBody>
-                    <a:bodyPr wrap="square"/>
+                    <a:bodyPr/>
                     <a:lstStyle/>
                     <a:p>
                       <a:pPr algn="ctr"/>
@@ -15008,7 +13767,7 @@
                 </a:tc>
                 <a:tc>
                   <a:txBody>
-                    <a:bodyPr wrap="square"/>
+                    <a:bodyPr/>
                     <a:lstStyle/>
                     <a:p>
                       <a:pPr algn="ctr"/>
@@ -15027,7 +13786,7 @@
                 </a:tc>
                 <a:tc>
                   <a:txBody>
-                    <a:bodyPr wrap="square"/>
+                    <a:bodyPr/>
                     <a:lstStyle/>
                     <a:p>
                       <a:pPr algn="ctr"/>
@@ -15044,11 +13803,16 @@
                   </a:txBody>
                   <a:tcPr marL="45720" marR="45720" marT="9144" marB="9144" anchor="ctr"/>
                 </a:tc>
+                <a:extLst>
+                  <a:ext uri="{0D108BD9-81ED-4DB2-BD59-A6C34878D82A}">
+                    <a16:rowId xmlns:a16="http://schemas.microsoft.com/office/drawing/2014/main" val="10009"/>
+                  </a:ext>
+                </a:extLst>
               </a:tr>
-              <a:tr h="347472">
+              <a:tr h="310262">
                 <a:tc>
                   <a:txBody>
-                    <a:bodyPr wrap="square"/>
+                    <a:bodyPr/>
                     <a:lstStyle/>
                     <a:p>
                       <a:pPr algn="l"/>
@@ -15067,7 +13831,7 @@
                 </a:tc>
                 <a:tc>
                   <a:txBody>
-                    <a:bodyPr wrap="square"/>
+                    <a:bodyPr/>
                     <a:lstStyle/>
                     <a:p>
                       <a:pPr algn="ctr"/>
@@ -15086,7 +13850,7 @@
                 </a:tc>
                 <a:tc>
                   <a:txBody>
-                    <a:bodyPr wrap="square"/>
+                    <a:bodyPr/>
                     <a:lstStyle/>
                     <a:p>
                       <a:pPr algn="ctr"/>
@@ -15105,7 +13869,7 @@
                 </a:tc>
                 <a:tc>
                   <a:txBody>
-                    <a:bodyPr wrap="square"/>
+                    <a:bodyPr/>
                     <a:lstStyle/>
                     <a:p>
                       <a:pPr algn="ctr"/>
@@ -15124,12 +13888,12 @@
                 </a:tc>
                 <a:tc>
                   <a:txBody>
-                    <a:bodyPr wrap="square"/>
+                    <a:bodyPr/>
                     <a:lstStyle/>
                     <a:p>
                       <a:pPr algn="ctr"/>
                       <a:r>
-                        <a:rPr sz="1200" b="1">
+                        <a:rPr sz="1200" b="1" dirty="0">
                           <a:solidFill>
                             <a:srgbClr val="B85450"/>
                           </a:solidFill>
@@ -15141,6 +13905,11 @@
                   </a:txBody>
                   <a:tcPr marL="45720" marR="45720" marT="9144" marB="9144" anchor="ctr"/>
                 </a:tc>
+                <a:extLst>
+                  <a:ext uri="{0D108BD9-81ED-4DB2-BD59-A6C34878D82A}">
+                    <a16:rowId xmlns:a16="http://schemas.microsoft.com/office/drawing/2014/main" val="10010"/>
+                  </a:ext>
+                </a:extLst>
               </a:tr>
             </a:tbl>
           </a:graphicData>
@@ -15187,8 +13956,8 @@
 </p:sld>
 </file>
 
-<file path=ppt/slides/slide16.xml><?xml version="1.0" encoding="utf-8"?>
-<p:sld xmlns:a="http://schemas.openxmlformats.org/drawingml/2006/main" xmlns:p="http://schemas.openxmlformats.org/presentationml/2006/main" xmlns:r="http://schemas.openxmlformats.org/officeDocument/2006/relationships">
+<file path=ppt/slides/slide11.xml><?xml version="1.0" encoding="utf-8"?>
+<p:sld xmlns:a="http://schemas.openxmlformats.org/drawingml/2006/main" xmlns:r="http://schemas.openxmlformats.org/officeDocument/2006/relationships" xmlns:p="http://schemas.openxmlformats.org/presentationml/2006/main">
   <p:cSld>
     <p:spTree>
       <p:nvGrpSpPr>
@@ -15196,7 +13965,14 @@
         <p:cNvGrpSpPr/>
         <p:nvPr/>
       </p:nvGrpSpPr>
-      <p:grpSpPr/>
+      <p:grpSpPr>
+        <a:xfrm>
+          <a:off x="0" y="0"/>
+          <a:ext cx="0" cy="0"/>
+          <a:chOff x="0" y="0"/>
+          <a:chExt cx="0" cy="0"/>
+        </a:xfrm>
+      </p:grpSpPr>
       <p:sp>
         <p:nvSpPr>
           <p:cNvPr id="2" name="Title 1"/>
@@ -15262,7 +14038,7 @@
             <a:fld id="{9EBC64C3-3FC7-4C40-910B-2643F037F02C}" type="slidenum">
               <a:rPr lang="en-US" smtClean="0"/>
               <a:pPr/>
-              <a:t>2</a:t>
+              <a:t>11</a:t>
             </a:fld>
             <a:endParaRPr lang="en-US" dirty="0"/>
           </a:p>
@@ -15300,15 +14076,15 @@
           <p:nvPr/>
         </p:nvPicPr>
         <p:blipFill>
-          <a:blip r:embed="rId2"/>
+          <a:blip r:embed="rId3"/>
           <a:stretch>
             <a:fillRect/>
           </a:stretch>
         </p:blipFill>
         <p:spPr>
           <a:xfrm>
-            <a:off x="1383177" y="1225296"/>
-            <a:ext cx="6377645" cy="4764024"/>
+            <a:off x="143871" y="1600200"/>
+            <a:ext cx="8771529" cy="4389120"/>
           </a:xfrm>
           <a:prstGeom prst="rect">
             <a:avLst/>
@@ -15357,8 +14133,8 @@
 </p:sld>
 </file>
 
-<file path=ppt/slides/slide17.xml><?xml version="1.0" encoding="utf-8"?>
-<p:sld xmlns:a="http://schemas.openxmlformats.org/drawingml/2006/main" xmlns:p="http://schemas.openxmlformats.org/presentationml/2006/main" xmlns:r="http://schemas.openxmlformats.org/officeDocument/2006/relationships">
+<file path=ppt/slides/slide12.xml><?xml version="1.0" encoding="utf-8"?>
+<p:sld xmlns:a="http://schemas.openxmlformats.org/drawingml/2006/main" xmlns:r="http://schemas.openxmlformats.org/officeDocument/2006/relationships" xmlns:p="http://schemas.openxmlformats.org/presentationml/2006/main">
   <p:cSld>
     <p:spTree>
       <p:nvGrpSpPr>
@@ -15366,7 +14142,14 @@
         <p:cNvGrpSpPr/>
         <p:nvPr/>
       </p:nvGrpSpPr>
-      <p:grpSpPr/>
+      <p:grpSpPr>
+        <a:xfrm>
+          <a:off x="0" y="0"/>
+          <a:ext cx="0" cy="0"/>
+          <a:chOff x="0" y="0"/>
+          <a:chExt cx="0" cy="0"/>
+        </a:xfrm>
+      </p:grpSpPr>
       <p:sp>
         <p:nvSpPr>
           <p:cNvPr id="2" name="Title 1"/>
@@ -15383,8 +14166,99 @@
           <a:lstStyle/>
           <a:p>
             <a:r>
-              <a:rPr sz="2300" b="1"/>
-              <a:t>Deployment Flow Chart - CI/CD</a:t>
+              <a:rPr sz="2600" b="1"/>
+              <a:t>Budget / Costing</a:t>
+            </a:r>
+          </a:p>
+        </p:txBody>
+      </p:sp>
+      <p:sp>
+        <p:nvSpPr>
+          <p:cNvPr id="3" name="Content Placeholder 2"/>
+          <p:cNvSpPr>
+            <a:spLocks noGrp="1"/>
+          </p:cNvSpPr>
+          <p:nvPr>
+            <p:ph sz="quarter" idx="1"/>
+          </p:nvPr>
+        </p:nvSpPr>
+        <p:spPr/>
+        <p:txBody>
+          <a:bodyPr/>
+          <a:lstStyle/>
+          <a:p>
+            <a:pPr>
+              <a:lnSpc>
+                <a:spcPct val="150000"/>
+              </a:lnSpc>
+              <a:buFont typeface="Wingdings" panose="05000000000000000000" pitchFamily="2" charset="2"/>
+              <a:buChar char="v"/>
+            </a:pPr>
+            <a:r>
+              <a:rPr sz="1800" dirty="0">
+                <a:latin typeface="Calibri" panose="020F0502020204030204" pitchFamily="34" charset="0"/>
+                <a:cs typeface="Calibri" panose="020F0502020204030204" pitchFamily="34" charset="0"/>
+              </a:rPr>
+              <a:t>Development tools: primarily open-source / student-available tooling.</a:t>
+            </a:r>
+            <a:endParaRPr lang="en-US" dirty="0">
+              <a:latin typeface="Calibri" panose="020F0502020204030204" pitchFamily="34" charset="0"/>
+              <a:cs typeface="Calibri" panose="020F0502020204030204" pitchFamily="34" charset="0"/>
+            </a:endParaRPr>
+          </a:p>
+          <a:p>
+            <a:pPr>
+              <a:lnSpc>
+                <a:spcPct val="150000"/>
+              </a:lnSpc>
+              <a:buFont typeface="Wingdings" panose="05000000000000000000" pitchFamily="2" charset="2"/>
+              <a:buChar char="v"/>
+            </a:pPr>
+            <a:r>
+              <a:rPr sz="1800" dirty="0" err="1">
+                <a:latin typeface="Calibri" panose="020F0502020204030204" pitchFamily="34" charset="0"/>
+                <a:cs typeface="Calibri" panose="020F0502020204030204" pitchFamily="34" charset="0"/>
+              </a:rPr>
+              <a:t>SkiaSharp</a:t>
+            </a:r>
+            <a:r>
+              <a:rPr sz="1800" dirty="0">
+                <a:latin typeface="Calibri" panose="020F0502020204030204" pitchFamily="34" charset="0"/>
+                <a:cs typeface="Calibri" panose="020F0502020204030204" pitchFamily="34" charset="0"/>
+              </a:rPr>
+              <a:t>: open-source graphics library.</a:t>
+            </a:r>
+          </a:p>
+          <a:p>
+            <a:pPr>
+              <a:lnSpc>
+                <a:spcPct val="150000"/>
+              </a:lnSpc>
+              <a:buFont typeface="Wingdings" panose="05000000000000000000" pitchFamily="2" charset="2"/>
+              <a:buChar char="v"/>
+            </a:pPr>
+            <a:r>
+              <a:rPr sz="1800" dirty="0">
+                <a:latin typeface="Calibri" panose="020F0502020204030204" pitchFamily="34" charset="0"/>
+                <a:cs typeface="Calibri" panose="020F0502020204030204" pitchFamily="34" charset="0"/>
+              </a:rPr>
+              <a:t>Cloud resources: use low-cost/free-tier resources where available for CI/CD, registry, and telemetry proof-of-concept.</a:t>
+            </a:r>
+          </a:p>
+          <a:p>
+            <a:pPr>
+              <a:lnSpc>
+                <a:spcPct val="150000"/>
+              </a:lnSpc>
+              <a:buFont typeface="Wingdings" panose="05000000000000000000" pitchFamily="2" charset="2"/>
+              <a:buChar char="v"/>
+            </a:pPr>
+            <a:r>
+              <a:rPr sz="1800" dirty="0">
+                <a:latin typeface="Calibri" panose="020F0502020204030204" pitchFamily="34" charset="0"/>
+                <a:cs typeface="Calibri" panose="020F0502020204030204" pitchFamily="34" charset="0"/>
+              </a:rPr>
+              <a:t>Expected FYP-I cost: minimal; exact cloud cost depends on selected services and usage.</a:t>
             </a:r>
           </a:p>
         </p:txBody>
@@ -15432,7 +14306,1055 @@
             <a:fld id="{9EBC64C3-3FC7-4C40-910B-2643F037F02C}" type="slidenum">
               <a:rPr lang="en-US" smtClean="0"/>
               <a:pPr/>
+              <a:t>12</a:t>
+            </a:fld>
+            <a:endParaRPr lang="en-US" dirty="0"/>
+          </a:p>
+        </p:txBody>
+      </p:sp>
+      <p:sp>
+        <p:nvSpPr>
+          <p:cNvPr id="6" name="Date Placeholder 5"/>
+          <p:cNvSpPr>
+            <a:spLocks noGrp="1"/>
+          </p:cNvSpPr>
+          <p:nvPr>
+            <p:ph type="dt" sz="half" idx="10"/>
+          </p:nvPr>
+        </p:nvSpPr>
+        <p:spPr/>
+        <p:txBody>
+          <a:bodyPr/>
+          <a:lstStyle/>
+          <a:p>
+            <a:pPr algn="ctr"/>
+            <a:r>
+              <a:rPr lang="en-US" dirty="0"/>
+              <a:t>Hamdard University </a:t>
+            </a:r>
+          </a:p>
+        </p:txBody>
+      </p:sp>
+    </p:spTree>
+    <p:extLst>
+      <p:ext uri="{BB962C8B-B14F-4D97-AF65-F5344CB8AC3E}">
+        <p14:creationId xmlns:p14="http://schemas.microsoft.com/office/powerpoint/2010/main" val="88316679"/>
+      </p:ext>
+    </p:extLst>
+  </p:cSld>
+  <p:clrMapOvr>
+    <a:masterClrMapping/>
+  </p:clrMapOvr>
+</p:sld>
+</file>
+
+<file path=ppt/slides/slide13.xml><?xml version="1.0" encoding="utf-8"?>
+<p:sld xmlns:a="http://schemas.openxmlformats.org/drawingml/2006/main" xmlns:r="http://schemas.openxmlformats.org/officeDocument/2006/relationships" xmlns:p="http://schemas.openxmlformats.org/presentationml/2006/main">
+  <p:cSld>
+    <p:spTree>
+      <p:nvGrpSpPr>
+        <p:cNvPr id="1" name=""/>
+        <p:cNvGrpSpPr/>
+        <p:nvPr/>
+      </p:nvGrpSpPr>
+      <p:grpSpPr>
+        <a:xfrm>
+          <a:off x="0" y="0"/>
+          <a:ext cx="0" cy="0"/>
+          <a:chOff x="0" y="0"/>
+          <a:chExt cx="0" cy="0"/>
+        </a:xfrm>
+      </p:grpSpPr>
+      <p:sp>
+        <p:nvSpPr>
+          <p:cNvPr id="2" name="Title 1"/>
+          <p:cNvSpPr>
+            <a:spLocks noGrp="1"/>
+          </p:cNvSpPr>
+          <p:nvPr>
+            <p:ph type="title"/>
+          </p:nvPr>
+        </p:nvSpPr>
+        <p:spPr/>
+        <p:txBody>
+          <a:bodyPr/>
+          <a:lstStyle/>
+          <a:p>
+            <a:r>
+              <a:rPr sz="2600" b="1"/>
+              <a:t>FYP Deliverables</a:t>
+            </a:r>
+          </a:p>
+        </p:txBody>
+      </p:sp>
+      <p:sp>
+        <p:nvSpPr>
+          <p:cNvPr id="3" name="Content Placeholder 2"/>
+          <p:cNvSpPr>
+            <a:spLocks noGrp="1"/>
+          </p:cNvSpPr>
+          <p:nvPr>
+            <p:ph sz="quarter" idx="1"/>
+          </p:nvPr>
+        </p:nvSpPr>
+        <p:spPr/>
+        <p:txBody>
+          <a:bodyPr/>
+          <a:lstStyle/>
+          <a:p>
+            <a:pPr>
+              <a:buFont typeface="Wingdings" panose="05000000000000000000" pitchFamily="2" charset="2"/>
+              <a:buChar char="v"/>
+            </a:pPr>
+            <a:r>
+              <a:rPr sz="1500" dirty="0" err="1">
+                <a:latin typeface="Calibri" panose="020F0502020204030204" pitchFamily="34" charset="0"/>
+                <a:cs typeface="Calibri" panose="020F0502020204030204" pitchFamily="34" charset="0"/>
+              </a:rPr>
+              <a:t>FastGrid</a:t>
+            </a:r>
+            <a:r>
+              <a:rPr sz="1500" dirty="0">
+                <a:latin typeface="Calibri" panose="020F0502020204030204" pitchFamily="34" charset="0"/>
+                <a:cs typeface="Calibri" panose="020F0502020204030204" pitchFamily="34" charset="0"/>
+              </a:rPr>
+              <a:t> WPF library, packaged as NuGet SkiaSharpControlV2 v</a:t>
+            </a:r>
+            <a:r>
+              <a:rPr lang="en-US" sz="1500" dirty="0">
+                <a:latin typeface="Calibri" panose="020F0502020204030204" pitchFamily="34" charset="0"/>
+                <a:cs typeface="Calibri" panose="020F0502020204030204" pitchFamily="34" charset="0"/>
+              </a:rPr>
+              <a:t>1</a:t>
+            </a:r>
+            <a:r>
+              <a:rPr sz="1500" dirty="0">
+                <a:latin typeface="Calibri" panose="020F0502020204030204" pitchFamily="34" charset="0"/>
+                <a:cs typeface="Calibri" panose="020F0502020204030204" pitchFamily="34" charset="0"/>
+              </a:rPr>
+              <a:t>.</a:t>
+            </a:r>
+            <a:r>
+              <a:rPr lang="en-US" sz="1500" dirty="0">
+                <a:latin typeface="Calibri" panose="020F0502020204030204" pitchFamily="34" charset="0"/>
+                <a:cs typeface="Calibri" panose="020F0502020204030204" pitchFamily="34" charset="0"/>
+              </a:rPr>
+              <a:t>0</a:t>
+            </a:r>
+            <a:r>
+              <a:rPr sz="1500" dirty="0">
+                <a:latin typeface="Calibri" panose="020F0502020204030204" pitchFamily="34" charset="0"/>
+                <a:cs typeface="Calibri" panose="020F0502020204030204" pitchFamily="34" charset="0"/>
+              </a:rPr>
+              <a:t>.</a:t>
+            </a:r>
+            <a:r>
+              <a:rPr lang="en-US" sz="1500" dirty="0">
+                <a:latin typeface="Calibri" panose="020F0502020204030204" pitchFamily="34" charset="0"/>
+                <a:cs typeface="Calibri" panose="020F0502020204030204" pitchFamily="34" charset="0"/>
+              </a:rPr>
               <a:t>2</a:t>
+            </a:r>
+            <a:r>
+              <a:rPr sz="1500" dirty="0">
+                <a:latin typeface="Calibri" panose="020F0502020204030204" pitchFamily="34" charset="0"/>
+                <a:cs typeface="Calibri" panose="020F0502020204030204" pitchFamily="34" charset="0"/>
+              </a:rPr>
+              <a:t> (MIT).</a:t>
+            </a:r>
+            <a:endParaRPr lang="en-US" dirty="0">
+              <a:latin typeface="Calibri" panose="020F0502020204030204" pitchFamily="34" charset="0"/>
+              <a:cs typeface="Calibri" panose="020F0502020204030204" pitchFamily="34" charset="0"/>
+            </a:endParaRPr>
+          </a:p>
+          <a:p>
+            <a:pPr>
+              <a:buFont typeface="Wingdings" panose="05000000000000000000" pitchFamily="2" charset="2"/>
+              <a:buChar char="v"/>
+            </a:pPr>
+            <a:r>
+              <a:rPr sz="1500" dirty="0" err="1">
+                <a:latin typeface="Calibri" panose="020F0502020204030204" pitchFamily="34" charset="0"/>
+                <a:cs typeface="Calibri" panose="020F0502020204030204" pitchFamily="34" charset="0"/>
+              </a:rPr>
+              <a:t>SkiaSharp-based immediate-mode grid renderer with 552 automated unit tests.</a:t>
+            </a:r>
+            <a:endParaRPr lang="en-US" dirty="0">
+              <a:latin typeface="Calibri" panose="020F0502020204030204" pitchFamily="34" charset="0"/>
+              <a:cs typeface="Calibri" panose="020F0502020204030204" pitchFamily="34" charset="0"/>
+            </a:endParaRPr>
+          </a:p>
+          <a:p>
+            <a:pPr>
+              <a:buFont typeface="Wingdings" panose="05000000000000000000" pitchFamily="2" charset="2"/>
+              <a:buChar char="v"/>
+            </a:pPr>
+            <a:r>
+              <a:rPr sz="1500" dirty="0" err="1">
+                <a:latin typeface="Calibri" panose="020F0502020204030204" pitchFamily="34" charset="0"/>
+                <a:cs typeface="Calibri" panose="020F0502020204030204" pitchFamily="34" charset="0"/>
+              </a:rPr>
+              <a:t>Data/view and grid-management components, plus UI Automation accessibility support.</a:t>
+            </a:r>
+            <a:endParaRPr lang="en-US" dirty="0">
+              <a:latin typeface="Calibri" panose="020F0502020204030204" pitchFamily="34" charset="0"/>
+              <a:cs typeface="Calibri" panose="020F0502020204030204" pitchFamily="34" charset="0"/>
+            </a:endParaRPr>
+          </a:p>
+          <a:p>
+            <a:pPr>
+              <a:buFont typeface="Wingdings" panose="05000000000000000000" pitchFamily="2" charset="2"/>
+              <a:buChar char="v"/>
+            </a:pPr>
+            <a:r>
+              <a:rPr sz="1500" dirty="0" err="1">
+                <a:latin typeface="Calibri" panose="020F0502020204030204" pitchFamily="34" charset="0"/>
+                <a:cs typeface="Calibri" panose="020F0502020204030204" pitchFamily="34" charset="0"/>
+              </a:rPr>
+              <a:t>Measured performance evidence: 2.59 ms at 100,000 rows and 2.75 ms at 1,000,000 rows.</a:t>
+            </a:r>
+            <a:endParaRPr lang="en-US" dirty="0">
+              <a:latin typeface="Calibri" panose="020F0502020204030204" pitchFamily="34" charset="0"/>
+              <a:cs typeface="Calibri" panose="020F0502020204030204" pitchFamily="34" charset="0"/>
+            </a:endParaRPr>
+          </a:p>
+          <a:p>
+            <a:pPr>
+              <a:buFont typeface="Wingdings" panose="05000000000000000000" pitchFamily="2" charset="2"/>
+              <a:buChar char="v"/>
+            </a:pPr>
+            <a:r>
+              <a:rPr sz="1500" dirty="0" err="1">
+                <a:latin typeface="Calibri" panose="020F0502020204030204" pitchFamily="34" charset="0"/>
+                <a:cs typeface="Calibri" panose="020F0502020204030204" pitchFamily="34" charset="0"/>
+              </a:rPr>
+              <a:t>GitHub Actions CI/CD workflow and NuGet distribution.</a:t>
+            </a:r>
+            <a:endParaRPr lang="en-US" dirty="0">
+              <a:latin typeface="Calibri" panose="020F0502020204030204" pitchFamily="34" charset="0"/>
+              <a:cs typeface="Calibri" panose="020F0502020204030204" pitchFamily="34" charset="0"/>
+            </a:endParaRPr>
+          </a:p>
+          <a:p>
+            <a:pPr>
+              <a:buFont typeface="Wingdings" panose="05000000000000000000" pitchFamily="2" charset="2"/>
+              <a:buChar char="v"/>
+            </a:pPr>
+            <a:r>
+              <a:rPr sz="1500" dirty="0" err="1">
+                <a:latin typeface="Calibri" panose="020F0502020204030204" pitchFamily="34" charset="0"/>
+                <a:cs typeface="Calibri" panose="020F0502020204030204" pitchFamily="34" charset="0"/>
+              </a:rPr>
+              <a:t>Documentation set: SRS, architecture diagram, DFD levels 0-2, deployment flow chart, Gantt chart, and a 306-member property/API reference.</a:t>
+            </a:r>
+            <a:endParaRPr lang="en-US" dirty="0">
+              <a:latin typeface="Calibri" panose="020F0502020204030204" pitchFamily="34" charset="0"/>
+              <a:cs typeface="Calibri" panose="020F0502020204030204" pitchFamily="34" charset="0"/>
+            </a:endParaRPr>
+          </a:p>
+        </p:txBody>
+      </p:sp>
+      <p:sp>
+        <p:nvSpPr>
+          <p:cNvPr id="4" name="Footer Placeholder 3"/>
+          <p:cNvSpPr>
+            <a:spLocks noGrp="1"/>
+          </p:cNvSpPr>
+          <p:nvPr>
+            <p:ph type="ftr" sz="quarter" idx="11"/>
+          </p:nvPr>
+        </p:nvSpPr>
+        <p:spPr/>
+        <p:txBody>
+          <a:bodyPr/>
+          <a:lstStyle/>
+          <a:p>
+            <a:r>
+              <a:rPr sz="1000" b="0"/>
+              <a:t>FastGrid</a:t>
+            </a:r>
+            <a:endParaRPr lang="en-US" dirty="0"/>
+          </a:p>
+        </p:txBody>
+      </p:sp>
+      <p:sp>
+        <p:nvSpPr>
+          <p:cNvPr id="5" name="Slide Number Placeholder 4"/>
+          <p:cNvSpPr>
+            <a:spLocks noGrp="1"/>
+          </p:cNvSpPr>
+          <p:nvPr>
+            <p:ph type="sldNum" sz="quarter" idx="12"/>
+          </p:nvPr>
+        </p:nvSpPr>
+        <p:spPr/>
+        <p:txBody>
+          <a:bodyPr>
+            <a:normAutofit fontScale="62500" lnSpcReduction="20000"/>
+          </a:bodyPr>
+          <a:lstStyle/>
+          <a:p>
+            <a:fld id="{9EBC64C3-3FC7-4C40-910B-2643F037F02C}" type="slidenum">
+              <a:rPr lang="en-US" smtClean="0"/>
+              <a:pPr/>
+              <a:t>13</a:t>
+            </a:fld>
+            <a:endParaRPr lang="en-US" dirty="0"/>
+          </a:p>
+        </p:txBody>
+      </p:sp>
+      <p:sp>
+        <p:nvSpPr>
+          <p:cNvPr id="6" name="Date Placeholder 5"/>
+          <p:cNvSpPr>
+            <a:spLocks noGrp="1"/>
+          </p:cNvSpPr>
+          <p:nvPr>
+            <p:ph type="dt" sz="half" idx="10"/>
+          </p:nvPr>
+        </p:nvSpPr>
+        <p:spPr/>
+        <p:txBody>
+          <a:bodyPr/>
+          <a:lstStyle/>
+          <a:p>
+            <a:pPr algn="ctr"/>
+            <a:r>
+              <a:rPr lang="en-US" dirty="0"/>
+              <a:t>Hamdard University </a:t>
+            </a:r>
+          </a:p>
+        </p:txBody>
+      </p:sp>
+      <p:graphicFrame>
+        <p:nvGraphicFramePr>
+          <p:cNvPr id="25" name="Diagram 24">
+            <a:extLst>
+              <a:ext uri="{FF2B5EF4-FFF2-40B4-BE49-F238E27FC236}">
+                <a16:creationId xmlns:a16="http://schemas.microsoft.com/office/drawing/2014/main" id="{9CF80D84-4E42-8495-2E07-02E06D4FD473}"/>
+              </a:ext>
+            </a:extLst>
+          </p:cNvPr>
+          <p:cNvGraphicFramePr/>
+          <p:nvPr>
+            <p:extLst>
+              <p:ext uri="{D42A27DB-BD31-4B8C-83A1-F6EECF244321}">
+                <p14:modId xmlns:p14="http://schemas.microsoft.com/office/powerpoint/2010/main" val="1096193165"/>
+              </p:ext>
+            </p:extLst>
+          </p:nvPr>
+        </p:nvGraphicFramePr>
+        <p:xfrm>
+          <a:off x="2555748" y="3652935"/>
+          <a:ext cx="4267200" cy="2819400"/>
+        </p:xfrm>
+        <a:graphic>
+          <a:graphicData uri="http://schemas.openxmlformats.org/drawingml/2006/diagram">
+            <dgm:relIds xmlns:dgm="http://schemas.openxmlformats.org/drawingml/2006/diagram" xmlns:r="http://schemas.openxmlformats.org/officeDocument/2006/relationships" r:dm="rId2" r:lo="rId3" r:qs="rId4" r:cs="rId5"/>
+          </a:graphicData>
+        </a:graphic>
+      </p:graphicFrame>
+    </p:spTree>
+    <p:extLst>
+      <p:ext uri="{BB962C8B-B14F-4D97-AF65-F5344CB8AC3E}">
+        <p14:creationId xmlns:p14="http://schemas.microsoft.com/office/powerpoint/2010/main" val="1601842832"/>
+      </p:ext>
+    </p:extLst>
+  </p:cSld>
+  <p:clrMapOvr>
+    <a:masterClrMapping/>
+  </p:clrMapOvr>
+</p:sld>
+</file>
+
+<file path=ppt/slides/slide14.xml><?xml version="1.0" encoding="utf-8"?>
+<p:sld xmlns:a="http://schemas.openxmlformats.org/drawingml/2006/main" xmlns:r="http://schemas.openxmlformats.org/officeDocument/2006/relationships" xmlns:p="http://schemas.openxmlformats.org/presentationml/2006/main">
+  <p:cSld>
+    <p:spTree>
+      <p:nvGrpSpPr>
+        <p:cNvPr id="1" name="">
+          <a:extLst>
+            <a:ext uri="{FF2B5EF4-FFF2-40B4-BE49-F238E27FC236}">
+              <a16:creationId xmlns:a16="http://schemas.microsoft.com/office/drawing/2014/main" id="{4259746B-B4A6-E89C-36B2-20B6EDE01D69}"/>
+            </a:ext>
+          </a:extLst>
+        </p:cNvPr>
+        <p:cNvGrpSpPr/>
+        <p:nvPr/>
+      </p:nvGrpSpPr>
+      <p:grpSpPr>
+        <a:xfrm>
+          <a:off x="0" y="0"/>
+          <a:ext cx="0" cy="0"/>
+          <a:chOff x="0" y="0"/>
+          <a:chExt cx="0" cy="0"/>
+        </a:xfrm>
+      </p:grpSpPr>
+      <p:sp>
+        <p:nvSpPr>
+          <p:cNvPr id="2" name="Title 1">
+            <a:extLst>
+              <a:ext uri="{FF2B5EF4-FFF2-40B4-BE49-F238E27FC236}">
+                <a16:creationId xmlns:a16="http://schemas.microsoft.com/office/drawing/2014/main" id="{64E5FD4D-ACE7-E8F6-E92A-286923D60800}"/>
+              </a:ext>
+            </a:extLst>
+          </p:cNvPr>
+          <p:cNvSpPr>
+            <a:spLocks noGrp="1"/>
+          </p:cNvSpPr>
+          <p:nvPr>
+            <p:ph type="title"/>
+          </p:nvPr>
+        </p:nvSpPr>
+        <p:spPr/>
+        <p:txBody>
+          <a:bodyPr/>
+          <a:lstStyle/>
+          <a:p>
+            <a:r>
+              <a:rPr sz="2600" b="1"/>
+              <a:t>Literature Review &amp; Alternatives</a:t>
+            </a:r>
+          </a:p>
+        </p:txBody>
+      </p:sp>
+      <p:sp>
+        <p:nvSpPr>
+          <p:cNvPr id="3" name="Content Placeholder 2">
+            <a:extLst>
+              <a:ext uri="{FF2B5EF4-FFF2-40B4-BE49-F238E27FC236}">
+                <a16:creationId xmlns:a16="http://schemas.microsoft.com/office/drawing/2014/main" id="{8BAA305D-5E62-5373-4521-A4FD15AB09CC}"/>
+              </a:ext>
+            </a:extLst>
+          </p:cNvPr>
+          <p:cNvSpPr>
+            <a:spLocks noGrp="1"/>
+          </p:cNvSpPr>
+          <p:nvPr>
+            <p:ph sz="quarter" idx="1"/>
+          </p:nvPr>
+        </p:nvSpPr>
+        <p:spPr/>
+        <p:txBody>
+          <a:bodyPr/>
+          <a:lstStyle/>
+          <a:p>
+            <a:pPr>
+              <a:buFont typeface="Wingdings" panose="05000000000000000000" pitchFamily="2" charset="2"/>
+              <a:buChar char="v"/>
+            </a:pPr>
+            <a:r>
+              <a:rPr sz="1800" dirty="0">
+                <a:latin typeface="Calibri" panose="020F0502020204030204" pitchFamily="34" charset="0"/>
+                <a:cs typeface="Calibri" panose="020F0502020204030204" pitchFamily="34" charset="0"/>
+              </a:rPr>
+              <a:t>Native WPF DataGrid: mature and integrated, but can incur visual-tree overhead at scale.</a:t>
+            </a:r>
+            <a:endParaRPr lang="en-US" dirty="0">
+              <a:latin typeface="Calibri" panose="020F0502020204030204" pitchFamily="34" charset="0"/>
+              <a:cs typeface="Calibri" panose="020F0502020204030204" pitchFamily="34" charset="0"/>
+            </a:endParaRPr>
+          </a:p>
+          <a:p>
+            <a:pPr>
+              <a:buFont typeface="Wingdings" panose="05000000000000000000" pitchFamily="2" charset="2"/>
+              <a:buChar char="v"/>
+            </a:pPr>
+            <a:r>
+              <a:rPr sz="1800" dirty="0">
+                <a:latin typeface="Calibri" panose="020F0502020204030204" pitchFamily="34" charset="0"/>
+                <a:cs typeface="Calibri" panose="020F0502020204030204" pitchFamily="34" charset="0"/>
+              </a:rPr>
+              <a:t>Commercial grids such as DevExpress</a:t>
+            </a:r>
+            <a:r>
+              <a:rPr lang="en-US" sz="1800" dirty="0">
+                <a:latin typeface="Calibri" panose="020F0502020204030204" pitchFamily="34" charset="0"/>
+                <a:cs typeface="Calibri" panose="020F0502020204030204" pitchFamily="34" charset="0"/>
+              </a:rPr>
+              <a:t>, Component1, Avalonia, Telerik</a:t>
+            </a:r>
+            <a:r>
+              <a:rPr sz="1800" dirty="0">
+                <a:latin typeface="Calibri" panose="020F0502020204030204" pitchFamily="34" charset="0"/>
+                <a:cs typeface="Calibri" panose="020F0502020204030204" pitchFamily="34" charset="0"/>
+              </a:rPr>
+              <a:t> and </a:t>
+            </a:r>
+            <a:r>
+              <a:rPr sz="1800" dirty="0" err="1">
+                <a:latin typeface="Calibri" panose="020F0502020204030204" pitchFamily="34" charset="0"/>
+                <a:cs typeface="Calibri" panose="020F0502020204030204" pitchFamily="34" charset="0"/>
+              </a:rPr>
+              <a:t>Syncfusion</a:t>
+            </a:r>
+            <a:r>
+              <a:rPr sz="1800" dirty="0">
+                <a:latin typeface="Calibri" panose="020F0502020204030204" pitchFamily="34" charset="0"/>
+                <a:cs typeface="Calibri" panose="020F0502020204030204" pitchFamily="34" charset="0"/>
+              </a:rPr>
+              <a:t>: feature-rich</a:t>
+            </a:r>
+            <a:r>
+              <a:rPr lang="en-US" sz="1800" dirty="0">
+                <a:latin typeface="Calibri" panose="020F0502020204030204" pitchFamily="34" charset="0"/>
+                <a:cs typeface="Calibri" panose="020F0502020204030204" pitchFamily="34" charset="0"/>
+              </a:rPr>
+              <a:t> but not providing accuracy</a:t>
+            </a:r>
+            <a:r>
+              <a:rPr sz="1800" dirty="0">
+                <a:latin typeface="Calibri" panose="020F0502020204030204" pitchFamily="34" charset="0"/>
+                <a:cs typeface="Calibri" panose="020F0502020204030204" pitchFamily="34" charset="0"/>
+              </a:rPr>
+              <a:t>.</a:t>
+            </a:r>
+          </a:p>
+          <a:p>
+            <a:pPr>
+              <a:buFont typeface="Wingdings" panose="05000000000000000000" pitchFamily="2" charset="2"/>
+              <a:buChar char="v"/>
+            </a:pPr>
+            <a:r>
+              <a:rPr sz="1800" dirty="0">
+                <a:latin typeface="Calibri" panose="020F0502020204030204" pitchFamily="34" charset="0"/>
+                <a:cs typeface="Calibri" panose="020F0502020204030204" pitchFamily="34" charset="0"/>
+              </a:rPr>
+              <a:t>Custom immediate-mode drawing: high control over rendering and performance, but requires more engineering.</a:t>
+            </a:r>
+          </a:p>
+          <a:p>
+            <a:pPr>
+              <a:buFont typeface="Wingdings" panose="05000000000000000000" pitchFamily="2" charset="2"/>
+              <a:buChar char="v"/>
+            </a:pPr>
+            <a:r>
+              <a:rPr sz="1800" dirty="0" err="1">
+                <a:latin typeface="Calibri" panose="020F0502020204030204" pitchFamily="34" charset="0"/>
+                <a:cs typeface="Calibri" panose="020F0502020204030204" pitchFamily="34" charset="0"/>
+              </a:rPr>
+              <a:t>FastGrid</a:t>
+            </a:r>
+            <a:r>
+              <a:rPr sz="1800" dirty="0">
+                <a:latin typeface="Calibri" panose="020F0502020204030204" pitchFamily="34" charset="0"/>
+                <a:cs typeface="Calibri" panose="020F0502020204030204" pitchFamily="34" charset="0"/>
+              </a:rPr>
+              <a:t> niche: a reusable WPF/NuGet component focused on lightweight, high-performance rendering plus cloud-native delivery.</a:t>
+            </a:r>
+          </a:p>
+        </p:txBody>
+      </p:sp>
+      <p:sp>
+        <p:nvSpPr>
+          <p:cNvPr id="4" name="Footer Placeholder 3">
+            <a:extLst>
+              <a:ext uri="{FF2B5EF4-FFF2-40B4-BE49-F238E27FC236}">
+                <a16:creationId xmlns:a16="http://schemas.microsoft.com/office/drawing/2014/main" id="{EB301A31-C183-093C-402D-3E47B8C37F1E}"/>
+              </a:ext>
+            </a:extLst>
+          </p:cNvPr>
+          <p:cNvSpPr>
+            <a:spLocks noGrp="1"/>
+          </p:cNvSpPr>
+          <p:nvPr>
+            <p:ph type="ftr" sz="quarter" idx="11"/>
+          </p:nvPr>
+        </p:nvSpPr>
+        <p:spPr/>
+        <p:txBody>
+          <a:bodyPr/>
+          <a:lstStyle/>
+          <a:p>
+            <a:r>
+              <a:rPr sz="1000" b="0"/>
+              <a:t>FastGrid</a:t>
+            </a:r>
+            <a:endParaRPr lang="en-US" dirty="0"/>
+          </a:p>
+        </p:txBody>
+      </p:sp>
+      <p:sp>
+        <p:nvSpPr>
+          <p:cNvPr id="5" name="Slide Number Placeholder 4">
+            <a:extLst>
+              <a:ext uri="{FF2B5EF4-FFF2-40B4-BE49-F238E27FC236}">
+                <a16:creationId xmlns:a16="http://schemas.microsoft.com/office/drawing/2014/main" id="{7F1048C3-45FC-8545-5485-22C70A933592}"/>
+              </a:ext>
+            </a:extLst>
+          </p:cNvPr>
+          <p:cNvSpPr>
+            <a:spLocks noGrp="1"/>
+          </p:cNvSpPr>
+          <p:nvPr>
+            <p:ph type="sldNum" sz="quarter" idx="12"/>
+          </p:nvPr>
+        </p:nvSpPr>
+        <p:spPr/>
+        <p:txBody>
+          <a:bodyPr>
+            <a:normAutofit fontScale="62500" lnSpcReduction="20000"/>
+          </a:bodyPr>
+          <a:lstStyle/>
+          <a:p>
+            <a:fld id="{9EBC64C3-3FC7-4C40-910B-2643F037F02C}" type="slidenum">
+              <a:rPr lang="en-US" smtClean="0"/>
+              <a:pPr/>
+              <a:t>14</a:t>
+            </a:fld>
+            <a:endParaRPr lang="en-US" dirty="0"/>
+          </a:p>
+        </p:txBody>
+      </p:sp>
+      <p:sp>
+        <p:nvSpPr>
+          <p:cNvPr id="6" name="Date Placeholder 5">
+            <a:extLst>
+              <a:ext uri="{FF2B5EF4-FFF2-40B4-BE49-F238E27FC236}">
+                <a16:creationId xmlns:a16="http://schemas.microsoft.com/office/drawing/2014/main" id="{A7D9EF8D-D92F-1154-92DF-D4D3DD92B360}"/>
+              </a:ext>
+            </a:extLst>
+          </p:cNvPr>
+          <p:cNvSpPr>
+            <a:spLocks noGrp="1"/>
+          </p:cNvSpPr>
+          <p:nvPr>
+            <p:ph type="dt" sz="half" idx="10"/>
+          </p:nvPr>
+        </p:nvSpPr>
+        <p:spPr/>
+        <p:txBody>
+          <a:bodyPr/>
+          <a:lstStyle/>
+          <a:p>
+            <a:pPr algn="ctr"/>
+            <a:r>
+              <a:rPr lang="en-US" dirty="0"/>
+              <a:t>Hamdard University </a:t>
+            </a:r>
+          </a:p>
+        </p:txBody>
+      </p:sp>
+      <p:graphicFrame>
+        <p:nvGraphicFramePr>
+          <p:cNvPr id="17" name="Diagram 16">
+            <a:extLst>
+              <a:ext uri="{FF2B5EF4-FFF2-40B4-BE49-F238E27FC236}">
+                <a16:creationId xmlns:a16="http://schemas.microsoft.com/office/drawing/2014/main" id="{91EDAC2A-F52F-A59E-F296-0434B1E91E00}"/>
+              </a:ext>
+            </a:extLst>
+          </p:cNvPr>
+          <p:cNvGraphicFramePr/>
+          <p:nvPr>
+            <p:extLst>
+              <p:ext uri="{D42A27DB-BD31-4B8C-83A1-F6EECF244321}">
+                <p14:modId xmlns:p14="http://schemas.microsoft.com/office/powerpoint/2010/main" val="3679281628"/>
+              </p:ext>
+            </p:extLst>
+          </p:nvPr>
+        </p:nvGraphicFramePr>
+        <p:xfrm>
+          <a:off x="3467100" y="3937000"/>
+          <a:ext cx="2209800" cy="2641600"/>
+        </p:xfrm>
+        <a:graphic>
+          <a:graphicData uri="http://schemas.openxmlformats.org/drawingml/2006/diagram">
+            <dgm:relIds xmlns:dgm="http://schemas.openxmlformats.org/drawingml/2006/diagram" xmlns:r="http://schemas.openxmlformats.org/officeDocument/2006/relationships" r:dm="rId2" r:lo="rId3" r:qs="rId4" r:cs="rId5"/>
+          </a:graphicData>
+        </a:graphic>
+      </p:graphicFrame>
+    </p:spTree>
+    <p:extLst>
+      <p:ext uri="{BB962C8B-B14F-4D97-AF65-F5344CB8AC3E}">
+        <p14:creationId xmlns:p14="http://schemas.microsoft.com/office/powerpoint/2010/main" val="303358916"/>
+      </p:ext>
+    </p:extLst>
+  </p:cSld>
+  <p:clrMapOvr>
+    <a:masterClrMapping/>
+  </p:clrMapOvr>
+</p:sld>
+</file>
+
+<file path=ppt/slides/slide15.xml><?xml version="1.0" encoding="utf-8"?>
+<p:sld xmlns:a="http://schemas.openxmlformats.org/drawingml/2006/main" xmlns:r="http://schemas.openxmlformats.org/officeDocument/2006/relationships" xmlns:p="http://schemas.openxmlformats.org/presentationml/2006/main">
+  <p:cSld>
+    <p:spTree>
+      <p:nvGrpSpPr>
+        <p:cNvPr id="1" name="">
+          <a:extLst>
+            <a:ext uri="{FF2B5EF4-FFF2-40B4-BE49-F238E27FC236}">
+              <a16:creationId xmlns:a16="http://schemas.microsoft.com/office/drawing/2014/main" id="{0DF3A080-706B-B16C-9816-C409A197BD06}"/>
+            </a:ext>
+          </a:extLst>
+        </p:cNvPr>
+        <p:cNvGrpSpPr/>
+        <p:nvPr/>
+      </p:nvGrpSpPr>
+      <p:grpSpPr>
+        <a:xfrm>
+          <a:off x="0" y="0"/>
+          <a:ext cx="0" cy="0"/>
+          <a:chOff x="0" y="0"/>
+          <a:chExt cx="0" cy="0"/>
+        </a:xfrm>
+      </p:grpSpPr>
+      <p:sp>
+        <p:nvSpPr>
+          <p:cNvPr id="2" name="Title 1">
+            <a:extLst>
+              <a:ext uri="{FF2B5EF4-FFF2-40B4-BE49-F238E27FC236}">
+                <a16:creationId xmlns:a16="http://schemas.microsoft.com/office/drawing/2014/main" id="{F0306E37-E162-A6F6-9392-FA6F0FE02C49}"/>
+              </a:ext>
+            </a:extLst>
+          </p:cNvPr>
+          <p:cNvSpPr>
+            <a:spLocks noGrp="1"/>
+          </p:cNvSpPr>
+          <p:nvPr>
+            <p:ph type="title"/>
+          </p:nvPr>
+        </p:nvSpPr>
+        <p:spPr/>
+        <p:txBody>
+          <a:bodyPr/>
+          <a:lstStyle/>
+          <a:p>
+            <a:r>
+              <a:rPr sz="2400" b="1"/>
+              <a:t>Demo of 30% Work - Proof of Concept</a:t>
+            </a:r>
+          </a:p>
+        </p:txBody>
+      </p:sp>
+      <p:sp>
+        <p:nvSpPr>
+          <p:cNvPr id="3" name="Content Placeholder 2">
+            <a:extLst>
+              <a:ext uri="{FF2B5EF4-FFF2-40B4-BE49-F238E27FC236}">
+                <a16:creationId xmlns:a16="http://schemas.microsoft.com/office/drawing/2014/main" id="{BA320ACB-2834-3551-8A1B-8A5F331FC870}"/>
+              </a:ext>
+            </a:extLst>
+          </p:cNvPr>
+          <p:cNvSpPr>
+            <a:spLocks noGrp="1"/>
+          </p:cNvSpPr>
+          <p:nvPr>
+            <p:ph sz="quarter" idx="1"/>
+          </p:nvPr>
+        </p:nvSpPr>
+        <p:spPr/>
+        <p:txBody>
+          <a:bodyPr/>
+          <a:lstStyle/>
+          <a:p>
+            <a:pPr>
+              <a:lnSpc>
+                <a:spcPct val="124000"/>
+              </a:lnSpc>
+              <a:buFont typeface="Wingdings" panose="05000000000000000000" pitchFamily="2" charset="2"/>
+              <a:buChar char="v"/>
+            </a:pPr>
+            <a:r>
+              <a:rPr sz="1400" dirty="0">
+                <a:latin typeface="Calibri" panose="020F0502020204030204" pitchFamily="34" charset="0"/>
+                <a:cs typeface="Calibri" panose="020F0502020204030204" pitchFamily="34" charset="0"/>
+              </a:rPr>
+              <a:t>Status: MORE than 30% of the planned work is complete - what follows is the working product, not a mock-up.</a:t>
+            </a:r>
+            <a:endParaRPr lang="en-US" dirty="0">
+              <a:latin typeface="Calibri" panose="020F0502020204030204" pitchFamily="34" charset="0"/>
+              <a:cs typeface="Calibri" panose="020F0502020204030204" pitchFamily="34" charset="0"/>
+            </a:endParaRPr>
+          </a:p>
+          <a:p>
+            <a:pPr>
+              <a:lnSpc>
+                <a:spcPct val="124000"/>
+              </a:lnSpc>
+              <a:buFont typeface="Wingdings" panose="05000000000000000000" pitchFamily="2" charset="2"/>
+              <a:buChar char="v"/>
+            </a:pPr>
+            <a:r>
+              <a:rPr sz="1400" dirty="0">
+                <a:latin typeface="Calibri" panose="020F0502020204030204" pitchFamily="34" charset="0"/>
+                <a:cs typeface="Calibri" panose="020F0502020204030204" pitchFamily="34" charset="0"/>
+              </a:rPr>
+              <a:t>100,000 rows generated and bound in 67 ms, then scrolled continuously: 2.59 ms average frame time, 4.00 ms at p95.</a:t>
+            </a:r>
+            <a:endParaRPr lang="en-US" dirty="0">
+              <a:latin typeface="Calibri" panose="020F0502020204030204" pitchFamily="34" charset="0"/>
+              <a:cs typeface="Calibri" panose="020F0502020204030204" pitchFamily="34" charset="0"/>
+            </a:endParaRPr>
+          </a:p>
+          <a:p>
+            <a:pPr>
+              <a:lnSpc>
+                <a:spcPct val="124000"/>
+              </a:lnSpc>
+              <a:buFont typeface="Wingdings" panose="05000000000000000000" pitchFamily="2" charset="2"/>
+              <a:buChar char="v"/>
+            </a:pPr>
+            <a:r>
+              <a:rPr sz="1400" dirty="0">
+                <a:latin typeface="Calibri" panose="020F0502020204030204" pitchFamily="34" charset="0"/>
+                <a:cs typeface="Calibri" panose="020F0502020204030204" pitchFamily="34" charset="0"/>
+              </a:rPr>
+              <a:t>1,000,000 rows: 2.75 ms average frame time - the SAME cost, because only ~250 cells are ever drawn per frame.</a:t>
+            </a:r>
+            <a:endParaRPr lang="en-US" dirty="0">
+              <a:latin typeface="Calibri" panose="020F0502020204030204" pitchFamily="34" charset="0"/>
+              <a:cs typeface="Calibri" panose="020F0502020204030204" pitchFamily="34" charset="0"/>
+            </a:endParaRPr>
+          </a:p>
+          <a:p>
+            <a:pPr>
+              <a:lnSpc>
+                <a:spcPct val="124000"/>
+              </a:lnSpc>
+              <a:buFont typeface="Wingdings" panose="05000000000000000000" pitchFamily="2" charset="2"/>
+              <a:buChar char="v"/>
+            </a:pPr>
+            <a:r>
+              <a:rPr sz="1400" dirty="0">
+                <a:latin typeface="Calibri" panose="020F0502020204030204" pitchFamily="34" charset="0"/>
+                <a:cs typeface="Calibri" panose="020F0502020204030204" pitchFamily="34" charset="0"/>
+              </a:rPr>
+              <a:t>All Features tab: every public property, method, event and command of the grid, driven live.</a:t>
+            </a:r>
+            <a:endParaRPr lang="en-US" dirty="0">
+              <a:latin typeface="Calibri" panose="020F0502020204030204" pitchFamily="34" charset="0"/>
+              <a:cs typeface="Calibri" panose="020F0502020204030204" pitchFamily="34" charset="0"/>
+            </a:endParaRPr>
+          </a:p>
+          <a:p>
+            <a:pPr>
+              <a:lnSpc>
+                <a:spcPct val="124000"/>
+              </a:lnSpc>
+              <a:buFont typeface="Wingdings" panose="05000000000000000000" pitchFamily="2" charset="2"/>
+              <a:buChar char="v"/>
+            </a:pPr>
+            <a:r>
+              <a:rPr sz="1400" dirty="0">
+                <a:latin typeface="Calibri" panose="020F0502020204030204" pitchFamily="34" charset="0"/>
+                <a:cs typeface="Calibri" panose="020F0502020204030204" pitchFamily="34" charset="0"/>
+              </a:rPr>
+              <a:t>Four independently streaming trading desks side by side (Watchlist, Time &amp; Sales, Trading Monitor, Options Chain).</a:t>
+            </a:r>
+            <a:endParaRPr lang="en-US" dirty="0">
+              <a:latin typeface="Calibri" panose="020F0502020204030204" pitchFamily="34" charset="0"/>
+              <a:cs typeface="Calibri" panose="020F0502020204030204" pitchFamily="34" charset="0"/>
+            </a:endParaRPr>
+          </a:p>
+          <a:p>
+            <a:pPr>
+              <a:lnSpc>
+                <a:spcPct val="124000"/>
+              </a:lnSpc>
+              <a:buFont typeface="Wingdings" panose="05000000000000000000" pitchFamily="2" charset="2"/>
+              <a:buChar char="v"/>
+            </a:pPr>
+            <a:r>
+              <a:rPr sz="1400" dirty="0">
+                <a:latin typeface="Calibri" panose="020F0502020204030204" pitchFamily="34" charset="0"/>
+                <a:cs typeface="Calibri" panose="020F0502020204030204" pitchFamily="34" charset="0"/>
+              </a:rPr>
+              <a:t>552 automated unit tests running green in Visual Studio Test Explorer.</a:t>
+            </a:r>
+            <a:endParaRPr lang="en-US" dirty="0">
+              <a:latin typeface="Calibri" panose="020F0502020204030204" pitchFamily="34" charset="0"/>
+              <a:cs typeface="Calibri" panose="020F0502020204030204" pitchFamily="34" charset="0"/>
+            </a:endParaRPr>
+          </a:p>
+        </p:txBody>
+      </p:sp>
+      <p:sp>
+        <p:nvSpPr>
+          <p:cNvPr id="4" name="Footer Placeholder 3">
+            <a:extLst>
+              <a:ext uri="{FF2B5EF4-FFF2-40B4-BE49-F238E27FC236}">
+                <a16:creationId xmlns:a16="http://schemas.microsoft.com/office/drawing/2014/main" id="{DDCA100B-5FE0-B5E1-9315-388C53DC2BC6}"/>
+              </a:ext>
+            </a:extLst>
+          </p:cNvPr>
+          <p:cNvSpPr>
+            <a:spLocks noGrp="1"/>
+          </p:cNvSpPr>
+          <p:nvPr>
+            <p:ph type="ftr" sz="quarter" idx="11"/>
+          </p:nvPr>
+        </p:nvSpPr>
+        <p:spPr/>
+        <p:txBody>
+          <a:bodyPr/>
+          <a:lstStyle/>
+          <a:p>
+            <a:r>
+              <a:rPr sz="1000" b="0"/>
+              <a:t>FastGrid</a:t>
+            </a:r>
+            <a:endParaRPr lang="en-US" dirty="0"/>
+          </a:p>
+        </p:txBody>
+      </p:sp>
+      <p:sp>
+        <p:nvSpPr>
+          <p:cNvPr id="5" name="Slide Number Placeholder 4">
+            <a:extLst>
+              <a:ext uri="{FF2B5EF4-FFF2-40B4-BE49-F238E27FC236}">
+                <a16:creationId xmlns:a16="http://schemas.microsoft.com/office/drawing/2014/main" id="{A8326E0C-2E10-FA6A-C966-65FE8C0FE2BC}"/>
+              </a:ext>
+            </a:extLst>
+          </p:cNvPr>
+          <p:cNvSpPr>
+            <a:spLocks noGrp="1"/>
+          </p:cNvSpPr>
+          <p:nvPr>
+            <p:ph type="sldNum" sz="quarter" idx="12"/>
+          </p:nvPr>
+        </p:nvSpPr>
+        <p:spPr/>
+        <p:txBody>
+          <a:bodyPr>
+            <a:normAutofit fontScale="62500" lnSpcReduction="20000"/>
+          </a:bodyPr>
+          <a:lstStyle/>
+          <a:p>
+            <a:fld id="{9EBC64C3-3FC7-4C40-910B-2643F037F02C}" type="slidenum">
+              <a:rPr lang="en-US" smtClean="0"/>
+              <a:pPr/>
+              <a:t>15</a:t>
+            </a:fld>
+            <a:endParaRPr lang="en-US" dirty="0"/>
+          </a:p>
+        </p:txBody>
+      </p:sp>
+      <p:sp>
+        <p:nvSpPr>
+          <p:cNvPr id="6" name="Date Placeholder 5">
+            <a:extLst>
+              <a:ext uri="{FF2B5EF4-FFF2-40B4-BE49-F238E27FC236}">
+                <a16:creationId xmlns:a16="http://schemas.microsoft.com/office/drawing/2014/main" id="{11943BA5-9CB1-34E9-15AD-A632B45FFC3E}"/>
+              </a:ext>
+            </a:extLst>
+          </p:cNvPr>
+          <p:cNvSpPr>
+            <a:spLocks noGrp="1"/>
+          </p:cNvSpPr>
+          <p:nvPr>
+            <p:ph type="dt" sz="half" idx="10"/>
+          </p:nvPr>
+        </p:nvSpPr>
+        <p:spPr/>
+        <p:txBody>
+          <a:bodyPr/>
+          <a:lstStyle/>
+          <a:p>
+            <a:pPr algn="ctr"/>
+            <a:r>
+              <a:rPr lang="en-US" dirty="0"/>
+              <a:t>Hamdard University </a:t>
+            </a:r>
+          </a:p>
+        </p:txBody>
+      </p:sp>
+    </p:spTree>
+    <p:extLst>
+      <p:ext uri="{BB962C8B-B14F-4D97-AF65-F5344CB8AC3E}">
+        <p14:creationId xmlns:p14="http://schemas.microsoft.com/office/powerpoint/2010/main" val="1371402079"/>
+      </p:ext>
+    </p:extLst>
+  </p:cSld>
+  <p:clrMapOvr>
+    <a:masterClrMapping/>
+  </p:clrMapOvr>
+</p:sld>
+</file>
+
+<file path=ppt/slides/slide16.xml><?xml version="1.0" encoding="utf-8"?>
+<p:sld xmlns:a="http://schemas.openxmlformats.org/drawingml/2006/main" xmlns:r="http://schemas.openxmlformats.org/officeDocument/2006/relationships" xmlns:p="http://schemas.openxmlformats.org/presentationml/2006/main">
+  <p:cSld>
+    <p:spTree>
+      <p:nvGrpSpPr>
+        <p:cNvPr id="1" name=""/>
+        <p:cNvGrpSpPr/>
+        <p:nvPr/>
+      </p:nvGrpSpPr>
+      <p:grpSpPr>
+        <a:xfrm>
+          <a:off x="0" y="0"/>
+          <a:ext cx="0" cy="0"/>
+          <a:chOff x="0" y="0"/>
+          <a:chExt cx="0" cy="0"/>
+        </a:xfrm>
+      </p:grpSpPr>
+      <p:sp>
+        <p:nvSpPr>
+          <p:cNvPr id="2" name="Title 1"/>
+          <p:cNvSpPr>
+            <a:spLocks noGrp="1"/>
+          </p:cNvSpPr>
+          <p:nvPr>
+            <p:ph type="title"/>
+          </p:nvPr>
+        </p:nvSpPr>
+        <p:spPr/>
+        <p:txBody>
+          <a:bodyPr/>
+          <a:lstStyle/>
+          <a:p>
+            <a:r>
+              <a:rPr sz="2300" b="1"/>
+              <a:t>Deployment Flow Chart - CI/CD</a:t>
+            </a:r>
+          </a:p>
+        </p:txBody>
+      </p:sp>
+      <p:sp>
+        <p:nvSpPr>
+          <p:cNvPr id="4" name="Footer Placeholder 3"/>
+          <p:cNvSpPr>
+            <a:spLocks noGrp="1"/>
+          </p:cNvSpPr>
+          <p:nvPr>
+            <p:ph type="ftr" sz="quarter" idx="11"/>
+          </p:nvPr>
+        </p:nvSpPr>
+        <p:spPr/>
+        <p:txBody>
+          <a:bodyPr/>
+          <a:lstStyle/>
+          <a:p>
+            <a:r>
+              <a:rPr sz="1000" b="0"/>
+              <a:t>FastGrid</a:t>
+            </a:r>
+            <a:endParaRPr lang="en-US" dirty="0"/>
+          </a:p>
+        </p:txBody>
+      </p:sp>
+      <p:sp>
+        <p:nvSpPr>
+          <p:cNvPr id="5" name="Slide Number Placeholder 4"/>
+          <p:cNvSpPr>
+            <a:spLocks noGrp="1"/>
+          </p:cNvSpPr>
+          <p:nvPr>
+            <p:ph type="sldNum" sz="quarter" idx="12"/>
+          </p:nvPr>
+        </p:nvSpPr>
+        <p:spPr/>
+        <p:txBody>
+          <a:bodyPr>
+            <a:normAutofit fontScale="62500" lnSpcReduction="20000"/>
+          </a:bodyPr>
+          <a:lstStyle/>
+          <a:p>
+            <a:fld id="{9EBC64C3-3FC7-4C40-910B-2643F037F02C}" type="slidenum">
+              <a:rPr lang="en-US" smtClean="0"/>
+              <a:pPr/>
+              <a:t>16</a:t>
             </a:fld>
             <a:endParaRPr lang="en-US" dirty="0"/>
           </a:p>
@@ -15470,15 +15392,15 @@
           <p:nvPr/>
         </p:nvPicPr>
         <p:blipFill>
-          <a:blip r:embed="rId2"/>
+          <a:blip r:embed="rId3"/>
           <a:stretch>
             <a:fillRect/>
           </a:stretch>
         </p:blipFill>
         <p:spPr>
           <a:xfrm>
-            <a:off x="1684712" y="1225296"/>
-            <a:ext cx="5774574" cy="4764024"/>
+            <a:off x="152400" y="1828800"/>
+            <a:ext cx="8671560" cy="4160520"/>
           </a:xfrm>
           <a:prstGeom prst="rect">
             <a:avLst/>
@@ -15527,8 +15449,8 @@
 </p:sld>
 </file>
 
-<file path=ppt/slides/slide18.xml><?xml version="1.0" encoding="utf-8"?>
-<p:sld xmlns:a="http://schemas.openxmlformats.org/drawingml/2006/main" xmlns:p="http://schemas.openxmlformats.org/presentationml/2006/main" xmlns:r="http://schemas.openxmlformats.org/officeDocument/2006/relationships">
+<file path=ppt/slides/slide17.xml><?xml version="1.0" encoding="utf-8"?>
+<p:sld xmlns:a="http://schemas.openxmlformats.org/drawingml/2006/main" xmlns:r="http://schemas.openxmlformats.org/officeDocument/2006/relationships" xmlns:p="http://schemas.openxmlformats.org/presentationml/2006/main">
   <p:cSld>
     <p:spTree>
       <p:nvGrpSpPr>
@@ -15536,7 +15458,14 @@
         <p:cNvGrpSpPr/>
         <p:nvPr/>
       </p:nvGrpSpPr>
-      <p:grpSpPr/>
+      <p:grpSpPr>
+        <a:xfrm>
+          <a:off x="0" y="0"/>
+          <a:ext cx="0" cy="0"/>
+          <a:chOff x="0" y="0"/>
+          <a:chExt cx="0" cy="0"/>
+        </a:xfrm>
+      </p:grpSpPr>
       <p:sp>
         <p:nvSpPr>
           <p:cNvPr id="2" name="Title 1"/>
@@ -15602,7 +15531,7 @@
             <a:fld id="{9EBC64C3-3FC7-4C40-910B-2643F037F02C}" type="slidenum">
               <a:rPr lang="en-US" smtClean="0"/>
               <a:pPr/>
-              <a:t>2</a:t>
+              <a:t>17</a:t>
             </a:fld>
             <a:endParaRPr lang="en-US" dirty="0"/>
           </a:p>
@@ -15640,7 +15569,7 @@
           <p:nvPr/>
         </p:nvPicPr>
         <p:blipFill>
-          <a:blip r:embed="rId2"/>
+          <a:blip r:embed="rId3"/>
           <a:stretch>
             <a:fillRect/>
           </a:stretch>
@@ -15697,8 +15626,8 @@
 </p:sld>
 </file>
 
-<file path=ppt/slides/slide19.xml><?xml version="1.0" encoding="utf-8"?>
-<p:sld xmlns:a="http://schemas.openxmlformats.org/drawingml/2006/main" xmlns:p="http://schemas.openxmlformats.org/presentationml/2006/main" xmlns:r="http://schemas.openxmlformats.org/officeDocument/2006/relationships">
+<file path=ppt/slides/slide18.xml><?xml version="1.0" encoding="utf-8"?>
+<p:sld xmlns:a="http://schemas.openxmlformats.org/drawingml/2006/main" xmlns:r="http://schemas.openxmlformats.org/officeDocument/2006/relationships" xmlns:p="http://schemas.openxmlformats.org/presentationml/2006/main">
   <p:cSld>
     <p:spTree>
       <p:nvGrpSpPr>
@@ -15706,7 +15635,14 @@
         <p:cNvGrpSpPr/>
         <p:nvPr/>
       </p:nvGrpSpPr>
-      <p:grpSpPr/>
+      <p:grpSpPr>
+        <a:xfrm>
+          <a:off x="0" y="0"/>
+          <a:ext cx="0" cy="0"/>
+          <a:chOff x="0" y="0"/>
+          <a:chExt cx="0" cy="0"/>
+        </a:xfrm>
+      </p:grpSpPr>
       <p:sp>
         <p:nvSpPr>
           <p:cNvPr id="2" name="Title 1"/>
@@ -15772,7 +15708,7 @@
             <a:fld id="{9EBC64C3-3FC7-4C40-910B-2643F037F02C}" type="slidenum">
               <a:rPr lang="en-US" smtClean="0"/>
               <a:pPr/>
-              <a:t>2</a:t>
+              <a:t>18</a:t>
             </a:fld>
             <a:endParaRPr lang="en-US" dirty="0"/>
           </a:p>
@@ -15810,7 +15746,7 @@
           <p:nvPr/>
         </p:nvPicPr>
         <p:blipFill>
-          <a:blip r:embed="rId2"/>
+          <a:blip r:embed="rId3"/>
           <a:stretch>
             <a:fillRect/>
           </a:stretch>
@@ -15855,6 +15791,183 @@
                 </a:solidFill>
               </a:rPr>
               <a:t>7 managers + 7 renderers + the data layer, all owned and disposed by SkiaGridViewV2</a:t>
+            </a:r>
+          </a:p>
+        </p:txBody>
+      </p:sp>
+    </p:spTree>
+  </p:cSld>
+  <p:clrMapOvr>
+    <a:masterClrMapping/>
+  </p:clrMapOvr>
+</p:sld>
+</file>
+
+<file path=ppt/slides/slide19.xml><?xml version="1.0" encoding="utf-8"?>
+<p:sld xmlns:a="http://schemas.openxmlformats.org/drawingml/2006/main" xmlns:r="http://schemas.openxmlformats.org/officeDocument/2006/relationships" xmlns:p="http://schemas.openxmlformats.org/presentationml/2006/main">
+  <p:cSld>
+    <p:spTree>
+      <p:nvGrpSpPr>
+        <p:cNvPr id="1" name=""/>
+        <p:cNvGrpSpPr/>
+        <p:nvPr/>
+      </p:nvGrpSpPr>
+      <p:grpSpPr>
+        <a:xfrm>
+          <a:off x="0" y="0"/>
+          <a:ext cx="0" cy="0"/>
+          <a:chOff x="0" y="0"/>
+          <a:chExt cx="0" cy="0"/>
+        </a:xfrm>
+      </p:grpSpPr>
+      <p:sp>
+        <p:nvSpPr>
+          <p:cNvPr id="2" name="Title 1"/>
+          <p:cNvSpPr>
+            <a:spLocks noGrp="1"/>
+          </p:cNvSpPr>
+          <p:nvPr>
+            <p:ph type="title"/>
+          </p:nvPr>
+        </p:nvSpPr>
+        <p:spPr/>
+        <p:txBody>
+          <a:bodyPr/>
+          <a:lstStyle/>
+          <a:p>
+            <a:r>
+              <a:rPr sz="2300" b="1"/>
+              <a:t>Sequence Diagram - Paint Cycle</a:t>
+            </a:r>
+          </a:p>
+        </p:txBody>
+      </p:sp>
+      <p:sp>
+        <p:nvSpPr>
+          <p:cNvPr id="4" name="Footer Placeholder 3"/>
+          <p:cNvSpPr>
+            <a:spLocks noGrp="1"/>
+          </p:cNvSpPr>
+          <p:nvPr>
+            <p:ph type="ftr" sz="quarter" idx="11"/>
+          </p:nvPr>
+        </p:nvSpPr>
+        <p:spPr/>
+        <p:txBody>
+          <a:bodyPr/>
+          <a:lstStyle/>
+          <a:p>
+            <a:r>
+              <a:rPr sz="1000" b="0"/>
+              <a:t>FastGrid</a:t>
+            </a:r>
+            <a:endParaRPr lang="en-US" dirty="0"/>
+          </a:p>
+        </p:txBody>
+      </p:sp>
+      <p:sp>
+        <p:nvSpPr>
+          <p:cNvPr id="5" name="Slide Number Placeholder 4"/>
+          <p:cNvSpPr>
+            <a:spLocks noGrp="1"/>
+          </p:cNvSpPr>
+          <p:nvPr>
+            <p:ph type="sldNum" sz="quarter" idx="12"/>
+          </p:nvPr>
+        </p:nvSpPr>
+        <p:spPr/>
+        <p:txBody>
+          <a:bodyPr>
+            <a:normAutofit fontScale="62500" lnSpcReduction="20000"/>
+          </a:bodyPr>
+          <a:lstStyle/>
+          <a:p>
+            <a:fld id="{9EBC64C3-3FC7-4C40-910B-2643F037F02C}" type="slidenum">
+              <a:rPr lang="en-US" smtClean="0"/>
+              <a:pPr/>
+              <a:t>19</a:t>
+            </a:fld>
+            <a:endParaRPr lang="en-US" dirty="0"/>
+          </a:p>
+        </p:txBody>
+      </p:sp>
+      <p:sp>
+        <p:nvSpPr>
+          <p:cNvPr id="6" name="Date Placeholder 5"/>
+          <p:cNvSpPr>
+            <a:spLocks noGrp="1"/>
+          </p:cNvSpPr>
+          <p:nvPr>
+            <p:ph type="dt" sz="half" idx="10"/>
+          </p:nvPr>
+        </p:nvSpPr>
+        <p:spPr/>
+        <p:txBody>
+          <a:bodyPr/>
+          <a:lstStyle/>
+          <a:p>
+            <a:pPr algn="ctr"/>
+            <a:r>
+              <a:rPr lang="en-US" dirty="0"/>
+              <a:t>   Hamdard University </a:t>
+            </a:r>
+          </a:p>
+        </p:txBody>
+      </p:sp>
+      <p:pic>
+        <p:nvPicPr>
+          <p:cNvPr id="7" name="Picture 6" descr="SequenceDiagram.png"/>
+          <p:cNvPicPr>
+            <a:picLocks noChangeAspect="1"/>
+          </p:cNvPicPr>
+          <p:nvPr/>
+        </p:nvPicPr>
+        <p:blipFill>
+          <a:blip r:embed="rId3"/>
+          <a:stretch>
+            <a:fillRect/>
+          </a:stretch>
+        </p:blipFill>
+        <p:spPr>
+          <a:xfrm>
+            <a:off x="979457" y="1225296"/>
+            <a:ext cx="7185085" cy="4764024"/>
+          </a:xfrm>
+          <a:prstGeom prst="rect">
+            <a:avLst/>
+          </a:prstGeom>
+        </p:spPr>
+      </p:pic>
+      <p:sp>
+        <p:nvSpPr>
+          <p:cNvPr id="8" name="TextBox 7"/>
+          <p:cNvSpPr txBox="1"/>
+          <p:nvPr/>
+        </p:nvSpPr>
+        <p:spPr>
+          <a:xfrm>
+            <a:off x="320040" y="6053328"/>
+            <a:ext cx="8503920" cy="310896"/>
+          </a:xfrm>
+          <a:prstGeom prst="rect">
+            <a:avLst/>
+          </a:prstGeom>
+          <a:noFill/>
+        </p:spPr>
+        <p:txBody>
+          <a:bodyPr wrap="square">
+            <a:spAutoFit/>
+          </a:bodyPr>
+          <a:lstStyle/>
+          <a:p>
+            <a:pPr algn="ctr"/>
+            <a:r>
+              <a:rPr sz="1100" b="1">
+                <a:solidFill>
+                  <a:srgbClr val="1F3864"/>
+                </a:solidFill>
+              </a:rPr>
+              <a:t>PaintSurface -&gt; visible window -&gt; evaluate triggers -&gt; draw ~250 cells -&gt; present</a:t>
             </a:r>
           </a:p>
         </p:txBody>
@@ -16007,7 +16120,33 @@
                 <a:latin typeface="Calibri" panose="020F0502020204030204" pitchFamily="34" charset="0"/>
                 <a:cs typeface="Calibri" panose="020F0502020204030204" pitchFamily="34" charset="0"/>
               </a:rPr>
-              <a:t>FYP-I status: MORE than the 30% milestone is complete - a working, packaged library (SkiaSharpControlV2 v2.18.0) with 552 passing unit tests and a GitHub Actions CI/CD pipeline.</a:t>
+              <a:t>FYP-I status: MORE than the 30% milestone is complete - a working, packaged library (SkiaSharpControlV2 v</a:t>
+            </a:r>
+            <a:r>
+              <a:rPr lang="en-US" sz="1700" dirty="0">
+                <a:solidFill>
+                  <a:schemeClr val="tx1">
+                    <a:lumMod val="95000"/>
+                    <a:lumOff val="5000"/>
+                  </a:schemeClr>
+                </a:solidFill>
+                <a:latin typeface="Calibri" panose="020F0502020204030204" pitchFamily="34" charset="0"/>
+                <a:cs typeface="Calibri" panose="020F0502020204030204" pitchFamily="34" charset="0"/>
+              </a:rPr>
+              <a:t>1.0.2</a:t>
+            </a:r>
+            <a:r>
+              <a:rPr sz="1700" dirty="0">
+                <a:solidFill>
+                  <a:schemeClr val="tx1">
+                    <a:lumMod val="95000"/>
+                    <a:lumOff val="5000"/>
+                  </a:schemeClr>
+                </a:solidFill>
+                <a:latin typeface="Calibri" panose="020F0502020204030204" pitchFamily="34" charset="0"/>
+                <a:cs typeface="Calibri" panose="020F0502020204030204" pitchFamily="34" charset="0"/>
+              </a:rPr>
+              <a:t>) with 552 passing unit tests and a GitHub Actions CI/CD pipeline.</a:t>
             </a:r>
           </a:p>
         </p:txBody>
@@ -16098,7 +16237,7 @@
 </file>
 
 <file path=ppt/slides/slide20.xml><?xml version="1.0" encoding="utf-8"?>
-<p:sld xmlns:a="http://schemas.openxmlformats.org/drawingml/2006/main" xmlns:p="http://schemas.openxmlformats.org/presentationml/2006/main" xmlns:r="http://schemas.openxmlformats.org/officeDocument/2006/relationships">
+<p:sld xmlns:a="http://schemas.openxmlformats.org/drawingml/2006/main" xmlns:r="http://schemas.openxmlformats.org/officeDocument/2006/relationships" xmlns:p="http://schemas.openxmlformats.org/presentationml/2006/main">
   <p:cSld>
     <p:spTree>
       <p:nvGrpSpPr>
@@ -16106,7 +16245,14 @@
         <p:cNvGrpSpPr/>
         <p:nvPr/>
       </p:nvGrpSpPr>
-      <p:grpSpPr/>
+      <p:grpSpPr>
+        <a:xfrm>
+          <a:off x="0" y="0"/>
+          <a:ext cx="0" cy="0"/>
+          <a:chOff x="0" y="0"/>
+          <a:chExt cx="0" cy="0"/>
+        </a:xfrm>
+      </p:grpSpPr>
       <p:sp>
         <p:nvSpPr>
           <p:cNvPr id="2" name="Title 1"/>
@@ -16124,7 +16270,7 @@
           <a:p>
             <a:r>
               <a:rPr sz="2300" b="1"/>
-              <a:t>Sequence Diagram - Paint Cycle</a:t>
+              <a:t>Data Flow Diagram - Level 0 (Context)</a:t>
             </a:r>
           </a:p>
         </p:txBody>
@@ -16172,177 +16318,7 @@
             <a:fld id="{9EBC64C3-3FC7-4C40-910B-2643F037F02C}" type="slidenum">
               <a:rPr lang="en-US" smtClean="0"/>
               <a:pPr/>
-              <a:t>2</a:t>
-            </a:fld>
-            <a:endParaRPr lang="en-US" dirty="0"/>
-          </a:p>
-        </p:txBody>
-      </p:sp>
-      <p:sp>
-        <p:nvSpPr>
-          <p:cNvPr id="6" name="Date Placeholder 5"/>
-          <p:cNvSpPr>
-            <a:spLocks noGrp="1"/>
-          </p:cNvSpPr>
-          <p:nvPr>
-            <p:ph type="dt" sz="half" idx="10"/>
-          </p:nvPr>
-        </p:nvSpPr>
-        <p:spPr/>
-        <p:txBody>
-          <a:bodyPr/>
-          <a:lstStyle/>
-          <a:p>
-            <a:pPr algn="ctr"/>
-            <a:r>
-              <a:rPr lang="en-US" dirty="0"/>
-              <a:t>   Hamdard University </a:t>
-            </a:r>
-          </a:p>
-        </p:txBody>
-      </p:sp>
-      <p:pic>
-        <p:nvPicPr>
-          <p:cNvPr id="7" name="Picture 6" descr="SequenceDiagram.png"/>
-          <p:cNvPicPr>
-            <a:picLocks noChangeAspect="1"/>
-          </p:cNvPicPr>
-          <p:nvPr/>
-        </p:nvPicPr>
-        <p:blipFill>
-          <a:blip r:embed="rId2"/>
-          <a:stretch>
-            <a:fillRect/>
-          </a:stretch>
-        </p:blipFill>
-        <p:spPr>
-          <a:xfrm>
-            <a:off x="979457" y="1225296"/>
-            <a:ext cx="7185085" cy="4764024"/>
-          </a:xfrm>
-          <a:prstGeom prst="rect">
-            <a:avLst/>
-          </a:prstGeom>
-        </p:spPr>
-      </p:pic>
-      <p:sp>
-        <p:nvSpPr>
-          <p:cNvPr id="8" name="TextBox 7"/>
-          <p:cNvSpPr txBox="1"/>
-          <p:nvPr/>
-        </p:nvSpPr>
-        <p:spPr>
-          <a:xfrm>
-            <a:off x="320040" y="6053328"/>
-            <a:ext cx="8503920" cy="310896"/>
-          </a:xfrm>
-          <a:prstGeom prst="rect">
-            <a:avLst/>
-          </a:prstGeom>
-          <a:noFill/>
-        </p:spPr>
-        <p:txBody>
-          <a:bodyPr wrap="square">
-            <a:spAutoFit/>
-          </a:bodyPr>
-          <a:lstStyle/>
-          <a:p>
-            <a:pPr algn="ctr"/>
-            <a:r>
-              <a:rPr sz="1100" b="1">
-                <a:solidFill>
-                  <a:srgbClr val="1F3864"/>
-                </a:solidFill>
-              </a:rPr>
-              <a:t>PaintSurface -&gt; visible window -&gt; evaluate triggers -&gt; draw ~250 cells -&gt; present</a:t>
-            </a:r>
-          </a:p>
-        </p:txBody>
-      </p:sp>
-    </p:spTree>
-  </p:cSld>
-  <p:clrMapOvr>
-    <a:masterClrMapping/>
-  </p:clrMapOvr>
-</p:sld>
-</file>
-
-<file path=ppt/slides/slide21.xml><?xml version="1.0" encoding="utf-8"?>
-<p:sld xmlns:a="http://schemas.openxmlformats.org/drawingml/2006/main" xmlns:p="http://schemas.openxmlformats.org/presentationml/2006/main" xmlns:r="http://schemas.openxmlformats.org/officeDocument/2006/relationships">
-  <p:cSld>
-    <p:spTree>
-      <p:nvGrpSpPr>
-        <p:cNvPr id="1" name=""/>
-        <p:cNvGrpSpPr/>
-        <p:nvPr/>
-      </p:nvGrpSpPr>
-      <p:grpSpPr/>
-      <p:sp>
-        <p:nvSpPr>
-          <p:cNvPr id="2" name="Title 1"/>
-          <p:cNvSpPr>
-            <a:spLocks noGrp="1"/>
-          </p:cNvSpPr>
-          <p:nvPr>
-            <p:ph type="title"/>
-          </p:nvPr>
-        </p:nvSpPr>
-        <p:spPr/>
-        <p:txBody>
-          <a:bodyPr/>
-          <a:lstStyle/>
-          <a:p>
-            <a:r>
-              <a:rPr sz="2300" b="1"/>
-              <a:t>Data Flow Diagram - Level 0 (Context)</a:t>
-            </a:r>
-          </a:p>
-        </p:txBody>
-      </p:sp>
-      <p:sp>
-        <p:nvSpPr>
-          <p:cNvPr id="4" name="Footer Placeholder 3"/>
-          <p:cNvSpPr>
-            <a:spLocks noGrp="1"/>
-          </p:cNvSpPr>
-          <p:nvPr>
-            <p:ph type="ftr" sz="quarter" idx="11"/>
-          </p:nvPr>
-        </p:nvSpPr>
-        <p:spPr/>
-        <p:txBody>
-          <a:bodyPr/>
-          <a:lstStyle/>
-          <a:p>
-            <a:r>
-              <a:rPr sz="1000" b="0"/>
-              <a:t>FastGrid</a:t>
-            </a:r>
-            <a:endParaRPr lang="en-US" dirty="0"/>
-          </a:p>
-        </p:txBody>
-      </p:sp>
-      <p:sp>
-        <p:nvSpPr>
-          <p:cNvPr id="5" name="Slide Number Placeholder 4"/>
-          <p:cNvSpPr>
-            <a:spLocks noGrp="1"/>
-          </p:cNvSpPr>
-          <p:nvPr>
-            <p:ph type="sldNum" sz="quarter" idx="12"/>
-          </p:nvPr>
-        </p:nvSpPr>
-        <p:spPr/>
-        <p:txBody>
-          <a:bodyPr>
-            <a:normAutofit fontScale="62500" lnSpcReduction="20000"/>
-          </a:bodyPr>
-          <a:lstStyle/>
-          <a:p>
-            <a:fld id="{9EBC64C3-3FC7-4C40-910B-2643F037F02C}" type="slidenum">
-              <a:rPr lang="en-US" smtClean="0"/>
-              <a:pPr/>
-              <a:t>2</a:t>
+              <a:t>20</a:t>
             </a:fld>
             <a:endParaRPr lang="en-US" dirty="0"/>
           </a:p>
@@ -16380,7 +16356,7 @@
           <p:nvPr/>
         </p:nvPicPr>
         <p:blipFill>
-          <a:blip r:embed="rId2"/>
+          <a:blip r:embed="rId3"/>
           <a:stretch>
             <a:fillRect/>
           </a:stretch>
@@ -16403,8 +16379,8 @@
 </p:sld>
 </file>
 
-<file path=ppt/slides/slide22.xml><?xml version="1.0" encoding="utf-8"?>
-<p:sld xmlns:a="http://schemas.openxmlformats.org/drawingml/2006/main" xmlns:p="http://schemas.openxmlformats.org/presentationml/2006/main" xmlns:r="http://schemas.openxmlformats.org/officeDocument/2006/relationships">
+<file path=ppt/slides/slide21.xml><?xml version="1.0" encoding="utf-8"?>
+<p:sld xmlns:a="http://schemas.openxmlformats.org/drawingml/2006/main" xmlns:r="http://schemas.openxmlformats.org/officeDocument/2006/relationships" xmlns:p="http://schemas.openxmlformats.org/presentationml/2006/main">
   <p:cSld>
     <p:spTree>
       <p:nvGrpSpPr>
@@ -16412,7 +16388,14 @@
         <p:cNvGrpSpPr/>
         <p:nvPr/>
       </p:nvGrpSpPr>
-      <p:grpSpPr/>
+      <p:grpSpPr>
+        <a:xfrm>
+          <a:off x="0" y="0"/>
+          <a:ext cx="0" cy="0"/>
+          <a:chOff x="0" y="0"/>
+          <a:chExt cx="0" cy="0"/>
+        </a:xfrm>
+      </p:grpSpPr>
       <p:sp>
         <p:nvSpPr>
           <p:cNvPr id="2" name="Title 1"/>
@@ -16478,7 +16461,7 @@
             <a:fld id="{9EBC64C3-3FC7-4C40-910B-2643F037F02C}" type="slidenum">
               <a:rPr lang="en-US" smtClean="0"/>
               <a:pPr/>
-              <a:t>2</a:t>
+              <a:t>21</a:t>
             </a:fld>
             <a:endParaRPr lang="en-US" dirty="0"/>
           </a:p>
@@ -16516,7 +16499,7 @@
           <p:nvPr/>
         </p:nvPicPr>
         <p:blipFill>
-          <a:blip r:embed="rId2"/>
+          <a:blip r:embed="rId3"/>
           <a:stretch>
             <a:fillRect/>
           </a:stretch>
@@ -16539,8 +16522,8 @@
 </p:sld>
 </file>
 
-<file path=ppt/slides/slide23.xml><?xml version="1.0" encoding="utf-8"?>
-<p:sld xmlns:a="http://schemas.openxmlformats.org/drawingml/2006/main" xmlns:p="http://schemas.openxmlformats.org/presentationml/2006/main" xmlns:r="http://schemas.openxmlformats.org/officeDocument/2006/relationships">
+<file path=ppt/slides/slide22.xml><?xml version="1.0" encoding="utf-8"?>
+<p:sld xmlns:a="http://schemas.openxmlformats.org/drawingml/2006/main" xmlns:r="http://schemas.openxmlformats.org/officeDocument/2006/relationships" xmlns:p="http://schemas.openxmlformats.org/presentationml/2006/main">
   <p:cSld>
     <p:spTree>
       <p:nvGrpSpPr>
@@ -16548,7 +16531,14 @@
         <p:cNvGrpSpPr/>
         <p:nvPr/>
       </p:nvGrpSpPr>
-      <p:grpSpPr/>
+      <p:grpSpPr>
+        <a:xfrm>
+          <a:off x="0" y="0"/>
+          <a:ext cx="0" cy="0"/>
+          <a:chOff x="0" y="0"/>
+          <a:chExt cx="0" cy="0"/>
+        </a:xfrm>
+      </p:grpSpPr>
       <p:sp>
         <p:nvSpPr>
           <p:cNvPr id="2" name="Title 1"/>
@@ -16614,7 +16604,7 @@
             <a:fld id="{9EBC64C3-3FC7-4C40-910B-2643F037F02C}" type="slidenum">
               <a:rPr lang="en-US" smtClean="0"/>
               <a:pPr/>
-              <a:t>2</a:t>
+              <a:t>22</a:t>
             </a:fld>
             <a:endParaRPr lang="en-US" dirty="0"/>
           </a:p>
@@ -16652,7 +16642,7 @@
           <p:nvPr/>
         </p:nvPicPr>
         <p:blipFill>
-          <a:blip r:embed="rId2"/>
+          <a:blip r:embed="rId3"/>
           <a:stretch>
             <a:fillRect/>
           </a:stretch>
@@ -16709,8 +16699,8 @@
 </p:sld>
 </file>
 
-<file path=ppt/slides/slide24.xml><?xml version="1.0" encoding="utf-8"?>
-<p:sld xmlns:a="http://schemas.openxmlformats.org/drawingml/2006/main" xmlns:p="http://schemas.openxmlformats.org/presentationml/2006/main" xmlns:r="http://schemas.openxmlformats.org/officeDocument/2006/relationships">
+<file path=ppt/slides/slide23.xml><?xml version="1.0" encoding="utf-8"?>
+<p:sld xmlns:a="http://schemas.openxmlformats.org/drawingml/2006/main" xmlns:r="http://schemas.openxmlformats.org/officeDocument/2006/relationships" xmlns:p="http://schemas.openxmlformats.org/presentationml/2006/main">
   <p:cSld>
     <p:spTree>
       <p:nvGrpSpPr>
@@ -16718,7 +16708,14 @@
         <p:cNvGrpSpPr/>
         <p:nvPr/>
       </p:nvGrpSpPr>
-      <p:grpSpPr/>
+      <p:grpSpPr>
+        <a:xfrm>
+          <a:off x="0" y="0"/>
+          <a:ext cx="0" cy="0"/>
+          <a:chOff x="0" y="0"/>
+          <a:chExt cx="0" cy="0"/>
+        </a:xfrm>
+      </p:grpSpPr>
       <p:sp>
         <p:nvSpPr>
           <p:cNvPr id="2" name="Title 1"/>
@@ -16784,7 +16781,7 @@
             <a:fld id="{9EBC64C3-3FC7-4C40-910B-2643F037F02C}" type="slidenum">
               <a:rPr lang="en-US" smtClean="0"/>
               <a:pPr/>
-              <a:t>2</a:t>
+              <a:t>23</a:t>
             </a:fld>
             <a:endParaRPr lang="en-US" dirty="0"/>
           </a:p>
@@ -16822,7 +16819,7 @@
           <p:nvPr/>
         </p:nvPicPr>
         <p:blipFill>
-          <a:blip r:embed="rId2"/>
+          <a:blip r:embed="rId3"/>
           <a:stretch>
             <a:fillRect/>
           </a:stretch>
@@ -16846,7 +16843,7 @@
           <p:nvPr/>
         </p:nvPicPr>
         <p:blipFill>
-          <a:blip r:embed="rId3"/>
+          <a:blip r:embed="rId4"/>
           <a:stretch>
             <a:fillRect/>
           </a:stretch>
@@ -16903,8 +16900,8 @@
 </p:sld>
 </file>
 
-<file path=ppt/slides/slide25.xml><?xml version="1.0" encoding="utf-8"?>
-<p:sld xmlns:a="http://schemas.openxmlformats.org/drawingml/2006/main" xmlns:p="http://schemas.openxmlformats.org/presentationml/2006/main" xmlns:r="http://schemas.openxmlformats.org/officeDocument/2006/relationships">
+<file path=ppt/slides/slide24.xml><?xml version="1.0" encoding="utf-8"?>
+<p:sld xmlns:a="http://schemas.openxmlformats.org/drawingml/2006/main" xmlns:r="http://schemas.openxmlformats.org/officeDocument/2006/relationships" xmlns:p="http://schemas.openxmlformats.org/presentationml/2006/main">
   <p:cSld>
     <p:spTree>
       <p:nvGrpSpPr>
@@ -16912,7 +16909,14 @@
         <p:cNvGrpSpPr/>
         <p:nvPr/>
       </p:nvGrpSpPr>
-      <p:grpSpPr/>
+      <p:grpSpPr>
+        <a:xfrm>
+          <a:off x="0" y="0"/>
+          <a:ext cx="0" cy="0"/>
+          <a:chOff x="0" y="0"/>
+          <a:chExt cx="0" cy="0"/>
+        </a:xfrm>
+      </p:grpSpPr>
       <p:sp>
         <p:nvSpPr>
           <p:cNvPr id="2" name="Title 1"/>
@@ -16978,7 +16982,7 @@
             <a:fld id="{9EBC64C3-3FC7-4C40-910B-2643F037F02C}" type="slidenum">
               <a:rPr lang="en-US" smtClean="0"/>
               <a:pPr/>
-              <a:t>2</a:t>
+              <a:t>24</a:t>
             </a:fld>
             <a:endParaRPr lang="en-US" dirty="0"/>
           </a:p>
@@ -17016,7 +17020,7 @@
           <p:nvPr/>
         </p:nvPicPr>
         <p:blipFill>
-          <a:blip r:embed="rId2"/>
+          <a:blip r:embed="rId3"/>
           <a:stretch>
             <a:fillRect/>
           </a:stretch>
@@ -17040,7 +17044,7 @@
           <p:nvPr/>
         </p:nvPicPr>
         <p:blipFill>
-          <a:blip r:embed="rId3"/>
+          <a:blip r:embed="rId4"/>
           <a:stretch>
             <a:fillRect/>
           </a:stretch>
@@ -17097,8 +17101,8 @@
 </p:sld>
 </file>
 
-<file path=ppt/slides/slide26.xml><?xml version="1.0" encoding="utf-8"?>
-<p:sld xmlns:a="http://schemas.openxmlformats.org/drawingml/2006/main" xmlns:p="http://schemas.openxmlformats.org/presentationml/2006/main" xmlns:r="http://schemas.openxmlformats.org/officeDocument/2006/relationships">
+<file path=ppt/slides/slide25.xml><?xml version="1.0" encoding="utf-8"?>
+<p:sld xmlns:a="http://schemas.openxmlformats.org/drawingml/2006/main" xmlns:r="http://schemas.openxmlformats.org/officeDocument/2006/relationships" xmlns:p="http://schemas.openxmlformats.org/presentationml/2006/main">
   <p:cSld>
     <p:spTree>
       <p:nvGrpSpPr>
@@ -17106,7 +17110,14 @@
         <p:cNvGrpSpPr/>
         <p:nvPr/>
       </p:nvGrpSpPr>
-      <p:grpSpPr/>
+      <p:grpSpPr>
+        <a:xfrm>
+          <a:off x="0" y="0"/>
+          <a:ext cx="0" cy="0"/>
+          <a:chOff x="0" y="0"/>
+          <a:chExt cx="0" cy="0"/>
+        </a:xfrm>
+      </p:grpSpPr>
       <p:sp>
         <p:nvSpPr>
           <p:cNvPr id="2" name="Title 1"/>
@@ -17172,7 +17183,7 @@
             <a:fld id="{9EBC64C3-3FC7-4C40-910B-2643F037F02C}" type="slidenum">
               <a:rPr lang="en-US" smtClean="0"/>
               <a:pPr/>
-              <a:t>2</a:t>
+              <a:t>25</a:t>
             </a:fld>
             <a:endParaRPr lang="en-US" dirty="0"/>
           </a:p>
@@ -17210,7 +17221,7 @@
           <p:nvPr/>
         </p:nvPicPr>
         <p:blipFill>
-          <a:blip r:embed="rId2"/>
+          <a:blip r:embed="rId3"/>
           <a:stretch>
             <a:fillRect/>
           </a:stretch>
@@ -17234,7 +17245,7 @@
           <p:nvPr/>
         </p:nvPicPr>
         <p:blipFill>
-          <a:blip r:embed="rId3"/>
+          <a:blip r:embed="rId4"/>
           <a:stretch>
             <a:fillRect/>
           </a:stretch>
@@ -17291,8 +17302,8 @@
 </p:sld>
 </file>
 
-<file path=ppt/slides/slide27.xml><?xml version="1.0" encoding="utf-8"?>
-<p:sld xmlns:a="http://schemas.openxmlformats.org/drawingml/2006/main" xmlns:p="http://schemas.openxmlformats.org/presentationml/2006/main" xmlns:r="http://schemas.openxmlformats.org/officeDocument/2006/relationships">
+<file path=ppt/slides/slide26.xml><?xml version="1.0" encoding="utf-8"?>
+<p:sld xmlns:a="http://schemas.openxmlformats.org/drawingml/2006/main" xmlns:r="http://schemas.openxmlformats.org/officeDocument/2006/relationships" xmlns:p="http://schemas.openxmlformats.org/presentationml/2006/main">
   <p:cSld>
     <p:spTree>
       <p:nvGrpSpPr>
@@ -17300,7 +17311,14 @@
         <p:cNvGrpSpPr/>
         <p:nvPr/>
       </p:nvGrpSpPr>
-      <p:grpSpPr/>
+      <p:grpSpPr>
+        <a:xfrm>
+          <a:off x="0" y="0"/>
+          <a:ext cx="0" cy="0"/>
+          <a:chOff x="0" y="0"/>
+          <a:chExt cx="0" cy="0"/>
+        </a:xfrm>
+      </p:grpSpPr>
       <p:sp>
         <p:nvSpPr>
           <p:cNvPr id="2" name="Title 1"/>
@@ -17366,7 +17384,7 @@
             <a:fld id="{9EBC64C3-3FC7-4C40-910B-2643F037F02C}" type="slidenum">
               <a:rPr lang="en-US" smtClean="0"/>
               <a:pPr/>
-              <a:t>2</a:t>
+              <a:t>26</a:t>
             </a:fld>
             <a:endParaRPr lang="en-US" dirty="0"/>
           </a:p>
@@ -17404,7 +17422,7 @@
           <p:nvPr/>
         </p:nvPicPr>
         <p:blipFill>
-          <a:blip r:embed="rId2"/>
+          <a:blip r:embed="rId3"/>
           <a:stretch>
             <a:fillRect/>
           </a:stretch>
@@ -17461,8 +17479,8 @@
 </p:sld>
 </file>
 
-<file path=ppt/slides/slide28.xml><?xml version="1.0" encoding="utf-8"?>
-<p:sld xmlns:a="http://schemas.openxmlformats.org/drawingml/2006/main" xmlns:p="http://schemas.openxmlformats.org/presentationml/2006/main" xmlns:r="http://schemas.openxmlformats.org/officeDocument/2006/relationships">
+<file path=ppt/slides/slide27.xml><?xml version="1.0" encoding="utf-8"?>
+<p:sld xmlns:a="http://schemas.openxmlformats.org/drawingml/2006/main" xmlns:r="http://schemas.openxmlformats.org/officeDocument/2006/relationships" xmlns:p="http://schemas.openxmlformats.org/presentationml/2006/main">
   <p:cSld>
     <p:spTree>
       <p:nvGrpSpPr>
@@ -17470,7 +17488,14 @@
         <p:cNvGrpSpPr/>
         <p:nvPr/>
       </p:nvGrpSpPr>
-      <p:grpSpPr/>
+      <p:grpSpPr>
+        <a:xfrm>
+          <a:off x="0" y="0"/>
+          <a:ext cx="0" cy="0"/>
+          <a:chOff x="0" y="0"/>
+          <a:chExt cx="0" cy="0"/>
+        </a:xfrm>
+      </p:grpSpPr>
       <p:sp>
         <p:nvSpPr>
           <p:cNvPr id="2" name="Title 1"/>
@@ -17536,7 +17561,7 @@
             <a:fld id="{9EBC64C3-3FC7-4C40-910B-2643F037F02C}" type="slidenum">
               <a:rPr lang="en-US" smtClean="0"/>
               <a:pPr/>
-              <a:t>2</a:t>
+              <a:t>27</a:t>
             </a:fld>
             <a:endParaRPr lang="en-US" dirty="0"/>
           </a:p>
@@ -17574,7 +17599,7 @@
           <p:nvPr/>
         </p:nvPicPr>
         <p:blipFill>
-          <a:blip r:embed="rId2"/>
+          <a:blip r:embed="rId3"/>
           <a:stretch>
             <a:fillRect/>
           </a:stretch>
@@ -17598,7 +17623,7 @@
           <p:nvPr/>
         </p:nvPicPr>
         <p:blipFill>
-          <a:blip r:embed="rId3"/>
+          <a:blip r:embed="rId4"/>
           <a:stretch>
             <a:fillRect/>
           </a:stretch>
@@ -17655,8 +17680,8 @@
 </p:sld>
 </file>
 
-<file path=ppt/slides/slide29.xml><?xml version="1.0" encoding="utf-8"?>
-<p:sld xmlns:a="http://schemas.openxmlformats.org/drawingml/2006/main" xmlns:p="http://schemas.openxmlformats.org/presentationml/2006/main" xmlns:r="http://schemas.openxmlformats.org/officeDocument/2006/relationships">
+<file path=ppt/slides/slide28.xml><?xml version="1.0" encoding="utf-8"?>
+<p:sld xmlns:a="http://schemas.openxmlformats.org/drawingml/2006/main" xmlns:r="http://schemas.openxmlformats.org/officeDocument/2006/relationships" xmlns:p="http://schemas.openxmlformats.org/presentationml/2006/main">
   <p:cSld>
     <p:spTree>
       <p:nvGrpSpPr>
@@ -17664,7 +17689,14 @@
         <p:cNvGrpSpPr/>
         <p:nvPr/>
       </p:nvGrpSpPr>
-      <p:grpSpPr/>
+      <p:grpSpPr>
+        <a:xfrm>
+          <a:off x="0" y="0"/>
+          <a:ext cx="0" cy="0"/>
+          <a:chOff x="0" y="0"/>
+          <a:chExt cx="0" cy="0"/>
+        </a:xfrm>
+      </p:grpSpPr>
       <p:sp>
         <p:nvSpPr>
           <p:cNvPr id="2" name="Title 1"/>
@@ -17902,7 +17934,7 @@
             <a:fld id="{9EBC64C3-3FC7-4C40-910B-2643F037F02C}" type="slidenum">
               <a:rPr lang="en-US" smtClean="0"/>
               <a:pPr/>
-              <a:t>2</a:t>
+              <a:t>28</a:t>
             </a:fld>
             <a:endParaRPr lang="en-US" dirty="0"/>
           </a:p>
@@ -17932,6 +17964,239 @@
         </p:txBody>
       </p:sp>
     </p:spTree>
+  </p:cSld>
+  <p:clrMapOvr>
+    <a:masterClrMapping/>
+  </p:clrMapOvr>
+</p:sld>
+</file>
+
+<file path=ppt/slides/slide29.xml><?xml version="1.0" encoding="utf-8"?>
+<p:sld xmlns:a="http://schemas.openxmlformats.org/drawingml/2006/main" xmlns:r="http://schemas.openxmlformats.org/officeDocument/2006/relationships" xmlns:p="http://schemas.openxmlformats.org/presentationml/2006/main">
+  <p:cSld>
+    <p:spTree>
+      <p:nvGrpSpPr>
+        <p:cNvPr id="1" name=""/>
+        <p:cNvGrpSpPr/>
+        <p:nvPr/>
+      </p:nvGrpSpPr>
+      <p:grpSpPr>
+        <a:xfrm>
+          <a:off x="0" y="0"/>
+          <a:ext cx="0" cy="0"/>
+          <a:chOff x="0" y="0"/>
+          <a:chExt cx="0" cy="0"/>
+        </a:xfrm>
+      </p:grpSpPr>
+      <p:sp>
+        <p:nvSpPr>
+          <p:cNvPr id="2" name="Title 1"/>
+          <p:cNvSpPr>
+            <a:spLocks noGrp="1"/>
+          </p:cNvSpPr>
+          <p:nvPr>
+            <p:ph type="title"/>
+          </p:nvPr>
+        </p:nvSpPr>
+        <p:spPr/>
+        <p:txBody>
+          <a:bodyPr/>
+          <a:lstStyle/>
+          <a:p>
+            <a:r>
+              <a:rPr sz="2600" b="1"/>
+              <a:t>References / Key Technical Basis</a:t>
+            </a:r>
+          </a:p>
+        </p:txBody>
+      </p:sp>
+      <p:sp>
+        <p:nvSpPr>
+          <p:cNvPr id="3" name="Content Placeholder 2"/>
+          <p:cNvSpPr>
+            <a:spLocks noGrp="1"/>
+          </p:cNvSpPr>
+          <p:nvPr>
+            <p:ph sz="quarter" idx="1"/>
+          </p:nvPr>
+        </p:nvSpPr>
+        <p:spPr/>
+        <p:txBody>
+          <a:bodyPr>
+            <a:normAutofit/>
+          </a:bodyPr>
+          <a:lstStyle/>
+          <a:p>
+            <a:pPr>
+              <a:lnSpc>
+                <a:spcPct val="150000"/>
+              </a:lnSpc>
+              <a:buFont typeface="Wingdings" panose="05000000000000000000" pitchFamily="2" charset="2"/>
+              <a:buChar char="v"/>
+            </a:pPr>
+            <a:r>
+              <a:rPr sz="1800" dirty="0">
+                <a:latin typeface="Calibri" panose="020F0502020204030204" pitchFamily="34" charset="0"/>
+                <a:cs typeface="Calibri" panose="020F0502020204030204" pitchFamily="34" charset="0"/>
+              </a:rPr>
+              <a:t>WPF DataGrid documentation and rendering model.</a:t>
+            </a:r>
+            <a:endParaRPr lang="en-US" sz="1800" dirty="0">
+              <a:latin typeface="Calibri" panose="020F0502020204030204" pitchFamily="34" charset="0"/>
+              <a:cs typeface="Calibri" panose="020F0502020204030204" pitchFamily="34" charset="0"/>
+            </a:endParaRPr>
+          </a:p>
+          <a:p>
+            <a:pPr>
+              <a:lnSpc>
+                <a:spcPct val="150000"/>
+              </a:lnSpc>
+              <a:buFont typeface="Wingdings" panose="05000000000000000000" pitchFamily="2" charset="2"/>
+              <a:buChar char="v"/>
+            </a:pPr>
+            <a:r>
+              <a:rPr sz="1800" dirty="0" err="1">
+                <a:latin typeface="Calibri" panose="020F0502020204030204" pitchFamily="34" charset="0"/>
+                <a:cs typeface="Calibri" panose="020F0502020204030204" pitchFamily="34" charset="0"/>
+              </a:rPr>
+              <a:t>SkiaSharp</a:t>
+            </a:r>
+            <a:r>
+              <a:rPr sz="1800" dirty="0">
+                <a:latin typeface="Calibri" panose="020F0502020204030204" pitchFamily="34" charset="0"/>
+                <a:cs typeface="Calibri" panose="020F0502020204030204" pitchFamily="34" charset="0"/>
+              </a:rPr>
+              <a:t> documentation and graphics/rendering concepts.</a:t>
+            </a:r>
+          </a:p>
+          <a:p>
+            <a:pPr>
+              <a:lnSpc>
+                <a:spcPct val="150000"/>
+              </a:lnSpc>
+              <a:buFont typeface="Wingdings" panose="05000000000000000000" pitchFamily="2" charset="2"/>
+              <a:buChar char="v"/>
+            </a:pPr>
+            <a:r>
+              <a:rPr sz="1800" dirty="0">
+                <a:latin typeface="Calibri" panose="020F0502020204030204" pitchFamily="34" charset="0"/>
+                <a:cs typeface="Calibri" panose="020F0502020204030204" pitchFamily="34" charset="0"/>
+              </a:rPr>
+              <a:t>NuGet package management and .NET library distribution.</a:t>
+            </a:r>
+          </a:p>
+          <a:p>
+            <a:pPr>
+              <a:lnSpc>
+                <a:spcPct val="150000"/>
+              </a:lnSpc>
+              <a:buFont typeface="Wingdings" panose="05000000000000000000" pitchFamily="2" charset="2"/>
+              <a:buChar char="v"/>
+            </a:pPr>
+            <a:r>
+              <a:rPr sz="1800" dirty="0">
+                <a:latin typeface="Calibri" panose="020F0502020204030204" pitchFamily="34" charset="0"/>
+                <a:cs typeface="Calibri" panose="020F0502020204030204" pitchFamily="34" charset="0"/>
+              </a:rPr>
+              <a:t>CI/CD practices for automated build, test, package, and release workflows.</a:t>
+            </a:r>
+          </a:p>
+          <a:p>
+            <a:pPr>
+              <a:lnSpc>
+                <a:spcPct val="150000"/>
+              </a:lnSpc>
+              <a:buFont typeface="Wingdings" panose="05000000000000000000" pitchFamily="2" charset="2"/>
+              <a:buChar char="v"/>
+            </a:pPr>
+            <a:r>
+              <a:rPr sz="1800" dirty="0">
+                <a:latin typeface="Calibri" panose="020F0502020204030204" pitchFamily="34" charset="0"/>
+                <a:cs typeface="Calibri" panose="020F0502020204030204" pitchFamily="34" charset="0"/>
+              </a:rPr>
+              <a:t>Performance engineering: frame-time measurement and large-dataset benchmarking.</a:t>
+            </a:r>
+          </a:p>
+        </p:txBody>
+      </p:sp>
+      <p:sp>
+        <p:nvSpPr>
+          <p:cNvPr id="4" name="Footer Placeholder 3"/>
+          <p:cNvSpPr>
+            <a:spLocks noGrp="1"/>
+          </p:cNvSpPr>
+          <p:nvPr>
+            <p:ph type="ftr" sz="quarter" idx="11"/>
+          </p:nvPr>
+        </p:nvSpPr>
+        <p:spPr/>
+        <p:txBody>
+          <a:bodyPr/>
+          <a:lstStyle/>
+          <a:p>
+            <a:r>
+              <a:rPr sz="1000" b="0"/>
+              <a:t>FastGrid</a:t>
+            </a:r>
+            <a:endParaRPr lang="en-US" dirty="0"/>
+          </a:p>
+        </p:txBody>
+      </p:sp>
+      <p:sp>
+        <p:nvSpPr>
+          <p:cNvPr id="5" name="Slide Number Placeholder 4"/>
+          <p:cNvSpPr>
+            <a:spLocks noGrp="1"/>
+          </p:cNvSpPr>
+          <p:nvPr>
+            <p:ph type="sldNum" sz="quarter" idx="12"/>
+          </p:nvPr>
+        </p:nvSpPr>
+        <p:spPr/>
+        <p:txBody>
+          <a:bodyPr>
+            <a:normAutofit fontScale="62500" lnSpcReduction="20000"/>
+          </a:bodyPr>
+          <a:lstStyle/>
+          <a:p>
+            <a:fld id="{9EBC64C3-3FC7-4C40-910B-2643F037F02C}" type="slidenum">
+              <a:rPr lang="en-US" smtClean="0"/>
+              <a:pPr/>
+              <a:t>29</a:t>
+            </a:fld>
+            <a:endParaRPr lang="en-US" dirty="0"/>
+          </a:p>
+        </p:txBody>
+      </p:sp>
+      <p:sp>
+        <p:nvSpPr>
+          <p:cNvPr id="6" name="Date Placeholder 5"/>
+          <p:cNvSpPr>
+            <a:spLocks noGrp="1"/>
+          </p:cNvSpPr>
+          <p:nvPr>
+            <p:ph type="dt" sz="half" idx="10"/>
+          </p:nvPr>
+        </p:nvSpPr>
+        <p:spPr/>
+        <p:txBody>
+          <a:bodyPr/>
+          <a:lstStyle/>
+          <a:p>
+            <a:pPr algn="ctr"/>
+            <a:r>
+              <a:rPr lang="en-US" dirty="0"/>
+              <a:t> Hamdard University </a:t>
+            </a:r>
+          </a:p>
+        </p:txBody>
+      </p:sp>
+    </p:spTree>
+    <p:extLst>
+      <p:ext uri="{BB962C8B-B14F-4D97-AF65-F5344CB8AC3E}">
+        <p14:creationId xmlns:p14="http://schemas.microsoft.com/office/powerpoint/2010/main" val="850711667"/>
+      </p:ext>
+    </p:extLst>
   </p:cSld>
   <p:clrMapOvr>
     <a:masterClrMapping/>
@@ -18155,7 +18420,7 @@
 </file>
 
 <file path=ppt/slides/slide30.xml><?xml version="1.0" encoding="utf-8"?>
-<p:sld xmlns:a="http://schemas.openxmlformats.org/drawingml/2006/main" xmlns:p="http://schemas.openxmlformats.org/presentationml/2006/main" xmlns:r="http://schemas.openxmlformats.org/officeDocument/2006/relationships">
+<p:sld xmlns:a="http://schemas.openxmlformats.org/drawingml/2006/main" xmlns:r="http://schemas.openxmlformats.org/officeDocument/2006/relationships" xmlns:p="http://schemas.openxmlformats.org/presentationml/2006/main">
   <p:cSld>
     <p:spTree>
       <p:nvGrpSpPr>
@@ -18163,7 +18428,14 @@
         <p:cNvGrpSpPr/>
         <p:nvPr/>
       </p:nvGrpSpPr>
-      <p:grpSpPr/>
+      <p:grpSpPr>
+        <a:xfrm>
+          <a:off x="0" y="0"/>
+          <a:ext cx="0" cy="0"/>
+          <a:chOff x="0" y="0"/>
+          <a:chExt cx="0" cy="0"/>
+        </a:xfrm>
+      </p:grpSpPr>
       <p:sp>
         <p:nvSpPr>
           <p:cNvPr id="2" name="Title 1"/>
@@ -18357,7 +18629,7 @@
             <a:fld id="{9EBC64C3-3FC7-4C40-910B-2643F037F02C}" type="slidenum">
               <a:rPr lang="en-US" smtClean="0"/>
               <a:pPr/>
-              <a:t>2</a:t>
+              <a:t>30</a:t>
             </a:fld>
             <a:endParaRPr lang="en-US" dirty="0"/>
           </a:p>
@@ -18395,7 +18667,7 @@
 </file>
 
 <file path=ppt/slides/slide31.xml><?xml version="1.0" encoding="utf-8"?>
-<p:sld xmlns:a="http://schemas.openxmlformats.org/drawingml/2006/main" xmlns:p="http://schemas.openxmlformats.org/presentationml/2006/main" xmlns:r="http://schemas.openxmlformats.org/officeDocument/2006/relationships">
+<p:sld xmlns:a="http://schemas.openxmlformats.org/drawingml/2006/main" xmlns:r="http://schemas.openxmlformats.org/officeDocument/2006/relationships" xmlns:p="http://schemas.openxmlformats.org/presentationml/2006/main">
   <p:cSld>
     <p:spTree>
       <p:nvGrpSpPr>
@@ -18403,7 +18675,14 @@
         <p:cNvGrpSpPr/>
         <p:nvPr/>
       </p:nvGrpSpPr>
-      <p:grpSpPr/>
+      <p:grpSpPr>
+        <a:xfrm>
+          <a:off x="0" y="0"/>
+          <a:ext cx="0" cy="0"/>
+          <a:chOff x="0" y="0"/>
+          <a:chExt cx="0" cy="0"/>
+        </a:xfrm>
+      </p:grpSpPr>
       <p:sp>
         <p:nvSpPr>
           <p:cNvPr id="2" name="Title 1"/>
@@ -18597,7 +18876,7 @@
             <a:fld id="{9EBC64C3-3FC7-4C40-910B-2643F037F02C}" type="slidenum">
               <a:rPr lang="en-US" smtClean="0"/>
               <a:pPr/>
-              <a:t>2</a:t>
+              <a:t>31</a:t>
             </a:fld>
             <a:endParaRPr lang="en-US" dirty="0"/>
           </a:p>
@@ -18635,7 +18914,7 @@
 </file>
 
 <file path=ppt/slides/slide32.xml><?xml version="1.0" encoding="utf-8"?>
-<p:sld xmlns:a="http://schemas.openxmlformats.org/drawingml/2006/main" xmlns:p="http://schemas.openxmlformats.org/presentationml/2006/main" xmlns:r="http://schemas.openxmlformats.org/officeDocument/2006/relationships">
+<p:sld xmlns:a="http://schemas.openxmlformats.org/drawingml/2006/main" xmlns:r="http://schemas.openxmlformats.org/officeDocument/2006/relationships" xmlns:p="http://schemas.openxmlformats.org/presentationml/2006/main">
   <p:cSld>
     <p:spTree>
       <p:nvGrpSpPr>
@@ -18643,7 +18922,14 @@
         <p:cNvGrpSpPr/>
         <p:nvPr/>
       </p:nvGrpSpPr>
-      <p:grpSpPr/>
+      <p:grpSpPr>
+        <a:xfrm>
+          <a:off x="0" y="0"/>
+          <a:ext cx="0" cy="0"/>
+          <a:chOff x="0" y="0"/>
+          <a:chExt cx="0" cy="0"/>
+        </a:xfrm>
+      </p:grpSpPr>
       <p:sp>
         <p:nvSpPr>
           <p:cNvPr id="2" name="Title 1"/>
@@ -18903,7 +19189,7 @@
             <a:fld id="{9EBC64C3-3FC7-4C40-910B-2643F037F02C}" type="slidenum">
               <a:rPr lang="en-US" smtClean="0"/>
               <a:pPr/>
-              <a:t>2</a:t>
+              <a:t>32</a:t>
             </a:fld>
             <a:endParaRPr lang="en-US" dirty="0"/>
           </a:p>
@@ -19452,7 +19738,7 @@
           <a:p>
             <a:r>
               <a:rPr sz="2600" b="1"/>
-              <a:t>Our Methodology</a:t>
+              <a:t>Change of Scope</a:t>
             </a:r>
           </a:p>
         </p:txBody>
@@ -19469,104 +19755,144 @@
         </p:nvSpPr>
         <p:spPr/>
         <p:txBody>
-          <a:bodyPr/>
+          <a:bodyPr>
+            <a:normAutofit/>
+          </a:bodyPr>
           <a:lstStyle/>
           <a:p>
             <a:pPr>
               <a:lnSpc>
-                <a:spcPct val="150000"/>
+                <a:spcPct val="124000"/>
               </a:lnSpc>
               <a:buFont typeface="Wingdings" panose="05000000000000000000" pitchFamily="2" charset="2"/>
               <a:buChar char="v"/>
             </a:pPr>
             <a:r>
-              <a:rPr sz="1800" dirty="0">
+              <a:rPr sz="1400" dirty="0">
+                <a:solidFill>
+                  <a:schemeClr val="tx1">
+                    <a:lumMod val="95000"/>
+                    <a:lumOff val="5000"/>
+                  </a:schemeClr>
+                </a:solidFill>
                 <a:latin typeface="Calibri" panose="020F0502020204030204" pitchFamily="34" charset="0"/>
                 <a:cs typeface="Calibri" panose="020F0502020204030204" pitchFamily="34" charset="0"/>
               </a:rPr>
-              <a:t>1. Analyze WPF DataGrid rendering and identify performance bottlenecks.</a:t>
-            </a:r>
-            <a:endParaRPr lang="en-US" dirty="0">
-              <a:latin typeface="Calibri" panose="020F0502020204030204" pitchFamily="34" charset="0"/>
-              <a:cs typeface="Calibri" panose="020F0502020204030204" pitchFamily="34" charset="0"/>
-            </a:endParaRPr>
+              <a:t>FYP-I milestone target: a proof-of-concept demonstrating roughly 30% of the work.</a:t>
+            </a:r>
           </a:p>
           <a:p>
             <a:pPr>
               <a:lnSpc>
-                <a:spcPct val="150000"/>
+                <a:spcPct val="124000"/>
               </a:lnSpc>
               <a:buFont typeface="Wingdings" panose="05000000000000000000" pitchFamily="2" charset="2"/>
               <a:buChar char="v"/>
             </a:pPr>
             <a:r>
-              <a:rPr sz="1800" dirty="0">
+              <a:rPr sz="1400" dirty="0">
+                <a:solidFill>
+                  <a:schemeClr val="tx1">
+                    <a:lumMod val="95000"/>
+                    <a:lumOff val="5000"/>
+                  </a:schemeClr>
+                </a:solidFill>
                 <a:latin typeface="Calibri" panose="020F0502020204030204" pitchFamily="34" charset="0"/>
                 <a:cs typeface="Calibri" panose="020F0502020204030204" pitchFamily="34" charset="0"/>
               </a:rPr>
-              <a:t>2. Design a layered architecture separating control, data, managers, rendering, and automation.</a:t>
+              <a:t>Actually delivered: MORE than 30% - a complete, versioned and packaged library, SkiaSharpControlV2 v</a:t>
+            </a:r>
+            <a:r>
+              <a:rPr lang="en-US" sz="1400" dirty="0">
+                <a:solidFill>
+                  <a:schemeClr val="tx1">
+                    <a:lumMod val="95000"/>
+                    <a:lumOff val="5000"/>
+                  </a:schemeClr>
+                </a:solidFill>
+                <a:latin typeface="Calibri" panose="020F0502020204030204" pitchFamily="34" charset="0"/>
+                <a:cs typeface="Calibri" panose="020F0502020204030204" pitchFamily="34" charset="0"/>
+              </a:rPr>
+              <a:t>1.0.2</a:t>
+            </a:r>
+            <a:r>
+              <a:rPr sz="1400" dirty="0">
+                <a:solidFill>
+                  <a:schemeClr val="tx1">
+                    <a:lumMod val="95000"/>
+                    <a:lumOff val="5000"/>
+                  </a:schemeClr>
+                </a:solidFill>
+                <a:latin typeface="Calibri" panose="020F0502020204030204" pitchFamily="34" charset="0"/>
+                <a:cs typeface="Calibri" panose="020F0502020204030204" pitchFamily="34" charset="0"/>
+              </a:rPr>
+              <a:t>, with 552 passing unit tests.</a:t>
             </a:r>
           </a:p>
           <a:p>
             <a:pPr>
               <a:lnSpc>
-                <a:spcPct val="150000"/>
+                <a:spcPct val="124000"/>
               </a:lnSpc>
               <a:buFont typeface="Wingdings" panose="05000000000000000000" pitchFamily="2" charset="2"/>
               <a:buChar char="v"/>
             </a:pPr>
             <a:r>
-              <a:rPr sz="1800" dirty="0">
+              <a:rPr sz="1400" dirty="0">
+                <a:solidFill>
+                  <a:schemeClr val="tx1">
+                    <a:lumMod val="95000"/>
+                    <a:lumOff val="5000"/>
+                  </a:schemeClr>
+                </a:solidFill>
                 <a:latin typeface="Calibri" panose="020F0502020204030204" pitchFamily="34" charset="0"/>
                 <a:cs typeface="Calibri" panose="020F0502020204030204" pitchFamily="34" charset="0"/>
               </a:rPr>
-              <a:t>3. Implement a </a:t>
-            </a:r>
-            <a:r>
-              <a:rPr sz="1800" dirty="0" err="1">
-                <a:latin typeface="Calibri" panose="020F0502020204030204" pitchFamily="34" charset="0"/>
-                <a:cs typeface="Calibri" panose="020F0502020204030204" pitchFamily="34" charset="0"/>
-              </a:rPr>
-              <a:t>SkiaSharp</a:t>
-            </a:r>
-            <a:r>
-              <a:rPr sz="1800" dirty="0">
-                <a:latin typeface="Calibri" panose="020F0502020204030204" pitchFamily="34" charset="0"/>
-                <a:cs typeface="Calibri" panose="020F0502020204030204" pitchFamily="34" charset="0"/>
-              </a:rPr>
-              <a:t> immediate-mode rendering prototype.</a:t>
+              <a:t>Added beyond the original scope: grouping with six aggregations, conditional styling and triggers, in-cell buttons and commands, UI Automation, cross-application row drag-and-drop, TSV export, tooltips and density theming.</a:t>
             </a:r>
           </a:p>
           <a:p>
             <a:pPr>
               <a:lnSpc>
-                <a:spcPct val="150000"/>
+                <a:spcPct val="124000"/>
               </a:lnSpc>
               <a:buFont typeface="Wingdings" panose="05000000000000000000" pitchFamily="2" charset="2"/>
               <a:buChar char="v"/>
             </a:pPr>
             <a:r>
-              <a:rPr sz="1800" dirty="0">
+              <a:rPr sz="1400" dirty="0">
+                <a:solidFill>
+                  <a:schemeClr val="tx1">
+                    <a:lumMod val="95000"/>
+                    <a:lumOff val="5000"/>
+                  </a:schemeClr>
+                </a:solidFill>
                 <a:latin typeface="Calibri" panose="020F0502020204030204" pitchFamily="34" charset="0"/>
                 <a:cs typeface="Calibri" panose="020F0502020204030204" pitchFamily="34" charset="0"/>
               </a:rPr>
-              <a:t>4. Benchmark frame time and validate behavior using large datasets.</a:t>
+              <a:t>Brought forward: the GitHub Actions CI/CD pipeline and NuGet publishing are already in use, not just designed.</a:t>
             </a:r>
           </a:p>
           <a:p>
             <a:pPr>
               <a:lnSpc>
-                <a:spcPct val="150000"/>
+                <a:spcPct val="124000"/>
               </a:lnSpc>
               <a:buFont typeface="Wingdings" panose="05000000000000000000" pitchFamily="2" charset="2"/>
               <a:buChar char="v"/>
             </a:pPr>
             <a:r>
-              <a:rPr sz="1800" dirty="0">
+              <a:rPr sz="1400" dirty="0">
+                <a:solidFill>
+                  <a:schemeClr val="tx1">
+                    <a:lumMod val="95000"/>
+                    <a:lumOff val="5000"/>
+                  </a:schemeClr>
+                </a:solidFill>
                 <a:latin typeface="Calibri" panose="020F0502020204030204" pitchFamily="34" charset="0"/>
                 <a:cs typeface="Calibri" panose="020F0502020204030204" pitchFamily="34" charset="0"/>
               </a:rPr>
-              <a:t>5. Integrate CI/CD, package distribution, and telemetry for operational readiness.</a:t>
+              <a:t>Deferred to FYP-II: the cloud telemetry dashboard, and dirty-rectangle rendering as the next performance step.</a:t>
             </a:r>
           </a:p>
         </p:txBody>
@@ -19638,17 +19964,12 @@
             <a:pPr algn="ctr"/>
             <a:r>
               <a:rPr lang="en-US" dirty="0"/>
-              <a:t>Hamdard University </a:t>
+              <a:t>   Hamdard University </a:t>
             </a:r>
           </a:p>
         </p:txBody>
       </p:sp>
     </p:spTree>
-    <p:extLst>
-      <p:ext uri="{BB962C8B-B14F-4D97-AF65-F5344CB8AC3E}">
-        <p14:creationId xmlns:p14="http://schemas.microsoft.com/office/powerpoint/2010/main" val="1123375129"/>
-      </p:ext>
-    </p:extLst>
   </p:cSld>
   <p:clrMapOvr>
     <a:masterClrMapping/>
@@ -19689,8 +20010,8 @@
           <a:lstStyle/>
           <a:p>
             <a:r>
-              <a:rPr sz="2500" b="1"/>
-              <a:t>Project Plan - 4 Phases, 8 Meetings</a:t>
+              <a:rPr sz="2600" b="1"/>
+              <a:t>Our Methodology</a:t>
             </a:r>
           </a:p>
         </p:txBody>
@@ -19712,17 +20033,17 @@
           <a:p>
             <a:pPr>
               <a:lnSpc>
-                <a:spcPct val="112000"/>
+                <a:spcPct val="150000"/>
               </a:lnSpc>
               <a:buFont typeface="Wingdings" panose="05000000000000000000" pitchFamily="2" charset="2"/>
               <a:buChar char="v"/>
             </a:pPr>
             <a:r>
-              <a:rPr sz="1250" dirty="0">
+              <a:rPr sz="1800" dirty="0">
                 <a:latin typeface="Calibri" panose="020F0502020204030204" pitchFamily="34" charset="0"/>
                 <a:cs typeface="Calibri" panose="020F0502020204030204" pitchFamily="34" charset="0"/>
               </a:rPr>
-              <a:t>Phase 1 - Problem Definition &amp; Literature Review (M1 16 May, M2 23 May): present the problem, position FastGrid, agree scope; compare native DataGrid against DevExpress / Syncfusion / Telerik and immediate-mode drawing; confirm the stack.</a:t>
+              <a:t>1. Analyze WPF DataGrid rendering and identify performance bottlenecks.</a:t>
             </a:r>
             <a:endParaRPr lang="en-US" dirty="0">
               <a:latin typeface="Calibri" panose="020F0502020204030204" pitchFamily="34" charset="0"/>
@@ -19732,82 +20053,80 @@
           <a:p>
             <a:pPr>
               <a:lnSpc>
-                <a:spcPct val="112000"/>
+                <a:spcPct val="150000"/>
               </a:lnSpc>
               <a:buFont typeface="Wingdings" panose="05000000000000000000" pitchFamily="2" charset="2"/>
               <a:buChar char="v"/>
             </a:pPr>
             <a:r>
-              <a:rPr sz="1250" dirty="0">
+              <a:rPr sz="1800" dirty="0">
                 <a:latin typeface="Calibri" panose="020F0502020204030204" pitchFamily="34" charset="0"/>
                 <a:cs typeface="Calibri" panose="020F0502020204030204" pitchFamily="34" charset="0"/>
               </a:rPr>
-              <a:t>Phase 2 - Requirements &amp; SRS (M3 30 May, M4 15 Jun): functional requirements (render, sort, filter, group, select, style, buttons, tree, export, automation) and non-functional (sub-5 ms, 100k+ rows, usability, reliability, accessibility); use-case diagram, traceability, acceptance criteria; SRS signed off.</a:t>
-            </a:r>
-            <a:endParaRPr lang="en-US" dirty="0">
-              <a:latin typeface="Calibri" panose="020F0502020204030204" pitchFamily="34" charset="0"/>
-              <a:cs typeface="Calibri" panose="020F0502020204030204" pitchFamily="34" charset="0"/>
-            </a:endParaRPr>
+              <a:t>2. Design a layered architecture separating control, data, managers, rendering, and automation.</a:t>
+            </a:r>
           </a:p>
           <a:p>
             <a:pPr>
               <a:lnSpc>
-                <a:spcPct val="112000"/>
+                <a:spcPct val="150000"/>
               </a:lnSpc>
               <a:buFont typeface="Wingdings" panose="05000000000000000000" pitchFamily="2" charset="2"/>
               <a:buChar char="v"/>
             </a:pPr>
             <a:r>
-              <a:rPr sz="1250" dirty="0">
+              <a:rPr sz="1800" dirty="0">
                 <a:latin typeface="Calibri" panose="020F0502020204030204" pitchFamily="34" charset="0"/>
                 <a:cs typeface="Calibri" panose="020F0502020204030204" pitchFamily="34" charset="0"/>
               </a:rPr>
-              <a:t>Phase 3 - Architecture, Design &amp; DevOps (M5 27 Jun, M6 04 Jul): layered architecture, class diagram, paint-cycle sequence diagram, DFD levels 0-2; CI/CD pipeline architecture, deployment diagram, cloud registry and telemetry design.</a:t>
-            </a:r>
-            <a:endParaRPr lang="en-US" dirty="0">
-              <a:latin typeface="Calibri" panose="020F0502020204030204" pitchFamily="34" charset="0"/>
-              <a:cs typeface="Calibri" panose="020F0502020204030204" pitchFamily="34" charset="0"/>
-            </a:endParaRPr>
+              <a:t>3. Implement a </a:t>
+            </a:r>
+            <a:r>
+              <a:rPr sz="1800" dirty="0" err="1">
+                <a:latin typeface="Calibri" panose="020F0502020204030204" pitchFamily="34" charset="0"/>
+                <a:cs typeface="Calibri" panose="020F0502020204030204" pitchFamily="34" charset="0"/>
+              </a:rPr>
+              <a:t>SkiaSharp</a:t>
+            </a:r>
+            <a:r>
+              <a:rPr sz="1800" dirty="0">
+                <a:latin typeface="Calibri" panose="020F0502020204030204" pitchFamily="34" charset="0"/>
+                <a:cs typeface="Calibri" panose="020F0502020204030204" pitchFamily="34" charset="0"/>
+              </a:rPr>
+              <a:t> immediate-mode rendering prototype.</a:t>
+            </a:r>
           </a:p>
           <a:p>
             <a:pPr>
               <a:lnSpc>
-                <a:spcPct val="112000"/>
+                <a:spcPct val="150000"/>
               </a:lnSpc>
               <a:buFont typeface="Wingdings" panose="05000000000000000000" pitchFamily="2" charset="2"/>
               <a:buChar char="v"/>
             </a:pPr>
             <a:r>
-              <a:rPr sz="1250" dirty="0">
+              <a:rPr sz="1800" dirty="0">
                 <a:latin typeface="Calibri" panose="020F0502020204030204" pitchFamily="34" charset="0"/>
                 <a:cs typeface="Calibri" panose="020F0502020204030204" pitchFamily="34" charset="0"/>
               </a:rPr>
-              <a:t>Phase 4 - Implementation, Benchmark &amp; Demo (M7 11 Jul, M8 18 Jul): SkiaSharp canvas rendering a large dataset with virtualization, baseline GridMetrics capture, 552 unit tests, NuGet release v2.18.0, consolidated presentation and PoC demo to the panel.</a:t>
-            </a:r>
-            <a:endParaRPr lang="en-US" dirty="0">
-              <a:latin typeface="Calibri" panose="020F0502020204030204" pitchFamily="34" charset="0"/>
-              <a:cs typeface="Calibri" panose="020F0502020204030204" pitchFamily="34" charset="0"/>
-            </a:endParaRPr>
+              <a:t>4. Benchmark frame time and validate behavior using large datasets.</a:t>
+            </a:r>
           </a:p>
           <a:p>
             <a:pPr>
               <a:lnSpc>
-                <a:spcPct val="112000"/>
+                <a:spcPct val="150000"/>
               </a:lnSpc>
               <a:buFont typeface="Wingdings" panose="05000000000000000000" pitchFamily="2" charset="2"/>
               <a:buChar char="v"/>
             </a:pPr>
             <a:r>
-              <a:rPr sz="1250" dirty="0">
+              <a:rPr sz="1800" dirty="0">
                 <a:latin typeface="Calibri" panose="020F0502020204030204" pitchFamily="34" charset="0"/>
                 <a:cs typeface="Calibri" panose="020F0502020204030204" pitchFamily="34" charset="0"/>
               </a:rPr>
-              <a:t>All 8 meetings held and signed off by the supervisor (FYP Fortnightly Sign-off Sheet, project code 89223).</a:t>
-            </a:r>
-            <a:endParaRPr lang="en-US" dirty="0">
-              <a:latin typeface="Calibri" panose="020F0502020204030204" pitchFamily="34" charset="0"/>
-              <a:cs typeface="Calibri" panose="020F0502020204030204" pitchFamily="34" charset="0"/>
-            </a:endParaRPr>
+              <a:t>5. Integrate CI/CD, package distribution, and telemetry for operational readiness.</a:t>
+            </a:r>
           </a:p>
         </p:txBody>
       </p:sp>
@@ -19886,7 +20205,7 @@
     </p:spTree>
     <p:extLst>
       <p:ext uri="{BB962C8B-B14F-4D97-AF65-F5344CB8AC3E}">
-        <p14:creationId xmlns:p14="http://schemas.microsoft.com/office/powerpoint/2010/main" val="656654795"/>
+        <p14:creationId xmlns:p14="http://schemas.microsoft.com/office/powerpoint/2010/main" val="1123375129"/>
       </p:ext>
     </p:extLst>
   </p:cSld>
@@ -19930,7 +20249,7 @@
           <a:p>
             <a:r>
               <a:rPr sz="2600" b="1"/>
-              <a:t>Budget / Costing</a:t>
+              <a:t>Tools &amp; Technologies</a:t>
             </a:r>
           </a:p>
         </p:txBody>
@@ -19947,81 +20266,236 @@
         </p:nvSpPr>
         <p:spPr/>
         <p:txBody>
-          <a:bodyPr/>
+          <a:bodyPr>
+            <a:normAutofit/>
+          </a:bodyPr>
           <a:lstStyle/>
           <a:p>
             <a:pPr>
               <a:lnSpc>
-                <a:spcPct val="150000"/>
+                <a:spcPct val="126000"/>
               </a:lnSpc>
               <a:buFont typeface="Wingdings" panose="05000000000000000000" pitchFamily="2" charset="2"/>
               <a:buChar char="v"/>
             </a:pPr>
             <a:r>
-              <a:rPr sz="1800" dirty="0">
+              <a:rPr sz="1500" dirty="0">
+                <a:solidFill>
+                  <a:schemeClr val="tx1">
+                    <a:lumMod val="95000"/>
+                    <a:lumOff val="5000"/>
+                  </a:schemeClr>
+                </a:solidFill>
                 <a:latin typeface="Calibri" panose="020F0502020204030204" pitchFamily="34" charset="0"/>
                 <a:cs typeface="Calibri" panose="020F0502020204030204" pitchFamily="34" charset="0"/>
               </a:rPr>
-              <a:t>Development tools: primarily open-source / student-available tooling.</a:t>
-            </a:r>
-            <a:endParaRPr lang="en-US" dirty="0">
-              <a:latin typeface="Calibri" panose="020F0502020204030204" pitchFamily="34" charset="0"/>
-              <a:cs typeface="Calibri" panose="020F0502020204030204" pitchFamily="34" charset="0"/>
-            </a:endParaRPr>
+              <a:t>Language &amp; Runtime - C# on .NET 8 (net8.0-windows); WPF with XAML and the MVVM pattern.</a:t>
+            </a:r>
           </a:p>
           <a:p>
             <a:pPr>
               <a:lnSpc>
-                <a:spcPct val="150000"/>
+                <a:spcPct val="126000"/>
               </a:lnSpc>
               <a:buFont typeface="Wingdings" panose="05000000000000000000" pitchFamily="2" charset="2"/>
               <a:buChar char="v"/>
             </a:pPr>
             <a:r>
-              <a:rPr sz="1800" dirty="0" err="1">
+              <a:rPr sz="1500" dirty="0">
+                <a:solidFill>
+                  <a:schemeClr val="tx1">
+                    <a:lumMod val="95000"/>
+                    <a:lumOff val="5000"/>
+                  </a:schemeClr>
+                </a:solidFill>
                 <a:latin typeface="Calibri" panose="020F0502020204030204" pitchFamily="34" charset="0"/>
                 <a:cs typeface="Calibri" panose="020F0502020204030204" pitchFamily="34" charset="0"/>
               </a:rPr>
-              <a:t>SkiaSharp</a:t>
-            </a:r>
-            <a:r>
-              <a:rPr sz="1800" dirty="0">
-                <a:latin typeface="Calibri" panose="020F0502020204030204" pitchFamily="34" charset="0"/>
-                <a:cs typeface="Calibri" panose="020F0502020204030204" pitchFamily="34" charset="0"/>
-              </a:rPr>
-              <a:t>: open-source graphics library.</a:t>
+              <a:t>Rendering - SkiaSharp.Views.WPF 3.116.1 (SKElement) over the native Skia 2D graphics engine.</a:t>
             </a:r>
           </a:p>
           <a:p>
             <a:pPr>
               <a:lnSpc>
-                <a:spcPct val="150000"/>
+                <a:spcPct val="126000"/>
               </a:lnSpc>
               <a:buFont typeface="Wingdings" panose="05000000000000000000" pitchFamily="2" charset="2"/>
               <a:buChar char="v"/>
             </a:pPr>
             <a:r>
-              <a:rPr sz="1800" dirty="0">
+              <a:rPr sz="1500" dirty="0">
+                <a:solidFill>
+                  <a:schemeClr val="tx1">
+                    <a:lumMod val="95000"/>
+                    <a:lumOff val="5000"/>
+                  </a:schemeClr>
+                </a:solidFill>
                 <a:latin typeface="Calibri" panose="020F0502020204030204" pitchFamily="34" charset="0"/>
                 <a:cs typeface="Calibri" panose="020F0502020204030204" pitchFamily="34" charset="0"/>
               </a:rPr>
-              <a:t>Cloud resources: use low-cost/free-tier resources where available for CI/CD, registry, and telemetry proof-of-concept.</a:t>
+              <a:t>Testing - xUnit 2.5.3, NSubstitute 5.1.0, Coverlet, Microsoft.NET.Test.Sdk 17.8.0 (552 tests).</a:t>
             </a:r>
           </a:p>
           <a:p>
             <a:pPr>
               <a:lnSpc>
-                <a:spcPct val="150000"/>
+                <a:spcPct val="126000"/>
               </a:lnSpc>
               <a:buFont typeface="Wingdings" panose="05000000000000000000" pitchFamily="2" charset="2"/>
               <a:buChar char="v"/>
             </a:pPr>
             <a:r>
-              <a:rPr sz="1800" dirty="0">
+              <a:rPr sz="1500" dirty="0">
+                <a:solidFill>
+                  <a:schemeClr val="tx1">
+                    <a:lumMod val="95000"/>
+                    <a:lumOff val="5000"/>
+                  </a:schemeClr>
+                </a:solidFill>
                 <a:latin typeface="Calibri" panose="020F0502020204030204" pitchFamily="34" charset="0"/>
                 <a:cs typeface="Calibri" panose="020F0502020204030204" pitchFamily="34" charset="0"/>
               </a:rPr>
-              <a:t>Expected FYP-I cost: minimal; exact cloud cost depends on selected services and usage.</a:t>
+              <a:t>Accessibility - .NET UI Automation (AutomationPeer framework).</a:t>
+            </a:r>
+          </a:p>
+          <a:p>
+            <a:pPr>
+              <a:lnSpc>
+                <a:spcPct val="126000"/>
+              </a:lnSpc>
+              <a:buFont typeface="Wingdings" panose="05000000000000000000" pitchFamily="2" charset="2"/>
+              <a:buChar char="v"/>
+            </a:pPr>
+            <a:r>
+              <a:rPr sz="1500" dirty="0">
+                <a:solidFill>
+                  <a:schemeClr val="tx1">
+                    <a:lumMod val="95000"/>
+                    <a:lumOff val="5000"/>
+                  </a:schemeClr>
+                </a:solidFill>
+                <a:latin typeface="Calibri" panose="020F0502020204030204" pitchFamily="34" charset="0"/>
+                <a:cs typeface="Calibri" panose="020F0502020204030204" pitchFamily="34" charset="0"/>
+              </a:rPr>
+              <a:t>CI/CD - GitHub Actions: build, test, pack and publish, gated on a green test run.</a:t>
+            </a:r>
+          </a:p>
+          <a:p>
+            <a:pPr>
+              <a:lnSpc>
+                <a:spcPct val="126000"/>
+              </a:lnSpc>
+              <a:buFont typeface="Wingdings" panose="05000000000000000000" pitchFamily="2" charset="2"/>
+              <a:buChar char="v"/>
+            </a:pPr>
+            <a:r>
+              <a:rPr sz="1500" dirty="0">
+                <a:solidFill>
+                  <a:schemeClr val="tx1">
+                    <a:lumMod val="95000"/>
+                    <a:lumOff val="5000"/>
+                  </a:schemeClr>
+                </a:solidFill>
+                <a:latin typeface="Calibri" panose="020F0502020204030204" pitchFamily="34" charset="0"/>
+                <a:cs typeface="Calibri" panose="020F0502020204030204" pitchFamily="34" charset="0"/>
+              </a:rPr>
+              <a:t>Source control &amp; Packaging - Git / GitHub (</a:t>
+            </a:r>
+            <a:r>
+              <a:rPr lang="en-US" sz="1500" dirty="0" err="1">
+                <a:solidFill>
+                  <a:schemeClr val="tx1">
+                    <a:lumMod val="95000"/>
+                    <a:lumOff val="5000"/>
+                  </a:schemeClr>
+                </a:solidFill>
+                <a:latin typeface="Calibri" panose="020F0502020204030204" pitchFamily="34" charset="0"/>
+                <a:cs typeface="Calibri" panose="020F0502020204030204" pitchFamily="34" charset="0"/>
+              </a:rPr>
+              <a:t>Bilalahmedsd</a:t>
+            </a:r>
+            <a:r>
+              <a:rPr sz="1500" dirty="0">
+                <a:solidFill>
+                  <a:schemeClr val="tx1">
+                    <a:lumMod val="95000"/>
+                    <a:lumOff val="5000"/>
+                  </a:schemeClr>
+                </a:solidFill>
+                <a:latin typeface="Calibri" panose="020F0502020204030204" pitchFamily="34" charset="0"/>
+                <a:cs typeface="Calibri" panose="020F0502020204030204" pitchFamily="34" charset="0"/>
+              </a:rPr>
+              <a:t>/SkiaGrid); NuGet package SkiaSharpControlV2 v</a:t>
+            </a:r>
+            <a:r>
+              <a:rPr lang="en-US" sz="1500" dirty="0">
+                <a:solidFill>
+                  <a:schemeClr val="tx1">
+                    <a:lumMod val="95000"/>
+                    <a:lumOff val="5000"/>
+                  </a:schemeClr>
+                </a:solidFill>
+                <a:latin typeface="Calibri" panose="020F0502020204030204" pitchFamily="34" charset="0"/>
+                <a:cs typeface="Calibri" panose="020F0502020204030204" pitchFamily="34" charset="0"/>
+              </a:rPr>
+              <a:t>1.0.2</a:t>
+            </a:r>
+            <a:r>
+              <a:rPr sz="1500" dirty="0">
+                <a:solidFill>
+                  <a:schemeClr val="tx1">
+                    <a:lumMod val="95000"/>
+                    <a:lumOff val="5000"/>
+                  </a:schemeClr>
+                </a:solidFill>
+                <a:latin typeface="Calibri" panose="020F0502020204030204" pitchFamily="34" charset="0"/>
+                <a:cs typeface="Calibri" panose="020F0502020204030204" pitchFamily="34" charset="0"/>
+              </a:rPr>
+              <a:t>, MIT licence.</a:t>
+            </a:r>
+          </a:p>
+          <a:p>
+            <a:pPr>
+              <a:lnSpc>
+                <a:spcPct val="126000"/>
+              </a:lnSpc>
+              <a:buFont typeface="Wingdings" panose="05000000000000000000" pitchFamily="2" charset="2"/>
+              <a:buChar char="v"/>
+            </a:pPr>
+            <a:r>
+              <a:rPr sz="1500" dirty="0">
+                <a:solidFill>
+                  <a:schemeClr val="tx1">
+                    <a:lumMod val="95000"/>
+                    <a:lumOff val="5000"/>
+                  </a:schemeClr>
+                </a:solidFill>
+                <a:latin typeface="Calibri" panose="020F0502020204030204" pitchFamily="34" charset="0"/>
+                <a:cs typeface="Calibri" panose="020F0502020204030204" pitchFamily="34" charset="0"/>
+              </a:rPr>
+              <a:t>Design &amp; Documentation - draw.io (diagrams.net) for architecture, DFD, Gantt and deployment charts.</a:t>
+            </a:r>
+          </a:p>
+          <a:p>
+            <a:pPr>
+              <a:lnSpc>
+                <a:spcPct val="126000"/>
+              </a:lnSpc>
+              <a:buFont typeface="Wingdings" panose="05000000000000000000" pitchFamily="2" charset="2"/>
+              <a:buChar char="v"/>
+            </a:pPr>
+            <a:r>
+              <a:rPr sz="1500" dirty="0">
+                <a:solidFill>
+                  <a:schemeClr val="tx1">
+                    <a:lumMod val="95000"/>
+                    <a:lumOff val="5000"/>
+                  </a:schemeClr>
+                </a:solidFill>
+                <a:latin typeface="Calibri" panose="020F0502020204030204" pitchFamily="34" charset="0"/>
+                <a:cs typeface="Calibri" panose="020F0502020204030204" pitchFamily="34" charset="0"/>
+              </a:rPr>
+              <a:t>Profiling - built-in GridMetrics instrumentation (Stopwatch scopes, counters, p50/p95/p99) with a live Performance Dashboard.</a:t>
             </a:r>
           </a:p>
         </p:txBody>
@@ -20093,17 +20567,12 @@
             <a:pPr algn="ctr"/>
             <a:r>
               <a:rPr lang="en-US" dirty="0"/>
-              <a:t>Hamdard University </a:t>
+              <a:t>   Hamdard University </a:t>
             </a:r>
           </a:p>
         </p:txBody>
       </p:sp>
     </p:spTree>
-    <p:extLst>
-      <p:ext uri="{BB962C8B-B14F-4D97-AF65-F5344CB8AC3E}">
-        <p14:creationId xmlns:p14="http://schemas.microsoft.com/office/powerpoint/2010/main" val="88316679"/>
-      </p:ext>
-    </p:extLst>
   </p:cSld>
   <p:clrMapOvr>
     <a:masterClrMapping/>
@@ -20144,8 +20613,8 @@
           <a:lstStyle/>
           <a:p>
             <a:r>
-              <a:rPr sz="2600" b="1"/>
-              <a:t>FYP Deliverables</a:t>
+              <a:rPr sz="2500" b="1"/>
+              <a:t>Project Plan - 4 Phases, 8 Meetings</a:t>
             </a:r>
           </a:p>
         </p:txBody>
@@ -20166,15 +20635,18 @@
           <a:lstStyle/>
           <a:p>
             <a:pPr>
+              <a:lnSpc>
+                <a:spcPct val="112000"/>
+              </a:lnSpc>
               <a:buFont typeface="Wingdings" panose="05000000000000000000" pitchFamily="2" charset="2"/>
               <a:buChar char="v"/>
             </a:pPr>
             <a:r>
-              <a:rPr sz="1500" dirty="0" err="1">
+              <a:rPr sz="1250" dirty="0">
                 <a:latin typeface="Calibri" panose="020F0502020204030204" pitchFamily="34" charset="0"/>
                 <a:cs typeface="Calibri" panose="020F0502020204030204" pitchFamily="34" charset="0"/>
               </a:rPr>
-              <a:t>FastGrid WPF library, packaged as NuGet SkiaSharpControlV2 v2.18.0 (MIT).</a:t>
+              <a:t>Phase 1 - Problem Definition &amp; Literature Review (M1 16 May, M2 23 May): present the problem, position FastGrid, agree scope; compare native DataGrid against DevExpress / Syncfusion / Telerik and immediate-mode drawing; confirm the stack.</a:t>
             </a:r>
             <a:endParaRPr lang="en-US" dirty="0">
               <a:latin typeface="Calibri" panose="020F0502020204030204" pitchFamily="34" charset="0"/>
@@ -20183,15 +20655,18 @@
           </a:p>
           <a:p>
             <a:pPr>
+              <a:lnSpc>
+                <a:spcPct val="112000"/>
+              </a:lnSpc>
               <a:buFont typeface="Wingdings" panose="05000000000000000000" pitchFamily="2" charset="2"/>
               <a:buChar char="v"/>
             </a:pPr>
             <a:r>
-              <a:rPr sz="1500" dirty="0" err="1">
+              <a:rPr sz="1250" dirty="0">
                 <a:latin typeface="Calibri" panose="020F0502020204030204" pitchFamily="34" charset="0"/>
                 <a:cs typeface="Calibri" panose="020F0502020204030204" pitchFamily="34" charset="0"/>
               </a:rPr>
-              <a:t>SkiaSharp-based immediate-mode grid renderer with 552 automated unit tests.</a:t>
+              <a:t>Phase 2 - Requirements &amp; SRS (M3 30 May, M4 15 Jun): functional requirements (render, sort, filter, group, select, style, buttons, tree, export, automation) and non-functional (sub-5 ms, 100k+ rows, usability, reliability, accessibility); use-case diagram, traceability, acceptance criteria; SRS signed off.</a:t>
             </a:r>
             <a:endParaRPr lang="en-US" dirty="0">
               <a:latin typeface="Calibri" panose="020F0502020204030204" pitchFamily="34" charset="0"/>
@@ -20200,15 +20675,18 @@
           </a:p>
           <a:p>
             <a:pPr>
+              <a:lnSpc>
+                <a:spcPct val="112000"/>
+              </a:lnSpc>
               <a:buFont typeface="Wingdings" panose="05000000000000000000" pitchFamily="2" charset="2"/>
               <a:buChar char="v"/>
             </a:pPr>
             <a:r>
-              <a:rPr sz="1500" dirty="0" err="1">
+              <a:rPr sz="1250" dirty="0">
                 <a:latin typeface="Calibri" panose="020F0502020204030204" pitchFamily="34" charset="0"/>
                 <a:cs typeface="Calibri" panose="020F0502020204030204" pitchFamily="34" charset="0"/>
               </a:rPr>
-              <a:t>Data/view and grid-management components, plus UI Automation accessibility support.</a:t>
+              <a:t>Phase 3 - Architecture, Design &amp; DevOps (M5 27 Jun, M6 04 Jul): layered architecture, class diagram, paint-cycle sequence diagram, DFD levels 0-2; CI/CD pipeline architecture, deployment diagram, cloud registry and telemetry design.</a:t>
             </a:r>
             <a:endParaRPr lang="en-US" dirty="0">
               <a:latin typeface="Calibri" panose="020F0502020204030204" pitchFamily="34" charset="0"/>
@@ -20217,15 +20695,18 @@
           </a:p>
           <a:p>
             <a:pPr>
+              <a:lnSpc>
+                <a:spcPct val="112000"/>
+              </a:lnSpc>
               <a:buFont typeface="Wingdings" panose="05000000000000000000" pitchFamily="2" charset="2"/>
               <a:buChar char="v"/>
             </a:pPr>
             <a:r>
-              <a:rPr sz="1500" dirty="0" err="1">
+              <a:rPr sz="1250" dirty="0">
                 <a:latin typeface="Calibri" panose="020F0502020204030204" pitchFamily="34" charset="0"/>
                 <a:cs typeface="Calibri" panose="020F0502020204030204" pitchFamily="34" charset="0"/>
               </a:rPr>
-              <a:t>Measured performance evidence: 2.59 ms at 100,000 rows and 2.75 ms at 1,000,000 rows.</a:t>
+              <a:t>Phase 4 - Implementation, Benchmark &amp; Demo (M7 11 Jul, M8 18 Jul): SkiaSharp canvas rendering a large dataset with virtualization, baseline GridMetrics capture, 552 unit tests, NuGet release v2.18.0, consolidated presentation and PoC demo to the panel.</a:t>
             </a:r>
             <a:endParaRPr lang="en-US" dirty="0">
               <a:latin typeface="Calibri" panose="020F0502020204030204" pitchFamily="34" charset="0"/>
@@ -20234,32 +20715,18 @@
           </a:p>
           <a:p>
             <a:pPr>
+              <a:lnSpc>
+                <a:spcPct val="112000"/>
+              </a:lnSpc>
               <a:buFont typeface="Wingdings" panose="05000000000000000000" pitchFamily="2" charset="2"/>
               <a:buChar char="v"/>
             </a:pPr>
             <a:r>
-              <a:rPr sz="1500" dirty="0" err="1">
+              <a:rPr sz="1250" dirty="0">
                 <a:latin typeface="Calibri" panose="020F0502020204030204" pitchFamily="34" charset="0"/>
                 <a:cs typeface="Calibri" panose="020F0502020204030204" pitchFamily="34" charset="0"/>
               </a:rPr>
-              <a:t>GitHub Actions CI/CD workflow and NuGet distribution.</a:t>
-            </a:r>
-            <a:endParaRPr lang="en-US" dirty="0">
-              <a:latin typeface="Calibri" panose="020F0502020204030204" pitchFamily="34" charset="0"/>
-              <a:cs typeface="Calibri" panose="020F0502020204030204" pitchFamily="34" charset="0"/>
-            </a:endParaRPr>
-          </a:p>
-          <a:p>
-            <a:pPr>
-              <a:buFont typeface="Wingdings" panose="05000000000000000000" pitchFamily="2" charset="2"/>
-              <a:buChar char="v"/>
-            </a:pPr>
-            <a:r>
-              <a:rPr sz="1500" dirty="0" err="1">
-                <a:latin typeface="Calibri" panose="020F0502020204030204" pitchFamily="34" charset="0"/>
-                <a:cs typeface="Calibri" panose="020F0502020204030204" pitchFamily="34" charset="0"/>
-              </a:rPr>
-              <a:t>Documentation set: SRS, architecture diagram, DFD levels 0-2, deployment flow chart, Gantt chart, and a 306-member property/API reference.</a:t>
+              <a:t>All 8 meetings held and signed off by the supervisor (FYP Fortnightly Sign-off Sheet, project code 89223).</a:t>
             </a:r>
             <a:endParaRPr lang="en-US" dirty="0">
               <a:latin typeface="Calibri" panose="020F0502020204030204" pitchFamily="34" charset="0"/>
@@ -20340,38 +20807,10 @@
           </a:p>
         </p:txBody>
       </p:sp>
-      <p:graphicFrame>
-        <p:nvGraphicFramePr>
-          <p:cNvPr id="25" name="Diagram 24">
-            <a:extLst>
-              <a:ext uri="{FF2B5EF4-FFF2-40B4-BE49-F238E27FC236}">
-                <a16:creationId xmlns:a16="http://schemas.microsoft.com/office/drawing/2014/main" id="{9CF80D84-4E42-8495-2E07-02E06D4FD473}"/>
-              </a:ext>
-            </a:extLst>
-          </p:cNvPr>
-          <p:cNvGraphicFramePr/>
-          <p:nvPr>
-            <p:extLst>
-              <p:ext uri="{D42A27DB-BD31-4B8C-83A1-F6EECF244321}">
-                <p14:modId xmlns:p14="http://schemas.microsoft.com/office/powerpoint/2010/main" val="1096193165"/>
-              </p:ext>
-            </p:extLst>
-          </p:nvPr>
-        </p:nvGraphicFramePr>
-        <p:xfrm>
-          <a:off x="2555748" y="3652935"/>
-          <a:ext cx="4267200" cy="2819400"/>
-        </p:xfrm>
-        <a:graphic>
-          <a:graphicData uri="http://schemas.openxmlformats.org/drawingml/2006/diagram">
-            <dgm:relIds xmlns:dgm="http://schemas.openxmlformats.org/drawingml/2006/diagram" xmlns:r="http://schemas.openxmlformats.org/officeDocument/2006/relationships" r:dm="rId2" r:lo="rId3" r:qs="rId4" r:cs="rId5"/>
-          </a:graphicData>
-        </a:graphic>
-      </p:graphicFrame>
     </p:spTree>
     <p:extLst>
       <p:ext uri="{BB962C8B-B14F-4D97-AF65-F5344CB8AC3E}">
-        <p14:creationId xmlns:p14="http://schemas.microsoft.com/office/powerpoint/2010/main" val="1601842832"/>
+        <p14:creationId xmlns:p14="http://schemas.microsoft.com/office/powerpoint/2010/main" val="656654795"/>
       </p:ext>
     </p:extLst>
   </p:cSld>
